--- a/1.8 Transport Layer/1.8 Transport Layer.pptx
+++ b/1.8 Transport Layer/1.8 Transport Layer.pptx
@@ -11,6 +11,28 @@
     <p:sldId id="259" r:id="rId5"/>
     <p:sldId id="260" r:id="rId6"/>
     <p:sldId id="261" r:id="rId7"/>
+    <p:sldId id="262" r:id="rId8"/>
+    <p:sldId id="263" r:id="rId9"/>
+    <p:sldId id="264" r:id="rId10"/>
+    <p:sldId id="265" r:id="rId11"/>
+    <p:sldId id="266" r:id="rId12"/>
+    <p:sldId id="267" r:id="rId13"/>
+    <p:sldId id="268" r:id="rId14"/>
+    <p:sldId id="269" r:id="rId15"/>
+    <p:sldId id="270" r:id="rId16"/>
+    <p:sldId id="271" r:id="rId17"/>
+    <p:sldId id="272" r:id="rId18"/>
+    <p:sldId id="273" r:id="rId19"/>
+    <p:sldId id="274" r:id="rId20"/>
+    <p:sldId id="275" r:id="rId21"/>
+    <p:sldId id="276" r:id="rId22"/>
+    <p:sldId id="277" r:id="rId23"/>
+    <p:sldId id="279" r:id="rId24"/>
+    <p:sldId id="280" r:id="rId25"/>
+    <p:sldId id="281" r:id="rId26"/>
+    <p:sldId id="282" r:id="rId27"/>
+    <p:sldId id="283" r:id="rId28"/>
+    <p:sldId id="278" r:id="rId29"/>
   </p:sldIdLst>
   <p:sldSz cx="12192000" cy="6858000"/>
   <p:notesSz cx="6858000" cy="9144000"/>
@@ -259,7 +281,7 @@
           <a:p>
             <a:fld id="{F3DF6F99-26EF-44A0-AB0C-04C766CF99AB}" type="datetimeFigureOut">
               <a:rPr lang="ru-RU" smtClean="0"/>
-              <a:t>01.09.2026</a:t>
+              <a:t>06.09.2026</a:t>
             </a:fld>
             <a:endParaRPr lang="ru-RU"/>
           </a:p>
@@ -429,7 +451,7 @@
           <a:p>
             <a:fld id="{F3DF6F99-26EF-44A0-AB0C-04C766CF99AB}" type="datetimeFigureOut">
               <a:rPr lang="ru-RU" smtClean="0"/>
-              <a:t>01.09.2026</a:t>
+              <a:t>06.09.2026</a:t>
             </a:fld>
             <a:endParaRPr lang="ru-RU"/>
           </a:p>
@@ -609,7 +631,7 @@
           <a:p>
             <a:fld id="{F3DF6F99-26EF-44A0-AB0C-04C766CF99AB}" type="datetimeFigureOut">
               <a:rPr lang="ru-RU" smtClean="0"/>
-              <a:t>01.09.2026</a:t>
+              <a:t>06.09.2026</a:t>
             </a:fld>
             <a:endParaRPr lang="ru-RU"/>
           </a:p>
@@ -779,7 +801,7 @@
           <a:p>
             <a:fld id="{F3DF6F99-26EF-44A0-AB0C-04C766CF99AB}" type="datetimeFigureOut">
               <a:rPr lang="ru-RU" smtClean="0"/>
-              <a:t>01.09.2026</a:t>
+              <a:t>06.09.2026</a:t>
             </a:fld>
             <a:endParaRPr lang="ru-RU"/>
           </a:p>
@@ -1025,7 +1047,7 @@
           <a:p>
             <a:fld id="{F3DF6F99-26EF-44A0-AB0C-04C766CF99AB}" type="datetimeFigureOut">
               <a:rPr lang="ru-RU" smtClean="0"/>
-              <a:t>01.09.2026</a:t>
+              <a:t>06.09.2026</a:t>
             </a:fld>
             <a:endParaRPr lang="ru-RU"/>
           </a:p>
@@ -1257,7 +1279,7 @@
           <a:p>
             <a:fld id="{F3DF6F99-26EF-44A0-AB0C-04C766CF99AB}" type="datetimeFigureOut">
               <a:rPr lang="ru-RU" smtClean="0"/>
-              <a:t>01.09.2026</a:t>
+              <a:t>06.09.2026</a:t>
             </a:fld>
             <a:endParaRPr lang="ru-RU"/>
           </a:p>
@@ -1624,7 +1646,7 @@
           <a:p>
             <a:fld id="{F3DF6F99-26EF-44A0-AB0C-04C766CF99AB}" type="datetimeFigureOut">
               <a:rPr lang="ru-RU" smtClean="0"/>
-              <a:t>01.09.2026</a:t>
+              <a:t>06.09.2026</a:t>
             </a:fld>
             <a:endParaRPr lang="ru-RU"/>
           </a:p>
@@ -1742,7 +1764,7 @@
           <a:p>
             <a:fld id="{F3DF6F99-26EF-44A0-AB0C-04C766CF99AB}" type="datetimeFigureOut">
               <a:rPr lang="ru-RU" smtClean="0"/>
-              <a:t>01.09.2026</a:t>
+              <a:t>06.09.2026</a:t>
             </a:fld>
             <a:endParaRPr lang="ru-RU"/>
           </a:p>
@@ -1837,7 +1859,7 @@
           <a:p>
             <a:fld id="{F3DF6F99-26EF-44A0-AB0C-04C766CF99AB}" type="datetimeFigureOut">
               <a:rPr lang="ru-RU" smtClean="0"/>
-              <a:t>01.09.2026</a:t>
+              <a:t>06.09.2026</a:t>
             </a:fld>
             <a:endParaRPr lang="ru-RU"/>
           </a:p>
@@ -2114,7 +2136,7 @@
           <a:p>
             <a:fld id="{F3DF6F99-26EF-44A0-AB0C-04C766CF99AB}" type="datetimeFigureOut">
               <a:rPr lang="ru-RU" smtClean="0"/>
-              <a:t>01.09.2026</a:t>
+              <a:t>06.09.2026</a:t>
             </a:fld>
             <a:endParaRPr lang="ru-RU"/>
           </a:p>
@@ -2367,7 +2389,7 @@
           <a:p>
             <a:fld id="{F3DF6F99-26EF-44A0-AB0C-04C766CF99AB}" type="datetimeFigureOut">
               <a:rPr lang="ru-RU" smtClean="0"/>
-              <a:t>01.09.2026</a:t>
+              <a:t>06.09.2026</a:t>
             </a:fld>
             <a:endParaRPr lang="ru-RU"/>
           </a:p>
@@ -2580,7 +2602,7 @@
           <a:p>
             <a:fld id="{F3DF6F99-26EF-44A0-AB0C-04C766CF99AB}" type="datetimeFigureOut">
               <a:rPr lang="ru-RU" smtClean="0"/>
-              <a:t>01.09.2026</a:t>
+              <a:t>06.09.2026</a:t>
             </a:fld>
             <a:endParaRPr lang="ru-RU"/>
           </a:p>
@@ -3025,6 +3047,1514 @@
 </p:sld>
 </file>
 
+<file path=ppt/slides/slide10.xml><?xml version="1.0" encoding="utf-8"?>
+<p:sld xmlns:a="http://schemas.openxmlformats.org/drawingml/2006/main" xmlns:r="http://schemas.openxmlformats.org/officeDocument/2006/relationships" xmlns:p="http://schemas.openxmlformats.org/presentationml/2006/main">
+  <p:cSld>
+    <p:spTree>
+      <p:nvGrpSpPr>
+        <p:cNvPr id="1" name=""/>
+        <p:cNvGrpSpPr/>
+        <p:nvPr/>
+      </p:nvGrpSpPr>
+      <p:grpSpPr>
+        <a:xfrm>
+          <a:off x="0" y="0"/>
+          <a:ext cx="0" cy="0"/>
+          <a:chOff x="0" y="0"/>
+          <a:chExt cx="0" cy="0"/>
+        </a:xfrm>
+      </p:grpSpPr>
+      <p:sp>
+        <p:nvSpPr>
+          <p:cNvPr id="2" name="Заголовок 1"/>
+          <p:cNvSpPr>
+            <a:spLocks noGrp="1"/>
+          </p:cNvSpPr>
+          <p:nvPr>
+            <p:ph type="title"/>
+          </p:nvPr>
+        </p:nvSpPr>
+        <p:spPr/>
+        <p:txBody>
+          <a:bodyPr/>
+          <a:lstStyle/>
+          <a:p>
+            <a:r>
+              <a:rPr lang="en-US" b="1" dirty="0" smtClean="0"/>
+              <a:t>TCP. </a:t>
+            </a:r>
+            <a:r>
+              <a:rPr lang="ru-RU" b="1" dirty="0" smtClean="0"/>
+              <a:t>Завершение соединения</a:t>
+            </a:r>
+            <a:endParaRPr lang="ru-RU" b="1" dirty="0"/>
+          </a:p>
+        </p:txBody>
+      </p:sp>
+      <p:pic>
+        <p:nvPicPr>
+          <p:cNvPr id="5" name="Объект 4"/>
+          <p:cNvPicPr>
+            <a:picLocks noGrp="1" noChangeAspect="1"/>
+          </p:cNvPicPr>
+          <p:nvPr>
+            <p:ph sz="half" idx="1"/>
+          </p:nvPr>
+        </p:nvPicPr>
+        <p:blipFill>
+          <a:blip r:embed="rId2"/>
+          <a:stretch>
+            <a:fillRect/>
+          </a:stretch>
+        </p:blipFill>
+        <p:spPr>
+          <a:xfrm>
+            <a:off x="534865" y="2341693"/>
+            <a:ext cx="5561135" cy="3232692"/>
+          </a:xfrm>
+          <a:prstGeom prst="rect">
+            <a:avLst/>
+          </a:prstGeom>
+        </p:spPr>
+      </p:pic>
+      <p:sp>
+        <p:nvSpPr>
+          <p:cNvPr id="4" name="Объект 3"/>
+          <p:cNvSpPr>
+            <a:spLocks noGrp="1"/>
+          </p:cNvSpPr>
+          <p:nvPr>
+            <p:ph sz="half" idx="2"/>
+          </p:nvPr>
+        </p:nvSpPr>
+        <p:spPr/>
+        <p:txBody>
+          <a:bodyPr/>
+          <a:lstStyle/>
+          <a:p>
+            <a:pPr marL="514350" indent="-514350">
+              <a:buFont typeface="+mj-lt"/>
+              <a:buAutoNum type="arabicPeriod"/>
+            </a:pPr>
+            <a:r>
+              <a:rPr lang="ru-RU" dirty="0" smtClean="0"/>
+              <a:t>Узел А отправляет сегмент с флагом </a:t>
+            </a:r>
+            <a:r>
+              <a:rPr lang="en-US" dirty="0" smtClean="0"/>
+              <a:t>FIN.</a:t>
+            </a:r>
+            <a:endParaRPr lang="ru-RU" dirty="0" smtClean="0"/>
+          </a:p>
+          <a:p>
+            <a:pPr marL="514350" indent="-514350">
+              <a:buFont typeface="+mj-lt"/>
+              <a:buAutoNum type="arabicPeriod"/>
+            </a:pPr>
+            <a:r>
+              <a:rPr lang="ru-RU" dirty="0" smtClean="0"/>
+              <a:t>Узел В подтверждает завершение флагом </a:t>
+            </a:r>
+            <a:r>
+              <a:rPr lang="en-US" dirty="0" smtClean="0"/>
+              <a:t>ACK.</a:t>
+            </a:r>
+          </a:p>
+          <a:p>
+            <a:pPr marL="514350" indent="-514350">
+              <a:buFont typeface="+mj-lt"/>
+              <a:buAutoNum type="arabicPeriod"/>
+            </a:pPr>
+            <a:r>
+              <a:rPr lang="ru-RU" dirty="0" smtClean="0"/>
+              <a:t>Когда узел В понимает, что у него тоже больше нет данных – он отправляет сегмент с флагом </a:t>
+            </a:r>
+            <a:r>
+              <a:rPr lang="en-US" dirty="0" smtClean="0"/>
+              <a:t>FIN.</a:t>
+            </a:r>
+          </a:p>
+          <a:p>
+            <a:pPr marL="514350" indent="-514350">
+              <a:buFont typeface="+mj-lt"/>
+              <a:buAutoNum type="arabicPeriod"/>
+            </a:pPr>
+            <a:r>
+              <a:rPr lang="ru-RU" dirty="0" smtClean="0"/>
+              <a:t>Узел А подтверждает завершение флагом </a:t>
+            </a:r>
+            <a:r>
+              <a:rPr lang="en-US" dirty="0" smtClean="0"/>
+              <a:t>ACK.</a:t>
+            </a:r>
+          </a:p>
+          <a:p>
+            <a:pPr marL="514350" indent="-514350">
+              <a:buFont typeface="+mj-lt"/>
+              <a:buAutoNum type="arabicPeriod"/>
+            </a:pPr>
+            <a:endParaRPr lang="ru-RU" dirty="0"/>
+          </a:p>
+        </p:txBody>
+      </p:sp>
+    </p:spTree>
+    <p:extLst>
+      <p:ext uri="{BB962C8B-B14F-4D97-AF65-F5344CB8AC3E}">
+        <p14:creationId xmlns:p14="http://schemas.microsoft.com/office/powerpoint/2010/main" val="3365459545"/>
+      </p:ext>
+    </p:extLst>
+  </p:cSld>
+  <p:clrMapOvr>
+    <a:masterClrMapping/>
+  </p:clrMapOvr>
+</p:sld>
+</file>
+
+<file path=ppt/slides/slide11.xml><?xml version="1.0" encoding="utf-8"?>
+<p:sld xmlns:a="http://schemas.openxmlformats.org/drawingml/2006/main" xmlns:r="http://schemas.openxmlformats.org/officeDocument/2006/relationships" xmlns:p="http://schemas.openxmlformats.org/presentationml/2006/main">
+  <p:cSld>
+    <p:spTree>
+      <p:nvGrpSpPr>
+        <p:cNvPr id="1" name=""/>
+        <p:cNvGrpSpPr/>
+        <p:nvPr/>
+      </p:nvGrpSpPr>
+      <p:grpSpPr>
+        <a:xfrm>
+          <a:off x="0" y="0"/>
+          <a:ext cx="0" cy="0"/>
+          <a:chOff x="0" y="0"/>
+          <a:chExt cx="0" cy="0"/>
+        </a:xfrm>
+      </p:grpSpPr>
+      <p:sp>
+        <p:nvSpPr>
+          <p:cNvPr id="2" name="Заголовок 1"/>
+          <p:cNvSpPr>
+            <a:spLocks noGrp="1"/>
+          </p:cNvSpPr>
+          <p:nvPr>
+            <p:ph type="title"/>
+          </p:nvPr>
+        </p:nvSpPr>
+        <p:spPr>
+          <a:xfrm>
+            <a:off x="838200" y="365125"/>
+            <a:ext cx="10515600" cy="610821"/>
+          </a:xfrm>
+        </p:spPr>
+        <p:txBody>
+          <a:bodyPr>
+            <a:normAutofit fontScale="90000"/>
+          </a:bodyPr>
+          <a:lstStyle/>
+          <a:p>
+            <a:r>
+              <a:rPr lang="ru-RU" b="1" dirty="0" smtClean="0"/>
+              <a:t>Надежная передача</a:t>
+            </a:r>
+            <a:r>
+              <a:rPr lang="en-US" b="1" dirty="0" smtClean="0"/>
+              <a:t>: Stop-and-Wait</a:t>
+            </a:r>
+            <a:endParaRPr lang="ru-RU" b="1" dirty="0"/>
+          </a:p>
+        </p:txBody>
+      </p:sp>
+      <p:pic>
+        <p:nvPicPr>
+          <p:cNvPr id="6" name="Объект 5"/>
+          <p:cNvPicPr>
+            <a:picLocks noGrp="1" noChangeAspect="1"/>
+          </p:cNvPicPr>
+          <p:nvPr>
+            <p:ph idx="1"/>
+          </p:nvPr>
+        </p:nvPicPr>
+        <p:blipFill>
+          <a:blip r:embed="rId2"/>
+          <a:stretch>
+            <a:fillRect/>
+          </a:stretch>
+        </p:blipFill>
+        <p:spPr>
+          <a:xfrm>
+            <a:off x="2891204" y="975946"/>
+            <a:ext cx="6409592" cy="5862432"/>
+          </a:xfrm>
+          <a:prstGeom prst="rect">
+            <a:avLst/>
+          </a:prstGeom>
+        </p:spPr>
+      </p:pic>
+    </p:spTree>
+    <p:extLst>
+      <p:ext uri="{BB962C8B-B14F-4D97-AF65-F5344CB8AC3E}">
+        <p14:creationId xmlns:p14="http://schemas.microsoft.com/office/powerpoint/2010/main" val="4159740227"/>
+      </p:ext>
+    </p:extLst>
+  </p:cSld>
+  <p:clrMapOvr>
+    <a:masterClrMapping/>
+  </p:clrMapOvr>
+</p:sld>
+</file>
+
+<file path=ppt/slides/slide12.xml><?xml version="1.0" encoding="utf-8"?>
+<p:sld xmlns:a="http://schemas.openxmlformats.org/drawingml/2006/main" xmlns:r="http://schemas.openxmlformats.org/officeDocument/2006/relationships" xmlns:p="http://schemas.openxmlformats.org/presentationml/2006/main">
+  <p:cSld>
+    <p:spTree>
+      <p:nvGrpSpPr>
+        <p:cNvPr id="1" name=""/>
+        <p:cNvGrpSpPr/>
+        <p:nvPr/>
+      </p:nvGrpSpPr>
+      <p:grpSpPr>
+        <a:xfrm>
+          <a:off x="0" y="0"/>
+          <a:ext cx="0" cy="0"/>
+          <a:chOff x="0" y="0"/>
+          <a:chExt cx="0" cy="0"/>
+        </a:xfrm>
+      </p:grpSpPr>
+      <p:sp>
+        <p:nvSpPr>
+          <p:cNvPr id="2" name="Заголовок 1"/>
+          <p:cNvSpPr>
+            <a:spLocks noGrp="1"/>
+          </p:cNvSpPr>
+          <p:nvPr>
+            <p:ph type="title"/>
+          </p:nvPr>
+        </p:nvSpPr>
+        <p:spPr>
+          <a:xfrm>
+            <a:off x="838200" y="365126"/>
+            <a:ext cx="10515600" cy="470144"/>
+          </a:xfrm>
+        </p:spPr>
+        <p:txBody>
+          <a:bodyPr>
+            <a:normAutofit fontScale="90000"/>
+          </a:bodyPr>
+          <a:lstStyle/>
+          <a:p>
+            <a:r>
+              <a:rPr lang="ru-RU" b="1" dirty="0"/>
+              <a:t>Надежная передача</a:t>
+            </a:r>
+            <a:r>
+              <a:rPr lang="en-US" b="1" dirty="0"/>
+              <a:t>: Stop-and-Wait</a:t>
+            </a:r>
+            <a:endParaRPr lang="ru-RU" dirty="0"/>
+          </a:p>
+        </p:txBody>
+      </p:sp>
+      <p:pic>
+        <p:nvPicPr>
+          <p:cNvPr id="4" name="Объект 3"/>
+          <p:cNvPicPr>
+            <a:picLocks noGrp="1" noChangeAspect="1"/>
+          </p:cNvPicPr>
+          <p:nvPr>
+            <p:ph idx="1"/>
+          </p:nvPr>
+        </p:nvPicPr>
+        <p:blipFill>
+          <a:blip r:embed="rId2"/>
+          <a:stretch>
+            <a:fillRect/>
+          </a:stretch>
+        </p:blipFill>
+        <p:spPr>
+          <a:xfrm>
+            <a:off x="3622432" y="1175147"/>
+            <a:ext cx="4185290" cy="5265585"/>
+          </a:xfrm>
+          <a:prstGeom prst="rect">
+            <a:avLst/>
+          </a:prstGeom>
+        </p:spPr>
+      </p:pic>
+    </p:spTree>
+    <p:extLst>
+      <p:ext uri="{BB962C8B-B14F-4D97-AF65-F5344CB8AC3E}">
+        <p14:creationId xmlns:p14="http://schemas.microsoft.com/office/powerpoint/2010/main" val="2403383636"/>
+      </p:ext>
+    </p:extLst>
+  </p:cSld>
+  <p:clrMapOvr>
+    <a:masterClrMapping/>
+  </p:clrMapOvr>
+</p:sld>
+</file>
+
+<file path=ppt/slides/slide13.xml><?xml version="1.0" encoding="utf-8"?>
+<p:sld xmlns:a="http://schemas.openxmlformats.org/drawingml/2006/main" xmlns:r="http://schemas.openxmlformats.org/officeDocument/2006/relationships" xmlns:p="http://schemas.openxmlformats.org/presentationml/2006/main">
+  <p:cSld>
+    <p:spTree>
+      <p:nvGrpSpPr>
+        <p:cNvPr id="1" name=""/>
+        <p:cNvGrpSpPr/>
+        <p:nvPr/>
+      </p:nvGrpSpPr>
+      <p:grpSpPr>
+        <a:xfrm>
+          <a:off x="0" y="0"/>
+          <a:ext cx="0" cy="0"/>
+          <a:chOff x="0" y="0"/>
+          <a:chExt cx="0" cy="0"/>
+        </a:xfrm>
+      </p:grpSpPr>
+      <p:sp>
+        <p:nvSpPr>
+          <p:cNvPr id="2" name="Заголовок 1"/>
+          <p:cNvSpPr>
+            <a:spLocks noGrp="1"/>
+          </p:cNvSpPr>
+          <p:nvPr>
+            <p:ph type="title"/>
+          </p:nvPr>
+        </p:nvSpPr>
+        <p:spPr/>
+        <p:txBody>
+          <a:bodyPr/>
+          <a:lstStyle/>
+          <a:p>
+            <a:r>
+              <a:rPr lang="af-ZA" b="1" dirty="0"/>
+              <a:t>Bandwidth-Delay Product</a:t>
+            </a:r>
+            <a:endParaRPr lang="ru-RU" b="1" dirty="0"/>
+          </a:p>
+        </p:txBody>
+      </p:sp>
+      <p:pic>
+        <p:nvPicPr>
+          <p:cNvPr id="2050" name="Picture 2" descr="Performance of a Network - GeeksforGeeks"/>
+          <p:cNvPicPr>
+            <a:picLocks noGrp="1" noChangeAspect="1" noChangeArrowheads="1"/>
+          </p:cNvPicPr>
+          <p:nvPr>
+            <p:ph sz="half" idx="1"/>
+          </p:nvPr>
+        </p:nvPicPr>
+        <p:blipFill>
+          <a:blip r:embed="rId2">
+            <a:extLst>
+              <a:ext uri="{28A0092B-C50C-407E-A947-70E740481C1C}">
+                <a14:useLocalDpi xmlns:a14="http://schemas.microsoft.com/office/drawing/2010/main" val="0"/>
+              </a:ext>
+            </a:extLst>
+          </a:blip>
+          <a:stretch>
+            <a:fillRect/>
+          </a:stretch>
+        </p:blipFill>
+        <p:spPr bwMode="auto">
+          <a:xfrm>
+            <a:off x="838200" y="2083659"/>
+            <a:ext cx="5181600" cy="3835269"/>
+          </a:xfrm>
+          <a:prstGeom prst="rect">
+            <a:avLst/>
+          </a:prstGeom>
+          <a:noFill/>
+          <a:extLst>
+            <a:ext uri="{909E8E84-426E-40DD-AFC4-6F175D3DCCD1}">
+              <a14:hiddenFill xmlns:a14="http://schemas.microsoft.com/office/drawing/2010/main">
+                <a:solidFill>
+                  <a:srgbClr val="FFFFFF"/>
+                </a:solidFill>
+              </a14:hiddenFill>
+            </a:ext>
+          </a:extLst>
+        </p:spPr>
+      </p:pic>
+      <p:sp>
+        <p:nvSpPr>
+          <p:cNvPr id="4" name="Объект 3"/>
+          <p:cNvSpPr>
+            <a:spLocks noGrp="1"/>
+          </p:cNvSpPr>
+          <p:nvPr>
+            <p:ph sz="half" idx="2"/>
+          </p:nvPr>
+        </p:nvSpPr>
+        <p:spPr>
+          <a:xfrm>
+            <a:off x="6260123" y="2553371"/>
+            <a:ext cx="5181600" cy="2895844"/>
+          </a:xfrm>
+        </p:spPr>
+        <p:txBody>
+          <a:bodyPr/>
+          <a:lstStyle/>
+          <a:p>
+            <a:pPr marL="0" indent="0">
+              <a:buNone/>
+            </a:pPr>
+            <a:r>
+              <a:rPr lang="af-ZA" dirty="0" smtClean="0"/>
+              <a:t>BDP</a:t>
+            </a:r>
+            <a:r>
+              <a:rPr lang="af-ZA" dirty="0"/>
+              <a:t>, Bandwidth-Delay Product </a:t>
+            </a:r>
+            <a:r>
+              <a:rPr lang="af-ZA" dirty="0" smtClean="0"/>
+              <a:t>- </a:t>
+            </a:r>
+            <a:r>
+              <a:rPr lang="ru-RU" dirty="0"/>
+              <a:t>п</a:t>
+            </a:r>
+            <a:r>
+              <a:rPr lang="ru-RU" dirty="0" smtClean="0"/>
+              <a:t>роизведение </a:t>
+            </a:r>
+            <a:r>
+              <a:rPr lang="ru-RU" dirty="0"/>
+              <a:t>круговой задержки на пропускную </a:t>
+            </a:r>
+            <a:r>
+              <a:rPr lang="ru-RU" dirty="0" smtClean="0"/>
+              <a:t>способность, отражает максимальный </a:t>
+            </a:r>
+            <a:r>
+              <a:rPr lang="ru-RU" dirty="0"/>
+              <a:t>объем неподтвержденных данных в канале</a:t>
+            </a:r>
+            <a:endParaRPr lang="ru-RU" dirty="0"/>
+          </a:p>
+        </p:txBody>
+      </p:sp>
+    </p:spTree>
+    <p:extLst>
+      <p:ext uri="{BB962C8B-B14F-4D97-AF65-F5344CB8AC3E}">
+        <p14:creationId xmlns:p14="http://schemas.microsoft.com/office/powerpoint/2010/main" val="3466407150"/>
+      </p:ext>
+    </p:extLst>
+  </p:cSld>
+  <p:clrMapOvr>
+    <a:masterClrMapping/>
+  </p:clrMapOvr>
+</p:sld>
+</file>
+
+<file path=ppt/slides/slide14.xml><?xml version="1.0" encoding="utf-8"?>
+<p:sld xmlns:a="http://schemas.openxmlformats.org/drawingml/2006/main" xmlns:r="http://schemas.openxmlformats.org/officeDocument/2006/relationships" xmlns:p="http://schemas.openxmlformats.org/presentationml/2006/main">
+  <p:cSld>
+    <p:spTree>
+      <p:nvGrpSpPr>
+        <p:cNvPr id="1" name=""/>
+        <p:cNvGrpSpPr/>
+        <p:nvPr/>
+      </p:nvGrpSpPr>
+      <p:grpSpPr>
+        <a:xfrm>
+          <a:off x="0" y="0"/>
+          <a:ext cx="0" cy="0"/>
+          <a:chOff x="0" y="0"/>
+          <a:chExt cx="0" cy="0"/>
+        </a:xfrm>
+      </p:grpSpPr>
+      <p:sp>
+        <p:nvSpPr>
+          <p:cNvPr id="2" name="Заголовок 1"/>
+          <p:cNvSpPr>
+            <a:spLocks noGrp="1"/>
+          </p:cNvSpPr>
+          <p:nvPr>
+            <p:ph type="title"/>
+          </p:nvPr>
+        </p:nvSpPr>
+        <p:spPr/>
+        <p:txBody>
+          <a:bodyPr/>
+          <a:lstStyle/>
+          <a:p>
+            <a:r>
+              <a:rPr lang="ru-RU" b="1" dirty="0"/>
+              <a:t>Надежная передача</a:t>
+            </a:r>
+            <a:r>
+              <a:rPr lang="en-US" b="1" dirty="0"/>
+              <a:t>: </a:t>
+            </a:r>
+            <a:r>
+              <a:rPr lang="af-ZA" b="1" dirty="0"/>
+              <a:t>Sliding Window</a:t>
+            </a:r>
+          </a:p>
+        </p:txBody>
+      </p:sp>
+      <p:pic>
+        <p:nvPicPr>
+          <p:cNvPr id="7" name="Объект 6"/>
+          <p:cNvPicPr>
+            <a:picLocks noGrp="1" noChangeAspect="1"/>
+          </p:cNvPicPr>
+          <p:nvPr>
+            <p:ph idx="1"/>
+          </p:nvPr>
+        </p:nvPicPr>
+        <p:blipFill>
+          <a:blip r:embed="rId2"/>
+          <a:stretch>
+            <a:fillRect/>
+          </a:stretch>
+        </p:blipFill>
+        <p:spPr>
+          <a:xfrm>
+            <a:off x="2949903" y="1547653"/>
+            <a:ext cx="6292194" cy="5033756"/>
+          </a:xfrm>
+          <a:prstGeom prst="rect">
+            <a:avLst/>
+          </a:prstGeom>
+        </p:spPr>
+      </p:pic>
+    </p:spTree>
+    <p:extLst>
+      <p:ext uri="{BB962C8B-B14F-4D97-AF65-F5344CB8AC3E}">
+        <p14:creationId xmlns:p14="http://schemas.microsoft.com/office/powerpoint/2010/main" val="1508718531"/>
+      </p:ext>
+    </p:extLst>
+  </p:cSld>
+  <p:clrMapOvr>
+    <a:masterClrMapping/>
+  </p:clrMapOvr>
+</p:sld>
+</file>
+
+<file path=ppt/slides/slide15.xml><?xml version="1.0" encoding="utf-8"?>
+<p:sld xmlns:a="http://schemas.openxmlformats.org/drawingml/2006/main" xmlns:r="http://schemas.openxmlformats.org/officeDocument/2006/relationships" xmlns:p="http://schemas.openxmlformats.org/presentationml/2006/main">
+  <p:cSld>
+    <p:spTree>
+      <p:nvGrpSpPr>
+        <p:cNvPr id="1" name=""/>
+        <p:cNvGrpSpPr/>
+        <p:nvPr/>
+      </p:nvGrpSpPr>
+      <p:grpSpPr>
+        <a:xfrm>
+          <a:off x="0" y="0"/>
+          <a:ext cx="0" cy="0"/>
+          <a:chOff x="0" y="0"/>
+          <a:chExt cx="0" cy="0"/>
+        </a:xfrm>
+      </p:grpSpPr>
+      <p:sp>
+        <p:nvSpPr>
+          <p:cNvPr id="2" name="Заголовок 1"/>
+          <p:cNvSpPr>
+            <a:spLocks noGrp="1"/>
+          </p:cNvSpPr>
+          <p:nvPr>
+            <p:ph type="title"/>
+          </p:nvPr>
+        </p:nvSpPr>
+        <p:spPr>
+          <a:xfrm>
+            <a:off x="838200" y="365126"/>
+            <a:ext cx="10515600" cy="650262"/>
+          </a:xfrm>
+        </p:spPr>
+        <p:txBody>
+          <a:bodyPr>
+            <a:normAutofit fontScale="90000"/>
+          </a:bodyPr>
+          <a:lstStyle/>
+          <a:p>
+            <a:r>
+              <a:rPr lang="ru-RU" b="1" dirty="0"/>
+              <a:t>Надежная передача</a:t>
+            </a:r>
+            <a:r>
+              <a:rPr lang="en-US" b="1" dirty="0"/>
+              <a:t>: </a:t>
+            </a:r>
+            <a:r>
+              <a:rPr lang="af-ZA" b="1" dirty="0"/>
+              <a:t>Sliding Window</a:t>
+            </a:r>
+            <a:endParaRPr lang="ru-RU" dirty="0"/>
+          </a:p>
+        </p:txBody>
+      </p:sp>
+      <p:pic>
+        <p:nvPicPr>
+          <p:cNvPr id="6" name="Объект 5"/>
+          <p:cNvPicPr>
+            <a:picLocks noGrp="1" noChangeAspect="1"/>
+          </p:cNvPicPr>
+          <p:nvPr>
+            <p:ph sz="half" idx="1"/>
+          </p:nvPr>
+        </p:nvPicPr>
+        <p:blipFill>
+          <a:blip r:embed="rId2"/>
+          <a:stretch>
+            <a:fillRect/>
+          </a:stretch>
+        </p:blipFill>
+        <p:spPr>
+          <a:xfrm>
+            <a:off x="1409331" y="4444637"/>
+            <a:ext cx="9373337" cy="2149594"/>
+          </a:xfrm>
+          <a:prstGeom prst="rect">
+            <a:avLst/>
+          </a:prstGeom>
+        </p:spPr>
+      </p:pic>
+      <p:sp>
+        <p:nvSpPr>
+          <p:cNvPr id="5" name="Объект 4"/>
+          <p:cNvSpPr>
+            <a:spLocks noGrp="1"/>
+          </p:cNvSpPr>
+          <p:nvPr>
+            <p:ph sz="half" idx="2"/>
+          </p:nvPr>
+        </p:nvSpPr>
+        <p:spPr>
+          <a:xfrm>
+            <a:off x="729762" y="1107831"/>
+            <a:ext cx="10624038" cy="2963007"/>
+          </a:xfrm>
+        </p:spPr>
+        <p:txBody>
+          <a:bodyPr>
+            <a:normAutofit fontScale="92500" lnSpcReduction="10000"/>
+          </a:bodyPr>
+          <a:lstStyle/>
+          <a:p>
+            <a:pPr marL="0" indent="0">
+              <a:buNone/>
+            </a:pPr>
+            <a:r>
+              <a:rPr lang="ru-RU" dirty="0"/>
+              <a:t>Отправитель поддерживает три переменные:</a:t>
+            </a:r>
+          </a:p>
+          <a:p>
+            <a:r>
+              <a:rPr lang="ru-RU" dirty="0"/>
+              <a:t>SWS, </a:t>
+            </a:r>
+            <a:r>
+              <a:rPr lang="ru-RU" dirty="0" err="1"/>
+              <a:t>Window</a:t>
+            </a:r>
+            <a:r>
+              <a:rPr lang="ru-RU" dirty="0"/>
+              <a:t> </a:t>
+            </a:r>
+            <a:r>
+              <a:rPr lang="ru-RU" dirty="0" err="1"/>
+              <a:t>Size</a:t>
+            </a:r>
+            <a:r>
+              <a:rPr lang="ru-RU" dirty="0"/>
+              <a:t> </a:t>
+            </a:r>
+            <a:r>
+              <a:rPr lang="ru-RU" dirty="0" smtClean="0"/>
+              <a:t>- верхняя граница </a:t>
+            </a:r>
+            <a:r>
+              <a:rPr lang="ru-RU" dirty="0"/>
+              <a:t>неподтвержденных сегментов, которые отправитель может передать.</a:t>
+            </a:r>
+          </a:p>
+          <a:p>
+            <a:r>
+              <a:rPr lang="ru-RU" dirty="0"/>
+              <a:t>LAR, </a:t>
+            </a:r>
+            <a:r>
+              <a:rPr lang="ru-RU" dirty="0" err="1"/>
+              <a:t>last</a:t>
+            </a:r>
+            <a:r>
+              <a:rPr lang="ru-RU" dirty="0"/>
+              <a:t> </a:t>
+            </a:r>
+            <a:r>
+              <a:rPr lang="ru-RU" dirty="0" err="1"/>
+              <a:t>acknowledgment</a:t>
+            </a:r>
+            <a:r>
+              <a:rPr lang="ru-RU" dirty="0"/>
+              <a:t> </a:t>
+            </a:r>
+            <a:r>
+              <a:rPr lang="ru-RU" dirty="0" err="1"/>
+              <a:t>received</a:t>
+            </a:r>
+            <a:r>
+              <a:rPr lang="ru-RU" dirty="0"/>
+              <a:t> </a:t>
+            </a:r>
+            <a:r>
+              <a:rPr lang="ru-RU" dirty="0" smtClean="0"/>
+              <a:t>- Номер </a:t>
+            </a:r>
+            <a:r>
+              <a:rPr lang="ru-RU" dirty="0"/>
+              <a:t>последнего подтвержденного </a:t>
+            </a:r>
+            <a:r>
+              <a:rPr lang="ru-RU" dirty="0" smtClean="0"/>
+              <a:t>сегмента.</a:t>
+            </a:r>
+            <a:endParaRPr lang="ru-RU" dirty="0"/>
+          </a:p>
+          <a:p>
+            <a:r>
+              <a:rPr lang="ru-RU" dirty="0"/>
+              <a:t>LSS, </a:t>
+            </a:r>
+            <a:r>
+              <a:rPr lang="ru-RU" dirty="0" err="1"/>
+              <a:t>Last</a:t>
+            </a:r>
+            <a:r>
+              <a:rPr lang="ru-RU" dirty="0"/>
+              <a:t> </a:t>
+            </a:r>
+            <a:r>
+              <a:rPr lang="ru-RU" dirty="0" err="1"/>
+              <a:t>Segment</a:t>
+            </a:r>
+            <a:r>
+              <a:rPr lang="ru-RU" dirty="0"/>
+              <a:t> </a:t>
+            </a:r>
+            <a:r>
+              <a:rPr lang="ru-RU" dirty="0" err="1"/>
+              <a:t>Sent</a:t>
+            </a:r>
+            <a:r>
+              <a:rPr lang="ru-RU" dirty="0"/>
+              <a:t> </a:t>
+            </a:r>
+            <a:r>
+              <a:rPr lang="ru-RU" dirty="0" smtClean="0"/>
+              <a:t>- Номер </a:t>
+            </a:r>
+            <a:r>
+              <a:rPr lang="ru-RU" dirty="0"/>
+              <a:t>последнего отправленного </a:t>
+            </a:r>
+            <a:r>
+              <a:rPr lang="ru-RU" dirty="0" smtClean="0"/>
+              <a:t>сегмента.</a:t>
+            </a:r>
+          </a:p>
+          <a:p>
+            <a:pPr marL="0" indent="0" algn="ctr">
+              <a:buNone/>
+            </a:pPr>
+            <a:r>
+              <a:rPr lang="af-ZA" dirty="0"/>
+              <a:t>LSS - LAR &lt;= SWS</a:t>
+            </a:r>
+            <a:endParaRPr lang="ru-RU" dirty="0"/>
+          </a:p>
+          <a:p>
+            <a:endParaRPr lang="ru-RU" dirty="0" smtClean="0"/>
+          </a:p>
+          <a:p>
+            <a:endParaRPr lang="ru-RU" dirty="0"/>
+          </a:p>
+          <a:p>
+            <a:pPr marL="0" indent="0">
+              <a:buNone/>
+            </a:pPr>
+            <a:endParaRPr lang="ru-RU" dirty="0"/>
+          </a:p>
+          <a:p>
+            <a:pPr marL="0" indent="0">
+              <a:buNone/>
+            </a:pPr>
+            <a:endParaRPr lang="ru-RU" dirty="0"/>
+          </a:p>
+        </p:txBody>
+      </p:sp>
+    </p:spTree>
+    <p:extLst>
+      <p:ext uri="{BB962C8B-B14F-4D97-AF65-F5344CB8AC3E}">
+        <p14:creationId xmlns:p14="http://schemas.microsoft.com/office/powerpoint/2010/main" val="2448629692"/>
+      </p:ext>
+    </p:extLst>
+  </p:cSld>
+  <p:clrMapOvr>
+    <a:masterClrMapping/>
+  </p:clrMapOvr>
+</p:sld>
+</file>
+
+<file path=ppt/slides/slide16.xml><?xml version="1.0" encoding="utf-8"?>
+<p:sld xmlns:a="http://schemas.openxmlformats.org/drawingml/2006/main" xmlns:r="http://schemas.openxmlformats.org/officeDocument/2006/relationships" xmlns:p="http://schemas.openxmlformats.org/presentationml/2006/main">
+  <p:cSld>
+    <p:spTree>
+      <p:nvGrpSpPr>
+        <p:cNvPr id="1" name=""/>
+        <p:cNvGrpSpPr/>
+        <p:nvPr/>
+      </p:nvGrpSpPr>
+      <p:grpSpPr>
+        <a:xfrm>
+          <a:off x="0" y="0"/>
+          <a:ext cx="0" cy="0"/>
+          <a:chOff x="0" y="0"/>
+          <a:chExt cx="0" cy="0"/>
+        </a:xfrm>
+      </p:grpSpPr>
+      <p:sp>
+        <p:nvSpPr>
+          <p:cNvPr id="2" name="Заголовок 1"/>
+          <p:cNvSpPr>
+            <a:spLocks noGrp="1"/>
+          </p:cNvSpPr>
+          <p:nvPr>
+            <p:ph type="title"/>
+          </p:nvPr>
+        </p:nvSpPr>
+        <p:spPr>
+          <a:xfrm>
+            <a:off x="838200" y="365126"/>
+            <a:ext cx="10515600" cy="742706"/>
+          </a:xfrm>
+        </p:spPr>
+        <p:txBody>
+          <a:bodyPr/>
+          <a:lstStyle/>
+          <a:p>
+            <a:r>
+              <a:rPr lang="ru-RU" b="1" dirty="0"/>
+              <a:t>Надежная передача</a:t>
+            </a:r>
+            <a:r>
+              <a:rPr lang="en-US" b="1" dirty="0"/>
+              <a:t>: </a:t>
+            </a:r>
+            <a:r>
+              <a:rPr lang="af-ZA" b="1" dirty="0" smtClean="0"/>
+              <a:t>Sliding Window</a:t>
+            </a:r>
+            <a:endParaRPr lang="ru-RU" dirty="0"/>
+          </a:p>
+        </p:txBody>
+      </p:sp>
+      <p:pic>
+        <p:nvPicPr>
+          <p:cNvPr id="5" name="Объект 4"/>
+          <p:cNvPicPr>
+            <a:picLocks noGrp="1" noChangeAspect="1"/>
+          </p:cNvPicPr>
+          <p:nvPr>
+            <p:ph sz="half" idx="1"/>
+          </p:nvPr>
+        </p:nvPicPr>
+        <p:blipFill>
+          <a:blip r:embed="rId2"/>
+          <a:stretch>
+            <a:fillRect/>
+          </a:stretch>
+        </p:blipFill>
+        <p:spPr>
+          <a:xfrm>
+            <a:off x="1375996" y="4358402"/>
+            <a:ext cx="9440008" cy="2190757"/>
+          </a:xfrm>
+          <a:prstGeom prst="rect">
+            <a:avLst/>
+          </a:prstGeom>
+        </p:spPr>
+      </p:pic>
+      <p:sp>
+        <p:nvSpPr>
+          <p:cNvPr id="4" name="Объект 3"/>
+          <p:cNvSpPr>
+            <a:spLocks noGrp="1"/>
+          </p:cNvSpPr>
+          <p:nvPr>
+            <p:ph sz="half" idx="2"/>
+          </p:nvPr>
+        </p:nvSpPr>
+        <p:spPr>
+          <a:xfrm>
+            <a:off x="838200" y="1257300"/>
+            <a:ext cx="10515600" cy="3033345"/>
+          </a:xfrm>
+        </p:spPr>
+        <p:txBody>
+          <a:bodyPr>
+            <a:normAutofit fontScale="92500" lnSpcReduction="10000"/>
+          </a:bodyPr>
+          <a:lstStyle/>
+          <a:p>
+            <a:pPr marL="0" indent="0">
+              <a:buNone/>
+            </a:pPr>
+            <a:r>
+              <a:rPr lang="ru-RU" dirty="0"/>
+              <a:t>Получатель поддерживает свои три переменные</a:t>
+            </a:r>
+            <a:r>
+              <a:rPr lang="ru-RU" dirty="0" smtClean="0"/>
+              <a:t>:</a:t>
+            </a:r>
+            <a:endParaRPr lang="ru-RU" dirty="0"/>
+          </a:p>
+          <a:p>
+            <a:r>
+              <a:rPr lang="ru-RU" dirty="0" smtClean="0"/>
+              <a:t>RWS </a:t>
+            </a:r>
+            <a:r>
+              <a:rPr lang="ru-RU" dirty="0"/>
+              <a:t>- указывает верхнюю границу поступивших не по порядку кадров, которые получатель готов принять.</a:t>
+            </a:r>
+          </a:p>
+          <a:p>
+            <a:r>
+              <a:rPr lang="ru-RU" dirty="0" smtClean="0"/>
+              <a:t>LAS</a:t>
+            </a:r>
+            <a:r>
+              <a:rPr lang="ru-RU" dirty="0"/>
+              <a:t>, </a:t>
+            </a:r>
+            <a:r>
+              <a:rPr lang="ru-RU" dirty="0" err="1"/>
+              <a:t>largest</a:t>
+            </a:r>
+            <a:r>
+              <a:rPr lang="ru-RU" dirty="0"/>
+              <a:t> </a:t>
+            </a:r>
+            <a:r>
+              <a:rPr lang="ru-RU" dirty="0" err="1"/>
+              <a:t>acceptable</a:t>
+            </a:r>
+            <a:r>
+              <a:rPr lang="ru-RU" dirty="0"/>
+              <a:t> </a:t>
+            </a:r>
+            <a:r>
+              <a:rPr lang="ru-RU" dirty="0" err="1" smtClean="0"/>
+              <a:t>segment</a:t>
+            </a:r>
+            <a:r>
+              <a:rPr lang="ru-RU" dirty="0" smtClean="0"/>
+              <a:t> </a:t>
+            </a:r>
+            <a:r>
+              <a:rPr lang="ru-RU" dirty="0"/>
+              <a:t>- самый большой номер сегмента, который получатель готов принять.</a:t>
+            </a:r>
+          </a:p>
+          <a:p>
+            <a:r>
+              <a:rPr lang="ru-RU" dirty="0"/>
+              <a:t>Номер последнего полученного сегмента (LSR</a:t>
+            </a:r>
+            <a:r>
+              <a:rPr lang="ru-RU" dirty="0" smtClean="0"/>
+              <a:t>).</a:t>
+            </a:r>
+          </a:p>
+          <a:p>
+            <a:pPr marL="0" indent="0" algn="ctr">
+              <a:buNone/>
+            </a:pPr>
+            <a:r>
+              <a:rPr lang="af-ZA" dirty="0"/>
+              <a:t>LAS - LSR &lt;= RWS</a:t>
+            </a:r>
+            <a:endParaRPr lang="ru-RU" dirty="0"/>
+          </a:p>
+        </p:txBody>
+      </p:sp>
+    </p:spTree>
+    <p:extLst>
+      <p:ext uri="{BB962C8B-B14F-4D97-AF65-F5344CB8AC3E}">
+        <p14:creationId xmlns:p14="http://schemas.microsoft.com/office/powerpoint/2010/main" val="778923333"/>
+      </p:ext>
+    </p:extLst>
+  </p:cSld>
+  <p:clrMapOvr>
+    <a:masterClrMapping/>
+  </p:clrMapOvr>
+</p:sld>
+</file>
+
+<file path=ppt/slides/slide17.xml><?xml version="1.0" encoding="utf-8"?>
+<p:sld xmlns:a="http://schemas.openxmlformats.org/drawingml/2006/main" xmlns:r="http://schemas.openxmlformats.org/officeDocument/2006/relationships" xmlns:p="http://schemas.openxmlformats.org/presentationml/2006/main">
+  <p:cSld>
+    <p:spTree>
+      <p:nvGrpSpPr>
+        <p:cNvPr id="1" name=""/>
+        <p:cNvGrpSpPr/>
+        <p:nvPr/>
+      </p:nvGrpSpPr>
+      <p:grpSpPr>
+        <a:xfrm>
+          <a:off x="0" y="0"/>
+          <a:ext cx="0" cy="0"/>
+          <a:chOff x="0" y="0"/>
+          <a:chExt cx="0" cy="0"/>
+        </a:xfrm>
+      </p:grpSpPr>
+      <p:sp>
+        <p:nvSpPr>
+          <p:cNvPr id="5" name="Заголовок 4"/>
+          <p:cNvSpPr>
+            <a:spLocks noGrp="1"/>
+          </p:cNvSpPr>
+          <p:nvPr>
+            <p:ph type="title"/>
+          </p:nvPr>
+        </p:nvSpPr>
+        <p:spPr>
+          <a:xfrm>
+            <a:off x="495300" y="319465"/>
+            <a:ext cx="11110546" cy="689952"/>
+          </a:xfrm>
+        </p:spPr>
+        <p:txBody>
+          <a:bodyPr>
+            <a:normAutofit fontScale="90000"/>
+          </a:bodyPr>
+          <a:lstStyle/>
+          <a:p>
+            <a:r>
+              <a:rPr lang="ru-RU" b="1" dirty="0"/>
+              <a:t>Надежная передача</a:t>
+            </a:r>
+            <a:r>
+              <a:rPr lang="en-US" b="1" dirty="0"/>
+              <a:t>: </a:t>
+            </a:r>
+            <a:r>
+              <a:rPr lang="ru-RU" b="1" dirty="0" smtClean="0"/>
+              <a:t>кумулятивной подтверждение</a:t>
+            </a:r>
+            <a:endParaRPr lang="ru-RU" dirty="0"/>
+          </a:p>
+        </p:txBody>
+      </p:sp>
+      <p:pic>
+        <p:nvPicPr>
+          <p:cNvPr id="7" name="Объект 6"/>
+          <p:cNvPicPr>
+            <a:picLocks noGrp="1" noChangeAspect="1"/>
+          </p:cNvPicPr>
+          <p:nvPr>
+            <p:ph idx="1"/>
+          </p:nvPr>
+        </p:nvPicPr>
+        <p:blipFill>
+          <a:blip r:embed="rId2"/>
+          <a:stretch>
+            <a:fillRect/>
+          </a:stretch>
+        </p:blipFill>
+        <p:spPr>
+          <a:xfrm>
+            <a:off x="3147688" y="1009417"/>
+            <a:ext cx="5632856" cy="5848583"/>
+          </a:xfrm>
+          <a:prstGeom prst="rect">
+            <a:avLst/>
+          </a:prstGeom>
+        </p:spPr>
+      </p:pic>
+    </p:spTree>
+    <p:extLst>
+      <p:ext uri="{BB962C8B-B14F-4D97-AF65-F5344CB8AC3E}">
+        <p14:creationId xmlns:p14="http://schemas.microsoft.com/office/powerpoint/2010/main" val="3375945995"/>
+      </p:ext>
+    </p:extLst>
+  </p:cSld>
+  <p:clrMapOvr>
+    <a:masterClrMapping/>
+  </p:clrMapOvr>
+</p:sld>
+</file>
+
+<file path=ppt/slides/slide18.xml><?xml version="1.0" encoding="utf-8"?>
+<p:sld xmlns:a="http://schemas.openxmlformats.org/drawingml/2006/main" xmlns:r="http://schemas.openxmlformats.org/officeDocument/2006/relationships" xmlns:p="http://schemas.openxmlformats.org/presentationml/2006/main">
+  <p:cSld>
+    <p:spTree>
+      <p:nvGrpSpPr>
+        <p:cNvPr id="1" name=""/>
+        <p:cNvGrpSpPr/>
+        <p:nvPr/>
+      </p:nvGrpSpPr>
+      <p:grpSpPr>
+        <a:xfrm>
+          <a:off x="0" y="0"/>
+          <a:ext cx="0" cy="0"/>
+          <a:chOff x="0" y="0"/>
+          <a:chExt cx="0" cy="0"/>
+        </a:xfrm>
+      </p:grpSpPr>
+      <p:sp>
+        <p:nvSpPr>
+          <p:cNvPr id="2" name="Заголовок 1"/>
+          <p:cNvSpPr>
+            <a:spLocks noGrp="1"/>
+          </p:cNvSpPr>
+          <p:nvPr>
+            <p:ph type="title"/>
+          </p:nvPr>
+        </p:nvSpPr>
+        <p:spPr/>
+        <p:txBody>
+          <a:bodyPr/>
+          <a:lstStyle/>
+          <a:p>
+            <a:r>
+              <a:rPr lang="ru-RU" b="1" dirty="0"/>
+              <a:t>Надёжная доставка </a:t>
+            </a:r>
+            <a:r>
+              <a:rPr lang="af-ZA" b="1" dirty="0" smtClean="0"/>
+              <a:t>TCP</a:t>
+            </a:r>
+            <a:endParaRPr lang="ru-RU" dirty="0"/>
+          </a:p>
+        </p:txBody>
+      </p:sp>
+      <p:pic>
+        <p:nvPicPr>
+          <p:cNvPr id="4" name="Объект 3"/>
+          <p:cNvPicPr>
+            <a:picLocks noGrp="1" noChangeAspect="1"/>
+          </p:cNvPicPr>
+          <p:nvPr>
+            <p:ph sz="half" idx="1"/>
+          </p:nvPr>
+        </p:nvPicPr>
+        <p:blipFill>
+          <a:blip r:embed="rId2"/>
+          <a:stretch>
+            <a:fillRect/>
+          </a:stretch>
+        </p:blipFill>
+        <p:spPr>
+          <a:xfrm>
+            <a:off x="465993" y="1512326"/>
+            <a:ext cx="5516510" cy="5241703"/>
+          </a:xfrm>
+          <a:prstGeom prst="rect">
+            <a:avLst/>
+          </a:prstGeom>
+        </p:spPr>
+      </p:pic>
+      <p:sp>
+        <p:nvSpPr>
+          <p:cNvPr id="5" name="Объект 4"/>
+          <p:cNvSpPr>
+            <a:spLocks noGrp="1"/>
+          </p:cNvSpPr>
+          <p:nvPr>
+            <p:ph sz="half" idx="2"/>
+          </p:nvPr>
+        </p:nvSpPr>
+        <p:spPr>
+          <a:xfrm>
+            <a:off x="6172200" y="2478636"/>
+            <a:ext cx="5181600" cy="3045313"/>
+          </a:xfrm>
+        </p:spPr>
+        <p:txBody>
+          <a:bodyPr/>
+          <a:lstStyle/>
+          <a:p>
+            <a:pPr marL="0" indent="0">
+              <a:buNone/>
+            </a:pPr>
+            <a:r>
+              <a:rPr lang="en-US" dirty="0" smtClean="0"/>
+              <a:t>TCP </a:t>
+            </a:r>
+            <a:r>
+              <a:rPr lang="ru-RU" dirty="0" smtClean="0"/>
+              <a:t>принимает от приложения поток байтов, который «нарезается» на сегменты и передаётся в сеть.</a:t>
+            </a:r>
+            <a:endParaRPr lang="ru-RU" dirty="0"/>
+          </a:p>
+          <a:p>
+            <a:pPr marL="0" indent="0">
+              <a:buNone/>
+            </a:pPr>
+            <a:r>
+              <a:rPr lang="ru-RU" dirty="0" smtClean="0"/>
+              <a:t>Тем не менее, в </a:t>
+            </a:r>
+            <a:r>
+              <a:rPr lang="en-US" dirty="0" smtClean="0"/>
+              <a:t>TCP </a:t>
+            </a:r>
+            <a:r>
+              <a:rPr lang="ru-RU" dirty="0" smtClean="0"/>
+              <a:t>скользящее окно двигается по потоку байтов, а не по сегментам.</a:t>
+            </a:r>
+            <a:endParaRPr lang="ru-RU" dirty="0"/>
+          </a:p>
+        </p:txBody>
+      </p:sp>
+    </p:spTree>
+    <p:extLst>
+      <p:ext uri="{BB962C8B-B14F-4D97-AF65-F5344CB8AC3E}">
+        <p14:creationId xmlns:p14="http://schemas.microsoft.com/office/powerpoint/2010/main" val="2767597740"/>
+      </p:ext>
+    </p:extLst>
+  </p:cSld>
+  <p:clrMapOvr>
+    <a:masterClrMapping/>
+  </p:clrMapOvr>
+</p:sld>
+</file>
+
+<file path=ppt/slides/slide19.xml><?xml version="1.0" encoding="utf-8"?>
+<p:sld xmlns:a="http://schemas.openxmlformats.org/drawingml/2006/main" xmlns:r="http://schemas.openxmlformats.org/officeDocument/2006/relationships" xmlns:p="http://schemas.openxmlformats.org/presentationml/2006/main">
+  <p:cSld>
+    <p:spTree>
+      <p:nvGrpSpPr>
+        <p:cNvPr id="1" name=""/>
+        <p:cNvGrpSpPr/>
+        <p:nvPr/>
+      </p:nvGrpSpPr>
+      <p:grpSpPr>
+        <a:xfrm>
+          <a:off x="0" y="0"/>
+          <a:ext cx="0" cy="0"/>
+          <a:chOff x="0" y="0"/>
+          <a:chExt cx="0" cy="0"/>
+        </a:xfrm>
+      </p:grpSpPr>
+      <p:sp>
+        <p:nvSpPr>
+          <p:cNvPr id="2" name="Заголовок 1"/>
+          <p:cNvSpPr>
+            <a:spLocks noGrp="1"/>
+          </p:cNvSpPr>
+          <p:nvPr>
+            <p:ph type="title"/>
+          </p:nvPr>
+        </p:nvSpPr>
+        <p:spPr/>
+        <p:txBody>
+          <a:bodyPr/>
+          <a:lstStyle/>
+          <a:p>
+            <a:r>
+              <a:rPr lang="ru-RU" b="1" dirty="0"/>
+              <a:t>Надёжная доставка </a:t>
+            </a:r>
+            <a:r>
+              <a:rPr lang="af-ZA" b="1" dirty="0"/>
+              <a:t>TCP</a:t>
+            </a:r>
+            <a:endParaRPr lang="ru-RU" dirty="0"/>
+          </a:p>
+        </p:txBody>
+      </p:sp>
+      <p:pic>
+        <p:nvPicPr>
+          <p:cNvPr id="5" name="Объект 4"/>
+          <p:cNvPicPr>
+            <a:picLocks noGrp="1" noChangeAspect="1"/>
+          </p:cNvPicPr>
+          <p:nvPr>
+            <p:ph sz="half" idx="1"/>
+          </p:nvPr>
+        </p:nvPicPr>
+        <p:blipFill>
+          <a:blip r:embed="rId2"/>
+          <a:stretch>
+            <a:fillRect/>
+          </a:stretch>
+        </p:blipFill>
+        <p:spPr>
+          <a:xfrm>
+            <a:off x="684021" y="1825625"/>
+            <a:ext cx="5308303" cy="2488650"/>
+          </a:xfrm>
+          <a:prstGeom prst="rect">
+            <a:avLst/>
+          </a:prstGeom>
+        </p:spPr>
+      </p:pic>
+      <p:sp>
+        <p:nvSpPr>
+          <p:cNvPr id="4" name="Объект 3"/>
+          <p:cNvSpPr>
+            <a:spLocks noGrp="1"/>
+          </p:cNvSpPr>
+          <p:nvPr>
+            <p:ph sz="half" idx="2"/>
+          </p:nvPr>
+        </p:nvSpPr>
+        <p:spPr/>
+        <p:txBody>
+          <a:bodyPr/>
+          <a:lstStyle/>
+          <a:p>
+            <a:pPr marL="0" indent="0">
+              <a:buNone/>
+            </a:pPr>
+            <a:r>
+              <a:rPr lang="en-US" b="1" i="1" dirty="0" smtClean="0"/>
+              <a:t>Sequence </a:t>
+            </a:r>
+            <a:r>
+              <a:rPr lang="en-US" b="1" i="1" dirty="0" err="1" smtClean="0"/>
+              <a:t>Num</a:t>
+            </a:r>
+            <a:r>
+              <a:rPr lang="en-US" b="1" i="1" dirty="0" smtClean="0"/>
+              <a:t> </a:t>
+            </a:r>
+            <a:r>
+              <a:rPr lang="en-US" i="1" dirty="0" smtClean="0"/>
+              <a:t>– </a:t>
+            </a:r>
+            <a:r>
+              <a:rPr lang="ru-RU" dirty="0" smtClean="0"/>
+              <a:t>последовательный номер. Номер первого байта сегмента.</a:t>
+            </a:r>
+            <a:endParaRPr lang="en-US" i="1" dirty="0"/>
+          </a:p>
+          <a:p>
+            <a:pPr marL="0" indent="0">
+              <a:buNone/>
+            </a:pPr>
+            <a:r>
+              <a:rPr lang="ru-RU" b="1" i="1" dirty="0" smtClean="0"/>
+              <a:t>Начальный </a:t>
+            </a:r>
+            <a:r>
+              <a:rPr lang="ru-RU" b="1" i="1" dirty="0"/>
+              <a:t>номер байта</a:t>
+            </a:r>
+            <a:r>
+              <a:rPr lang="ru-RU" b="1" dirty="0"/>
+              <a:t> (</a:t>
+            </a:r>
+            <a:r>
+              <a:rPr lang="ru-RU" b="1" dirty="0" err="1"/>
+              <a:t>Init</a:t>
+            </a:r>
+            <a:r>
+              <a:rPr lang="ru-RU" b="1" dirty="0"/>
+              <a:t> </a:t>
+            </a:r>
+            <a:r>
+              <a:rPr lang="ru-RU" b="1" dirty="0" err="1"/>
+              <a:t>Seq</a:t>
+            </a:r>
+            <a:r>
+              <a:rPr lang="ru-RU" b="1" dirty="0"/>
+              <a:t> </a:t>
+            </a:r>
+            <a:r>
+              <a:rPr lang="ru-RU" b="1" dirty="0" err="1"/>
+              <a:t>Num</a:t>
+            </a:r>
+            <a:r>
+              <a:rPr lang="ru-RU" b="1" dirty="0" smtClean="0"/>
+              <a:t>)</a:t>
+            </a:r>
+            <a:r>
+              <a:rPr lang="ru-RU" dirty="0" smtClean="0"/>
+              <a:t> – номер, с которого будет вестись отсчет </a:t>
+            </a:r>
+            <a:r>
+              <a:rPr lang="en-US" dirty="0" err="1" smtClean="0"/>
+              <a:t>SeqNum</a:t>
+            </a:r>
+            <a:r>
+              <a:rPr lang="ru-RU" dirty="0" smtClean="0"/>
+              <a:t>.</a:t>
+            </a:r>
+            <a:endParaRPr lang="ru-RU" dirty="0"/>
+          </a:p>
+          <a:p>
+            <a:pPr marL="0" indent="0">
+              <a:buNone/>
+            </a:pPr>
+            <a:r>
+              <a:rPr lang="en-US" b="1" dirty="0" smtClean="0"/>
+              <a:t>ACK </a:t>
+            </a:r>
+            <a:r>
+              <a:rPr lang="en-US" b="1" dirty="0" err="1" smtClean="0"/>
+              <a:t>Num</a:t>
+            </a:r>
+            <a:r>
+              <a:rPr lang="en-US" b="1" dirty="0"/>
+              <a:t> </a:t>
+            </a:r>
+            <a:r>
+              <a:rPr lang="en-US" dirty="0" smtClean="0"/>
+              <a:t>- </a:t>
+            </a:r>
+            <a:r>
+              <a:rPr lang="ru-RU" dirty="0" smtClean="0"/>
+              <a:t>Максимальный полученный байт + 1</a:t>
+            </a:r>
+            <a:endParaRPr lang="ru-RU" dirty="0"/>
+          </a:p>
+        </p:txBody>
+      </p:sp>
+      <p:pic>
+        <p:nvPicPr>
+          <p:cNvPr id="6" name="Рисунок 5"/>
+          <p:cNvPicPr>
+            <a:picLocks noChangeAspect="1"/>
+          </p:cNvPicPr>
+          <p:nvPr/>
+        </p:nvPicPr>
+        <p:blipFill>
+          <a:blip r:embed="rId3"/>
+          <a:stretch>
+            <a:fillRect/>
+          </a:stretch>
+        </p:blipFill>
+        <p:spPr>
+          <a:xfrm>
+            <a:off x="838200" y="4975714"/>
+            <a:ext cx="4772025" cy="933450"/>
+          </a:xfrm>
+          <a:prstGeom prst="rect">
+            <a:avLst/>
+          </a:prstGeom>
+        </p:spPr>
+      </p:pic>
+    </p:spTree>
+    <p:extLst>
+      <p:ext uri="{BB962C8B-B14F-4D97-AF65-F5344CB8AC3E}">
+        <p14:creationId xmlns:p14="http://schemas.microsoft.com/office/powerpoint/2010/main" val="3573747553"/>
+      </p:ext>
+    </p:extLst>
+  </p:cSld>
+  <p:clrMapOvr>
+    <a:masterClrMapping/>
+  </p:clrMapOvr>
+</p:sld>
+</file>
+
 <file path=ppt/slides/slide2.xml><?xml version="1.0" encoding="utf-8"?>
 <p:sld xmlns:a="http://schemas.openxmlformats.org/drawingml/2006/main" xmlns:r="http://schemas.openxmlformats.org/officeDocument/2006/relationships" xmlns:p="http://schemas.openxmlformats.org/presentationml/2006/main">
   <p:cSld>
@@ -3217,6 +4747,1069 @@
     <p:extLst>
       <p:ext uri="{BB962C8B-B14F-4D97-AF65-F5344CB8AC3E}">
         <p14:creationId xmlns:p14="http://schemas.microsoft.com/office/powerpoint/2010/main" val="1002842256"/>
+      </p:ext>
+    </p:extLst>
+  </p:cSld>
+  <p:clrMapOvr>
+    <a:masterClrMapping/>
+  </p:clrMapOvr>
+</p:sld>
+</file>
+
+<file path=ppt/slides/slide20.xml><?xml version="1.0" encoding="utf-8"?>
+<p:sld xmlns:a="http://schemas.openxmlformats.org/drawingml/2006/main" xmlns:r="http://schemas.openxmlformats.org/officeDocument/2006/relationships" xmlns:p="http://schemas.openxmlformats.org/presentationml/2006/main">
+  <p:cSld>
+    <p:spTree>
+      <p:nvGrpSpPr>
+        <p:cNvPr id="1" name=""/>
+        <p:cNvGrpSpPr/>
+        <p:nvPr/>
+      </p:nvGrpSpPr>
+      <p:grpSpPr>
+        <a:xfrm>
+          <a:off x="0" y="0"/>
+          <a:ext cx="0" cy="0"/>
+          <a:chOff x="0" y="0"/>
+          <a:chExt cx="0" cy="0"/>
+        </a:xfrm>
+      </p:grpSpPr>
+      <p:sp>
+        <p:nvSpPr>
+          <p:cNvPr id="5" name="Заголовок 4"/>
+          <p:cNvSpPr>
+            <a:spLocks noGrp="1"/>
+          </p:cNvSpPr>
+          <p:nvPr>
+            <p:ph type="title"/>
+          </p:nvPr>
+        </p:nvSpPr>
+        <p:spPr/>
+        <p:txBody>
+          <a:bodyPr/>
+          <a:lstStyle/>
+          <a:p>
+            <a:r>
+              <a:rPr lang="ru-RU" b="1" dirty="0"/>
+              <a:t>Надёжная доставка </a:t>
+            </a:r>
+            <a:r>
+              <a:rPr lang="af-ZA" b="1" dirty="0"/>
+              <a:t>TCP</a:t>
+            </a:r>
+            <a:endParaRPr lang="ru-RU" dirty="0"/>
+          </a:p>
+        </p:txBody>
+      </p:sp>
+      <p:pic>
+        <p:nvPicPr>
+          <p:cNvPr id="7" name="Объект 6"/>
+          <p:cNvPicPr>
+            <a:picLocks noGrp="1" noChangeAspect="1"/>
+          </p:cNvPicPr>
+          <p:nvPr>
+            <p:ph idx="1"/>
+          </p:nvPr>
+        </p:nvPicPr>
+        <p:blipFill>
+          <a:blip r:embed="rId2"/>
+          <a:stretch>
+            <a:fillRect/>
+          </a:stretch>
+        </p:blipFill>
+        <p:spPr>
+          <a:xfrm>
+            <a:off x="3160909" y="1816831"/>
+            <a:ext cx="5870182" cy="4969221"/>
+          </a:xfrm>
+          <a:prstGeom prst="rect">
+            <a:avLst/>
+          </a:prstGeom>
+        </p:spPr>
+      </p:pic>
+    </p:spTree>
+    <p:extLst>
+      <p:ext uri="{BB962C8B-B14F-4D97-AF65-F5344CB8AC3E}">
+        <p14:creationId xmlns:p14="http://schemas.microsoft.com/office/powerpoint/2010/main" val="1353838247"/>
+      </p:ext>
+    </p:extLst>
+  </p:cSld>
+  <p:clrMapOvr>
+    <a:masterClrMapping/>
+  </p:clrMapOvr>
+</p:sld>
+</file>
+
+<file path=ppt/slides/slide21.xml><?xml version="1.0" encoding="utf-8"?>
+<p:sld xmlns:a="http://schemas.openxmlformats.org/drawingml/2006/main" xmlns:r="http://schemas.openxmlformats.org/officeDocument/2006/relationships" xmlns:p="http://schemas.openxmlformats.org/presentationml/2006/main">
+  <p:cSld>
+    <p:spTree>
+      <p:nvGrpSpPr>
+        <p:cNvPr id="1" name=""/>
+        <p:cNvGrpSpPr/>
+        <p:nvPr/>
+      </p:nvGrpSpPr>
+      <p:grpSpPr>
+        <a:xfrm>
+          <a:off x="0" y="0"/>
+          <a:ext cx="0" cy="0"/>
+          <a:chOff x="0" y="0"/>
+          <a:chExt cx="0" cy="0"/>
+        </a:xfrm>
+      </p:grpSpPr>
+      <p:sp>
+        <p:nvSpPr>
+          <p:cNvPr id="2" name="Заголовок 1"/>
+          <p:cNvSpPr>
+            <a:spLocks noGrp="1"/>
+          </p:cNvSpPr>
+          <p:nvPr>
+            <p:ph type="title"/>
+          </p:nvPr>
+        </p:nvSpPr>
+        <p:spPr>
+          <a:xfrm>
+            <a:off x="838200" y="171694"/>
+            <a:ext cx="10515600" cy="1325563"/>
+          </a:xfrm>
+        </p:spPr>
+        <p:txBody>
+          <a:bodyPr/>
+          <a:lstStyle/>
+          <a:p>
+            <a:r>
+              <a:rPr lang="ru-RU" b="1" dirty="0"/>
+              <a:t>Надёжная доставка </a:t>
+            </a:r>
+            <a:r>
+              <a:rPr lang="af-ZA" b="1" dirty="0"/>
+              <a:t>TCP</a:t>
+            </a:r>
+            <a:endParaRPr lang="ru-RU" dirty="0"/>
+          </a:p>
+        </p:txBody>
+      </p:sp>
+      <p:pic>
+        <p:nvPicPr>
+          <p:cNvPr id="4" name="Объект 3"/>
+          <p:cNvPicPr>
+            <a:picLocks noGrp="1" noChangeAspect="1"/>
+          </p:cNvPicPr>
+          <p:nvPr>
+            <p:ph idx="1"/>
+          </p:nvPr>
+        </p:nvPicPr>
+        <p:blipFill>
+          <a:blip r:embed="rId2"/>
+          <a:stretch>
+            <a:fillRect/>
+          </a:stretch>
+        </p:blipFill>
+        <p:spPr>
+          <a:xfrm>
+            <a:off x="3011523" y="1314613"/>
+            <a:ext cx="6168954" cy="5407474"/>
+          </a:xfrm>
+          <a:prstGeom prst="rect">
+            <a:avLst/>
+          </a:prstGeom>
+        </p:spPr>
+      </p:pic>
+    </p:spTree>
+    <p:extLst>
+      <p:ext uri="{BB962C8B-B14F-4D97-AF65-F5344CB8AC3E}">
+        <p14:creationId xmlns:p14="http://schemas.microsoft.com/office/powerpoint/2010/main" val="471099421"/>
+      </p:ext>
+    </p:extLst>
+  </p:cSld>
+  <p:clrMapOvr>
+    <a:masterClrMapping/>
+  </p:clrMapOvr>
+</p:sld>
+</file>
+
+<file path=ppt/slides/slide22.xml><?xml version="1.0" encoding="utf-8"?>
+<p:sld xmlns:a="http://schemas.openxmlformats.org/drawingml/2006/main" xmlns:r="http://schemas.openxmlformats.org/officeDocument/2006/relationships" xmlns:p="http://schemas.openxmlformats.org/presentationml/2006/main">
+  <p:cSld>
+    <p:spTree>
+      <p:nvGrpSpPr>
+        <p:cNvPr id="1" name=""/>
+        <p:cNvGrpSpPr/>
+        <p:nvPr/>
+      </p:nvGrpSpPr>
+      <p:grpSpPr>
+        <a:xfrm>
+          <a:off x="0" y="0"/>
+          <a:ext cx="0" cy="0"/>
+          <a:chOff x="0" y="0"/>
+          <a:chExt cx="0" cy="0"/>
+        </a:xfrm>
+      </p:grpSpPr>
+      <p:pic>
+        <p:nvPicPr>
+          <p:cNvPr id="4" name="Объект 3"/>
+          <p:cNvPicPr>
+            <a:picLocks noGrp="1" noChangeAspect="1"/>
+          </p:cNvPicPr>
+          <p:nvPr>
+            <p:ph idx="1"/>
+          </p:nvPr>
+        </p:nvPicPr>
+        <p:blipFill>
+          <a:blip r:embed="rId2"/>
+          <a:stretch>
+            <a:fillRect/>
+          </a:stretch>
+        </p:blipFill>
+        <p:spPr>
+          <a:xfrm>
+            <a:off x="4044555" y="195595"/>
+            <a:ext cx="4102890" cy="6333060"/>
+          </a:xfrm>
+          <a:prstGeom prst="rect">
+            <a:avLst/>
+          </a:prstGeom>
+        </p:spPr>
+      </p:pic>
+    </p:spTree>
+    <p:extLst>
+      <p:ext uri="{BB962C8B-B14F-4D97-AF65-F5344CB8AC3E}">
+        <p14:creationId xmlns:p14="http://schemas.microsoft.com/office/powerpoint/2010/main" val="2181881424"/>
+      </p:ext>
+    </p:extLst>
+  </p:cSld>
+  <p:clrMapOvr>
+    <a:masterClrMapping/>
+  </p:clrMapOvr>
+</p:sld>
+</file>
+
+<file path=ppt/slides/slide23.xml><?xml version="1.0" encoding="utf-8"?>
+<p:sld xmlns:a="http://schemas.openxmlformats.org/drawingml/2006/main" xmlns:r="http://schemas.openxmlformats.org/officeDocument/2006/relationships" xmlns:p="http://schemas.openxmlformats.org/presentationml/2006/main">
+  <p:cSld>
+    <p:spTree>
+      <p:nvGrpSpPr>
+        <p:cNvPr id="1" name=""/>
+        <p:cNvGrpSpPr/>
+        <p:nvPr/>
+      </p:nvGrpSpPr>
+      <p:grpSpPr>
+        <a:xfrm>
+          <a:off x="0" y="0"/>
+          <a:ext cx="0" cy="0"/>
+          <a:chOff x="0" y="0"/>
+          <a:chExt cx="0" cy="0"/>
+        </a:xfrm>
+      </p:grpSpPr>
+      <p:sp>
+        <p:nvSpPr>
+          <p:cNvPr id="2" name="Заголовок 1"/>
+          <p:cNvSpPr>
+            <a:spLocks noGrp="1"/>
+          </p:cNvSpPr>
+          <p:nvPr>
+            <p:ph type="title"/>
+          </p:nvPr>
+        </p:nvSpPr>
+        <p:spPr>
+          <a:xfrm>
+            <a:off x="838200" y="365125"/>
+            <a:ext cx="10515600" cy="786667"/>
+          </a:xfrm>
+        </p:spPr>
+        <p:txBody>
+          <a:bodyPr/>
+          <a:lstStyle/>
+          <a:p>
+            <a:r>
+              <a:rPr lang="en-US" b="1" dirty="0" smtClean="0"/>
+              <a:t>TCP </a:t>
+            </a:r>
+            <a:r>
+              <a:rPr lang="ru-RU" b="1" dirty="0" smtClean="0"/>
+              <a:t>заголовок</a:t>
+            </a:r>
+            <a:endParaRPr lang="ru-RU" b="1" dirty="0"/>
+          </a:p>
+        </p:txBody>
+      </p:sp>
+      <p:pic>
+        <p:nvPicPr>
+          <p:cNvPr id="4" name="Объект 3"/>
+          <p:cNvPicPr>
+            <a:picLocks noGrp="1" noChangeAspect="1"/>
+          </p:cNvPicPr>
+          <p:nvPr>
+            <p:ph sz="half" idx="1"/>
+          </p:nvPr>
+        </p:nvPicPr>
+        <p:blipFill>
+          <a:blip r:embed="rId2"/>
+          <a:stretch>
+            <a:fillRect/>
+          </a:stretch>
+        </p:blipFill>
+        <p:spPr>
+          <a:xfrm>
+            <a:off x="3016629" y="1019907"/>
+            <a:ext cx="6158741" cy="5752567"/>
+          </a:xfrm>
+          <a:prstGeom prst="rect">
+            <a:avLst/>
+          </a:prstGeom>
+        </p:spPr>
+      </p:pic>
+    </p:spTree>
+    <p:extLst>
+      <p:ext uri="{BB962C8B-B14F-4D97-AF65-F5344CB8AC3E}">
+        <p14:creationId xmlns:p14="http://schemas.microsoft.com/office/powerpoint/2010/main" val="1000881749"/>
+      </p:ext>
+    </p:extLst>
+  </p:cSld>
+  <p:clrMapOvr>
+    <a:masterClrMapping/>
+  </p:clrMapOvr>
+</p:sld>
+</file>
+
+<file path=ppt/slides/slide24.xml><?xml version="1.0" encoding="utf-8"?>
+<p:sld xmlns:a="http://schemas.openxmlformats.org/drawingml/2006/main" xmlns:r="http://schemas.openxmlformats.org/officeDocument/2006/relationships" xmlns:p="http://schemas.openxmlformats.org/presentationml/2006/main">
+  <p:cSld>
+    <p:spTree>
+      <p:nvGrpSpPr>
+        <p:cNvPr id="1" name=""/>
+        <p:cNvGrpSpPr/>
+        <p:nvPr/>
+      </p:nvGrpSpPr>
+      <p:grpSpPr>
+        <a:xfrm>
+          <a:off x="0" y="0"/>
+          <a:ext cx="0" cy="0"/>
+          <a:chOff x="0" y="0"/>
+          <a:chExt cx="0" cy="0"/>
+        </a:xfrm>
+      </p:grpSpPr>
+      <p:sp>
+        <p:nvSpPr>
+          <p:cNvPr id="2" name="Заголовок 1"/>
+          <p:cNvSpPr>
+            <a:spLocks noGrp="1"/>
+          </p:cNvSpPr>
+          <p:nvPr>
+            <p:ph type="title"/>
+          </p:nvPr>
+        </p:nvSpPr>
+        <p:spPr/>
+        <p:txBody>
+          <a:bodyPr/>
+          <a:lstStyle/>
+          <a:p>
+            <a:r>
+              <a:rPr lang="en-US" b="1" dirty="0" smtClean="0"/>
+              <a:t>TCP Window Scaling</a:t>
+            </a:r>
+            <a:endParaRPr lang="ru-RU" b="1" dirty="0"/>
+          </a:p>
+        </p:txBody>
+      </p:sp>
+      <p:pic>
+        <p:nvPicPr>
+          <p:cNvPr id="5" name="Объект 4"/>
+          <p:cNvPicPr>
+            <a:picLocks noGrp="1" noChangeAspect="1"/>
+          </p:cNvPicPr>
+          <p:nvPr>
+            <p:ph sz="half" idx="1"/>
+          </p:nvPr>
+        </p:nvPicPr>
+        <p:blipFill>
+          <a:blip r:embed="rId2"/>
+          <a:stretch>
+            <a:fillRect/>
+          </a:stretch>
+        </p:blipFill>
+        <p:spPr>
+          <a:xfrm>
+            <a:off x="899746" y="1605817"/>
+            <a:ext cx="4291848" cy="1136517"/>
+          </a:xfrm>
+          <a:prstGeom prst="rect">
+            <a:avLst/>
+          </a:prstGeom>
+        </p:spPr>
+      </p:pic>
+      <p:sp>
+        <p:nvSpPr>
+          <p:cNvPr id="4" name="Объект 3"/>
+          <p:cNvSpPr>
+            <a:spLocks noGrp="1"/>
+          </p:cNvSpPr>
+          <p:nvPr>
+            <p:ph sz="half" idx="2"/>
+          </p:nvPr>
+        </p:nvSpPr>
+        <p:spPr>
+          <a:xfrm>
+            <a:off x="6172200" y="1825625"/>
+            <a:ext cx="5838092" cy="4351338"/>
+          </a:xfrm>
+        </p:spPr>
+        <p:txBody>
+          <a:bodyPr/>
+          <a:lstStyle/>
+          <a:p>
+            <a:pPr marL="0" indent="0">
+              <a:buNone/>
+            </a:pPr>
+            <a:r>
+              <a:rPr lang="ru-RU" dirty="0" smtClean="0"/>
+              <a:t>Параметр окна в заголовке:</a:t>
+            </a:r>
+          </a:p>
+          <a:p>
+            <a:pPr marL="0" indent="0">
+              <a:buNone/>
+            </a:pPr>
+            <a:r>
+              <a:rPr lang="ru-RU" dirty="0" smtClean="0"/>
+              <a:t>1111111111111111</a:t>
+            </a:r>
+            <a:r>
+              <a:rPr lang="en-US" dirty="0" smtClean="0"/>
+              <a:t> = 65535</a:t>
+            </a:r>
+            <a:r>
+              <a:rPr lang="ru-RU" dirty="0" smtClean="0"/>
+              <a:t> – 16 бит</a:t>
+            </a:r>
+          </a:p>
+          <a:p>
+            <a:pPr marL="0" indent="0">
+              <a:buNone/>
+            </a:pPr>
+            <a:r>
+              <a:rPr lang="ru-RU" dirty="0" smtClean="0"/>
+              <a:t>Параметр сдвига в опции:</a:t>
+            </a:r>
+          </a:p>
+          <a:p>
+            <a:pPr marL="0" indent="0">
+              <a:buNone/>
+            </a:pPr>
+            <a:r>
+              <a:rPr lang="ru-RU" dirty="0" smtClean="0"/>
+              <a:t>111</a:t>
+            </a:r>
+            <a:r>
+              <a:rPr lang="en-US" dirty="0" smtClean="0"/>
+              <a:t> = 8</a:t>
+            </a:r>
+            <a:r>
+              <a:rPr lang="ru-RU" dirty="0" smtClean="0"/>
+              <a:t> – 3 бита</a:t>
+            </a:r>
+          </a:p>
+          <a:p>
+            <a:pPr marL="0" indent="0">
+              <a:buNone/>
+            </a:pPr>
+            <a:r>
+              <a:rPr lang="ru-RU" dirty="0" smtClean="0"/>
+              <a:t>Параметр окна сдвигается влево:</a:t>
+            </a:r>
+            <a:endParaRPr lang="en-US" dirty="0" smtClean="0"/>
+          </a:p>
+          <a:p>
+            <a:pPr marL="0" indent="0">
+              <a:buNone/>
+            </a:pPr>
+            <a:r>
+              <a:rPr lang="ru-RU" dirty="0" smtClean="0"/>
+              <a:t>1111111111111111</a:t>
+            </a:r>
+            <a:r>
+              <a:rPr lang="en-US" dirty="0" smtClean="0"/>
+              <a:t> &lt;&lt; 8 =</a:t>
+            </a:r>
+            <a:endParaRPr lang="ru-RU" dirty="0" smtClean="0"/>
+          </a:p>
+          <a:p>
+            <a:pPr marL="0" indent="0">
+              <a:buNone/>
+            </a:pPr>
+            <a:r>
+              <a:rPr lang="ru-RU" dirty="0" smtClean="0"/>
+              <a:t>1111111111111111</a:t>
+            </a:r>
+            <a:r>
+              <a:rPr lang="en-US" dirty="0" smtClean="0"/>
+              <a:t>00000000 </a:t>
+            </a:r>
+            <a:r>
+              <a:rPr lang="en-US" dirty="0"/>
+              <a:t>= </a:t>
+            </a:r>
+            <a:r>
+              <a:rPr lang="en-US" dirty="0" smtClean="0"/>
+              <a:t>16776960</a:t>
+            </a:r>
+            <a:r>
+              <a:rPr lang="ru-RU" dirty="0" smtClean="0"/>
+              <a:t> байт </a:t>
+            </a:r>
+            <a:r>
+              <a:rPr lang="en-US" dirty="0" smtClean="0"/>
+              <a:t>~ 16 </a:t>
+            </a:r>
+            <a:r>
+              <a:rPr lang="ru-RU" dirty="0" err="1" smtClean="0"/>
+              <a:t>мбайт</a:t>
+            </a:r>
+            <a:endParaRPr lang="ru-RU" dirty="0"/>
+          </a:p>
+        </p:txBody>
+      </p:sp>
+      <p:pic>
+        <p:nvPicPr>
+          <p:cNvPr id="4098" name="Picture 2" descr="TCP Window Size"/>
+          <p:cNvPicPr>
+            <a:picLocks noChangeAspect="1" noChangeArrowheads="1"/>
+          </p:cNvPicPr>
+          <p:nvPr/>
+        </p:nvPicPr>
+        <p:blipFill>
+          <a:blip r:embed="rId3">
+            <a:extLst>
+              <a:ext uri="{28A0092B-C50C-407E-A947-70E740481C1C}">
+                <a14:useLocalDpi xmlns:a14="http://schemas.microsoft.com/office/drawing/2010/main" val="0"/>
+              </a:ext>
+            </a:extLst>
+          </a:blip>
+          <a:srcRect/>
+          <a:stretch>
+            <a:fillRect/>
+          </a:stretch>
+        </p:blipFill>
+        <p:spPr bwMode="auto">
+          <a:xfrm>
+            <a:off x="73870" y="3239721"/>
+            <a:ext cx="5943600" cy="2676525"/>
+          </a:xfrm>
+          <a:prstGeom prst="rect">
+            <a:avLst/>
+          </a:prstGeom>
+          <a:noFill/>
+          <a:extLst>
+            <a:ext uri="{909E8E84-426E-40DD-AFC4-6F175D3DCCD1}">
+              <a14:hiddenFill xmlns:a14="http://schemas.microsoft.com/office/drawing/2010/main">
+                <a:solidFill>
+                  <a:srgbClr val="FFFFFF"/>
+                </a:solidFill>
+              </a14:hiddenFill>
+            </a:ext>
+          </a:extLst>
+        </p:spPr>
+      </p:pic>
+    </p:spTree>
+    <p:extLst>
+      <p:ext uri="{BB962C8B-B14F-4D97-AF65-F5344CB8AC3E}">
+        <p14:creationId xmlns:p14="http://schemas.microsoft.com/office/powerpoint/2010/main" val="3394493269"/>
+      </p:ext>
+    </p:extLst>
+  </p:cSld>
+  <p:clrMapOvr>
+    <a:masterClrMapping/>
+  </p:clrMapOvr>
+</p:sld>
+</file>
+
+<file path=ppt/slides/slide25.xml><?xml version="1.0" encoding="utf-8"?>
+<p:sld xmlns:a="http://schemas.openxmlformats.org/drawingml/2006/main" xmlns:r="http://schemas.openxmlformats.org/officeDocument/2006/relationships" xmlns:p="http://schemas.openxmlformats.org/presentationml/2006/main">
+  <p:cSld>
+    <p:spTree>
+      <p:nvGrpSpPr>
+        <p:cNvPr id="1" name=""/>
+        <p:cNvGrpSpPr/>
+        <p:nvPr/>
+      </p:nvGrpSpPr>
+      <p:grpSpPr>
+        <a:xfrm>
+          <a:off x="0" y="0"/>
+          <a:ext cx="0" cy="0"/>
+          <a:chOff x="0" y="0"/>
+          <a:chExt cx="0" cy="0"/>
+        </a:xfrm>
+      </p:grpSpPr>
+      <p:sp>
+        <p:nvSpPr>
+          <p:cNvPr id="2" name="Заголовок 1"/>
+          <p:cNvSpPr>
+            <a:spLocks noGrp="1"/>
+          </p:cNvSpPr>
+          <p:nvPr>
+            <p:ph type="title"/>
+          </p:nvPr>
+        </p:nvSpPr>
+        <p:spPr/>
+        <p:txBody>
+          <a:bodyPr/>
+          <a:lstStyle/>
+          <a:p>
+            <a:r>
+              <a:rPr lang="en-US" b="1" dirty="0" smtClean="0"/>
+              <a:t>TCP SACK</a:t>
+            </a:r>
+            <a:endParaRPr lang="ru-RU" b="1" dirty="0"/>
+          </a:p>
+        </p:txBody>
+      </p:sp>
+      <p:pic>
+        <p:nvPicPr>
+          <p:cNvPr id="5" name="Объект 4"/>
+          <p:cNvPicPr>
+            <a:picLocks noGrp="1" noChangeAspect="1"/>
+          </p:cNvPicPr>
+          <p:nvPr>
+            <p:ph sz="half" idx="1"/>
+          </p:nvPr>
+        </p:nvPicPr>
+        <p:blipFill>
+          <a:blip r:embed="rId2"/>
+          <a:stretch>
+            <a:fillRect/>
+          </a:stretch>
+        </p:blipFill>
+        <p:spPr>
+          <a:xfrm>
+            <a:off x="87209" y="2883875"/>
+            <a:ext cx="6851728" cy="2096087"/>
+          </a:xfrm>
+          <a:prstGeom prst="rect">
+            <a:avLst/>
+          </a:prstGeom>
+        </p:spPr>
+      </p:pic>
+      <p:pic>
+        <p:nvPicPr>
+          <p:cNvPr id="6" name="Объект 5"/>
+          <p:cNvPicPr>
+            <a:picLocks noGrp="1" noChangeAspect="1"/>
+          </p:cNvPicPr>
+          <p:nvPr>
+            <p:ph sz="half" idx="2"/>
+          </p:nvPr>
+        </p:nvPicPr>
+        <p:blipFill>
+          <a:blip r:embed="rId3"/>
+          <a:stretch>
+            <a:fillRect/>
+          </a:stretch>
+        </p:blipFill>
+        <p:spPr>
+          <a:xfrm>
+            <a:off x="7124701" y="365125"/>
+            <a:ext cx="4143953" cy="2419688"/>
+          </a:xfrm>
+          <a:prstGeom prst="rect">
+            <a:avLst/>
+          </a:prstGeom>
+        </p:spPr>
+      </p:pic>
+      <p:pic>
+        <p:nvPicPr>
+          <p:cNvPr id="7" name="Рисунок 6"/>
+          <p:cNvPicPr>
+            <a:picLocks noChangeAspect="1"/>
+          </p:cNvPicPr>
+          <p:nvPr/>
+        </p:nvPicPr>
+        <p:blipFill>
+          <a:blip r:embed="rId4"/>
+          <a:stretch>
+            <a:fillRect/>
+          </a:stretch>
+        </p:blipFill>
+        <p:spPr>
+          <a:xfrm>
+            <a:off x="6938937" y="3094893"/>
+            <a:ext cx="4515480" cy="3353268"/>
+          </a:xfrm>
+          <a:prstGeom prst="rect">
+            <a:avLst/>
+          </a:prstGeom>
+        </p:spPr>
+      </p:pic>
+    </p:spTree>
+    <p:extLst>
+      <p:ext uri="{BB962C8B-B14F-4D97-AF65-F5344CB8AC3E}">
+        <p14:creationId xmlns:p14="http://schemas.microsoft.com/office/powerpoint/2010/main" val="2873544550"/>
+      </p:ext>
+    </p:extLst>
+  </p:cSld>
+  <p:clrMapOvr>
+    <a:masterClrMapping/>
+  </p:clrMapOvr>
+</p:sld>
+</file>
+
+<file path=ppt/slides/slide26.xml><?xml version="1.0" encoding="utf-8"?>
+<p:sld xmlns:a="http://schemas.openxmlformats.org/drawingml/2006/main" xmlns:r="http://schemas.openxmlformats.org/officeDocument/2006/relationships" xmlns:p="http://schemas.openxmlformats.org/presentationml/2006/main">
+  <p:cSld>
+    <p:spTree>
+      <p:nvGrpSpPr>
+        <p:cNvPr id="1" name=""/>
+        <p:cNvGrpSpPr/>
+        <p:nvPr/>
+      </p:nvGrpSpPr>
+      <p:grpSpPr>
+        <a:xfrm>
+          <a:off x="0" y="0"/>
+          <a:ext cx="0" cy="0"/>
+          <a:chOff x="0" y="0"/>
+          <a:chExt cx="0" cy="0"/>
+        </a:xfrm>
+      </p:grpSpPr>
+      <p:sp>
+        <p:nvSpPr>
+          <p:cNvPr id="2" name="Заголовок 1"/>
+          <p:cNvSpPr>
+            <a:spLocks noGrp="1"/>
+          </p:cNvSpPr>
+          <p:nvPr>
+            <p:ph type="title"/>
+          </p:nvPr>
+        </p:nvSpPr>
+        <p:spPr/>
+        <p:txBody>
+          <a:bodyPr/>
+          <a:lstStyle/>
+          <a:p>
+            <a:r>
+              <a:rPr lang="en-US" b="1" dirty="0"/>
+              <a:t>TCP SACK</a:t>
+            </a:r>
+            <a:endParaRPr lang="ru-RU" dirty="0"/>
+          </a:p>
+        </p:txBody>
+      </p:sp>
+      <p:pic>
+        <p:nvPicPr>
+          <p:cNvPr id="6" name="Объект 5"/>
+          <p:cNvPicPr>
+            <a:picLocks noGrp="1" noChangeAspect="1"/>
+          </p:cNvPicPr>
+          <p:nvPr>
+            <p:ph idx="1"/>
+          </p:nvPr>
+        </p:nvPicPr>
+        <p:blipFill>
+          <a:blip r:embed="rId2"/>
+          <a:stretch>
+            <a:fillRect/>
+          </a:stretch>
+        </p:blipFill>
+        <p:spPr>
+          <a:xfrm>
+            <a:off x="2221319" y="1518187"/>
+            <a:ext cx="7749362" cy="5019260"/>
+          </a:xfrm>
+          <a:prstGeom prst="rect">
+            <a:avLst/>
+          </a:prstGeom>
+        </p:spPr>
+      </p:pic>
+    </p:spTree>
+    <p:extLst>
+      <p:ext uri="{BB962C8B-B14F-4D97-AF65-F5344CB8AC3E}">
+        <p14:creationId xmlns:p14="http://schemas.microsoft.com/office/powerpoint/2010/main" val="3312630187"/>
+      </p:ext>
+    </p:extLst>
+  </p:cSld>
+  <p:clrMapOvr>
+    <a:masterClrMapping/>
+  </p:clrMapOvr>
+</p:sld>
+</file>
+
+<file path=ppt/slides/slide27.xml><?xml version="1.0" encoding="utf-8"?>
+<p:sld xmlns:a="http://schemas.openxmlformats.org/drawingml/2006/main" xmlns:r="http://schemas.openxmlformats.org/officeDocument/2006/relationships" xmlns:p="http://schemas.openxmlformats.org/presentationml/2006/main">
+  <p:cSld>
+    <p:spTree>
+      <p:nvGrpSpPr>
+        <p:cNvPr id="1" name=""/>
+        <p:cNvGrpSpPr/>
+        <p:nvPr/>
+      </p:nvGrpSpPr>
+      <p:grpSpPr>
+        <a:xfrm>
+          <a:off x="0" y="0"/>
+          <a:ext cx="0" cy="0"/>
+          <a:chOff x="0" y="0"/>
+          <a:chExt cx="0" cy="0"/>
+        </a:xfrm>
+      </p:grpSpPr>
+      <p:sp>
+        <p:nvSpPr>
+          <p:cNvPr id="2" name="Заголовок 1"/>
+          <p:cNvSpPr>
+            <a:spLocks noGrp="1"/>
+          </p:cNvSpPr>
+          <p:nvPr>
+            <p:ph type="title"/>
+          </p:nvPr>
+        </p:nvSpPr>
+        <p:spPr>
+          <a:xfrm>
+            <a:off x="838200" y="365126"/>
+            <a:ext cx="10515600" cy="522897"/>
+          </a:xfrm>
+        </p:spPr>
+        <p:txBody>
+          <a:bodyPr>
+            <a:normAutofit fontScale="90000"/>
+          </a:bodyPr>
+          <a:lstStyle/>
+          <a:p>
+            <a:r>
+              <a:rPr lang="af-ZA" b="1" dirty="0"/>
+              <a:t>TCP Congestion </a:t>
+            </a:r>
+            <a:r>
+              <a:rPr lang="af-ZA" b="1" dirty="0" smtClean="0"/>
+              <a:t>Control</a:t>
+            </a:r>
+            <a:endParaRPr lang="ru-RU" dirty="0"/>
+          </a:p>
+        </p:txBody>
+      </p:sp>
+      <p:pic>
+        <p:nvPicPr>
+          <p:cNvPr id="5122" name="Picture 2" descr="../_images/f06-10-9780123850591.png"/>
+          <p:cNvPicPr>
+            <a:picLocks noGrp="1" noChangeAspect="1" noChangeArrowheads="1"/>
+          </p:cNvPicPr>
+          <p:nvPr>
+            <p:ph idx="1"/>
+          </p:nvPr>
+        </p:nvPicPr>
+        <p:blipFill>
+          <a:blip r:embed="rId2">
+            <a:extLst>
+              <a:ext uri="{28A0092B-C50C-407E-A947-70E740481C1C}">
+                <a14:useLocalDpi xmlns:a14="http://schemas.microsoft.com/office/drawing/2010/main" val="0"/>
+              </a:ext>
+            </a:extLst>
+          </a:blip>
+          <a:srcRect/>
+          <a:stretch>
+            <a:fillRect/>
+          </a:stretch>
+        </p:blipFill>
+        <p:spPr bwMode="auto">
+          <a:xfrm>
+            <a:off x="2133601" y="888023"/>
+            <a:ext cx="2254964" cy="5832700"/>
+          </a:xfrm>
+          <a:prstGeom prst="rect">
+            <a:avLst/>
+          </a:prstGeom>
+          <a:noFill/>
+          <a:extLst>
+            <a:ext uri="{909E8E84-426E-40DD-AFC4-6F175D3DCCD1}">
+              <a14:hiddenFill xmlns:a14="http://schemas.microsoft.com/office/drawing/2010/main">
+                <a:solidFill>
+                  <a:srgbClr val="FFFFFF"/>
+                </a:solidFill>
+              </a14:hiddenFill>
+            </a:ext>
+          </a:extLst>
+        </p:spPr>
+      </p:pic>
+      <p:pic>
+        <p:nvPicPr>
+          <p:cNvPr id="6" name="Рисунок 5"/>
+          <p:cNvPicPr>
+            <a:picLocks noChangeAspect="1"/>
+          </p:cNvPicPr>
+          <p:nvPr/>
+        </p:nvPicPr>
+        <p:blipFill>
+          <a:blip r:embed="rId3"/>
+          <a:stretch>
+            <a:fillRect/>
+          </a:stretch>
+        </p:blipFill>
+        <p:spPr>
+          <a:xfrm>
+            <a:off x="5213372" y="3228974"/>
+            <a:ext cx="6723820" cy="3107795"/>
+          </a:xfrm>
+          <a:prstGeom prst="rect">
+            <a:avLst/>
+          </a:prstGeom>
+        </p:spPr>
+      </p:pic>
+      <p:sp>
+        <p:nvSpPr>
+          <p:cNvPr id="7" name="TextBox 6"/>
+          <p:cNvSpPr txBox="1"/>
+          <p:nvPr/>
+        </p:nvSpPr>
+        <p:spPr>
+          <a:xfrm>
+            <a:off x="5772150" y="1735333"/>
+            <a:ext cx="5334000" cy="646331"/>
+          </a:xfrm>
+          <a:prstGeom prst="rect">
+            <a:avLst/>
+          </a:prstGeom>
+          <a:noFill/>
+        </p:spPr>
+        <p:txBody>
+          <a:bodyPr wrap="square" rtlCol="0">
+            <a:spAutoFit/>
+          </a:bodyPr>
+          <a:lstStyle/>
+          <a:p>
+            <a:r>
+              <a:rPr lang="ru-RU" dirty="0" smtClean="0"/>
+              <a:t>Алгоритмы управления перегрузкой: </a:t>
+            </a:r>
+            <a:r>
+              <a:rPr lang="en-US" dirty="0" smtClean="0"/>
+              <a:t>TCP Tahoe, TCP Reno, TCP Cubic, BBR </a:t>
+            </a:r>
+            <a:r>
+              <a:rPr lang="ru-RU" dirty="0" smtClean="0"/>
+              <a:t>и прочие.</a:t>
+            </a:r>
+            <a:endParaRPr lang="ru-RU" dirty="0"/>
+          </a:p>
+        </p:txBody>
+      </p:sp>
+    </p:spTree>
+    <p:extLst>
+      <p:ext uri="{BB962C8B-B14F-4D97-AF65-F5344CB8AC3E}">
+        <p14:creationId xmlns:p14="http://schemas.microsoft.com/office/powerpoint/2010/main" val="1000637215"/>
+      </p:ext>
+    </p:extLst>
+  </p:cSld>
+  <p:clrMapOvr>
+    <a:masterClrMapping/>
+  </p:clrMapOvr>
+</p:sld>
+</file>
+
+<file path=ppt/slides/slide28.xml><?xml version="1.0" encoding="utf-8"?>
+<p:sld xmlns:a="http://schemas.openxmlformats.org/drawingml/2006/main" xmlns:r="http://schemas.openxmlformats.org/officeDocument/2006/relationships" xmlns:p="http://schemas.openxmlformats.org/presentationml/2006/main">
+  <p:cSld>
+    <p:spTree>
+      <p:nvGrpSpPr>
+        <p:cNvPr id="1" name=""/>
+        <p:cNvGrpSpPr/>
+        <p:nvPr/>
+      </p:nvGrpSpPr>
+      <p:grpSpPr>
+        <a:xfrm>
+          <a:off x="0" y="0"/>
+          <a:ext cx="0" cy="0"/>
+          <a:chOff x="0" y="0"/>
+          <a:chExt cx="0" cy="0"/>
+        </a:xfrm>
+      </p:grpSpPr>
+      <p:sp>
+        <p:nvSpPr>
+          <p:cNvPr id="2" name="Заголовок 1"/>
+          <p:cNvSpPr>
+            <a:spLocks noGrp="1"/>
+          </p:cNvSpPr>
+          <p:nvPr>
+            <p:ph type="title"/>
+          </p:nvPr>
+        </p:nvSpPr>
+        <p:spPr/>
+        <p:txBody>
+          <a:bodyPr/>
+          <a:lstStyle/>
+          <a:p>
+            <a:r>
+              <a:rPr lang="en-US" b="1" dirty="0" smtClean="0"/>
+              <a:t>UDP</a:t>
+            </a:r>
+            <a:endParaRPr lang="ru-RU" b="1" dirty="0"/>
+          </a:p>
+        </p:txBody>
+      </p:sp>
+      <p:pic>
+        <p:nvPicPr>
+          <p:cNvPr id="4" name="Объект 3"/>
+          <p:cNvPicPr>
+            <a:picLocks noGrp="1" noChangeAspect="1"/>
+          </p:cNvPicPr>
+          <p:nvPr>
+            <p:ph idx="1"/>
+          </p:nvPr>
+        </p:nvPicPr>
+        <p:blipFill>
+          <a:blip r:embed="rId2"/>
+          <a:stretch>
+            <a:fillRect/>
+          </a:stretch>
+        </p:blipFill>
+        <p:spPr>
+          <a:xfrm>
+            <a:off x="0" y="1690688"/>
+            <a:ext cx="6096000" cy="4729070"/>
+          </a:xfrm>
+          <a:prstGeom prst="rect">
+            <a:avLst/>
+          </a:prstGeom>
+        </p:spPr>
+      </p:pic>
+      <p:pic>
+        <p:nvPicPr>
+          <p:cNvPr id="5" name="Picture 2" descr="Chapter 10. User Datagram Protocol (UDP) and IP Fragmentation - Shichao's  Notes"/>
+          <p:cNvPicPr>
+            <a:picLocks noChangeAspect="1" noChangeArrowheads="1"/>
+          </p:cNvPicPr>
+          <p:nvPr/>
+        </p:nvPicPr>
+        <p:blipFill>
+          <a:blip r:embed="rId3">
+            <a:extLst>
+              <a:ext uri="{28A0092B-C50C-407E-A947-70E740481C1C}">
+                <a14:useLocalDpi xmlns:a14="http://schemas.microsoft.com/office/drawing/2010/main" val="0"/>
+              </a:ext>
+            </a:extLst>
+          </a:blip>
+          <a:srcRect/>
+          <a:stretch>
+            <a:fillRect/>
+          </a:stretch>
+        </p:blipFill>
+        <p:spPr bwMode="auto">
+          <a:xfrm>
+            <a:off x="6096000" y="1690688"/>
+            <a:ext cx="6096000" cy="4671700"/>
+          </a:xfrm>
+          <a:prstGeom prst="rect">
+            <a:avLst/>
+          </a:prstGeom>
+          <a:noFill/>
+          <a:extLst>
+            <a:ext uri="{909E8E84-426E-40DD-AFC4-6F175D3DCCD1}">
+              <a14:hiddenFill xmlns:a14="http://schemas.microsoft.com/office/drawing/2010/main">
+                <a:solidFill>
+                  <a:srgbClr val="FFFFFF"/>
+                </a:solidFill>
+              </a14:hiddenFill>
+            </a:ext>
+          </a:extLst>
+        </p:spPr>
+      </p:pic>
+    </p:spTree>
+    <p:extLst>
+      <p:ext uri="{BB962C8B-B14F-4D97-AF65-F5344CB8AC3E}">
+        <p14:creationId xmlns:p14="http://schemas.microsoft.com/office/powerpoint/2010/main" val="1433629899"/>
       </p:ext>
     </p:extLst>
   </p:cSld>
@@ -3629,41 +6222,304 @@
           </a:p>
         </p:txBody>
       </p:sp>
-      <p:sp>
-        <p:nvSpPr>
-          <p:cNvPr id="3" name="Объект 2"/>
-          <p:cNvSpPr>
-            <a:spLocks noGrp="1"/>
-          </p:cNvSpPr>
+      <p:pic>
+        <p:nvPicPr>
+          <p:cNvPr id="5" name="Объект 4"/>
+          <p:cNvPicPr>
+            <a:picLocks noGrp="1" noChangeAspect="1"/>
+          </p:cNvPicPr>
           <p:nvPr>
             <p:ph sz="half" idx="1"/>
           </p:nvPr>
-        </p:nvSpPr>
-        <p:spPr/>
+        </p:nvPicPr>
+        <p:blipFill>
+          <a:blip r:embed="rId2"/>
+          <a:stretch>
+            <a:fillRect/>
+          </a:stretch>
+        </p:blipFill>
+        <p:spPr>
+          <a:xfrm>
+            <a:off x="322242" y="2755016"/>
+            <a:ext cx="5773758" cy="3526145"/>
+          </a:xfrm>
+          <a:prstGeom prst="rect">
+            <a:avLst/>
+          </a:prstGeom>
+        </p:spPr>
+      </p:pic>
+      <p:sp>
+        <p:nvSpPr>
+          <p:cNvPr id="6" name="Объект 5"/>
+          <p:cNvSpPr>
+            <a:spLocks noGrp="1"/>
+          </p:cNvSpPr>
+          <p:nvPr>
+            <p:ph sz="half" idx="2"/>
+          </p:nvPr>
+        </p:nvSpPr>
+        <p:spPr>
+          <a:xfrm>
+            <a:off x="6096000" y="3276785"/>
+            <a:ext cx="5767754" cy="2482606"/>
+          </a:xfrm>
+        </p:spPr>
         <p:txBody>
           <a:bodyPr/>
           <a:lstStyle/>
           <a:p>
-            <a:endParaRPr lang="ru-RU"/>
-          </a:p>
-        </p:txBody>
-      </p:sp>
-      <p:sp>
-        <p:nvSpPr>
-          <p:cNvPr id="4" name="Объект 3"/>
-          <p:cNvSpPr>
-            <a:spLocks noGrp="1"/>
-          </p:cNvSpPr>
-          <p:nvPr>
-            <p:ph sz="half" idx="2"/>
-          </p:nvPr>
-        </p:nvSpPr>
-        <p:spPr/>
-        <p:txBody>
-          <a:bodyPr/>
-          <a:lstStyle/>
-          <a:p>
-            <a:endParaRPr lang="ru-RU"/>
+            <a:r>
+              <a:rPr lang="ru-RU" dirty="0"/>
+              <a:t>0–1023: Системные / </a:t>
+            </a:r>
+            <a:r>
+              <a:rPr lang="ru-RU" dirty="0" err="1"/>
+              <a:t>Well-known</a:t>
+            </a:r>
+            <a:r>
+              <a:rPr lang="ru-RU" dirty="0"/>
+              <a:t> (</a:t>
+            </a:r>
+            <a:r>
+              <a:rPr lang="ru-RU" dirty="0" err="1"/>
+              <a:t>Web</a:t>
+            </a:r>
+            <a:r>
+              <a:rPr lang="ru-RU" dirty="0"/>
+              <a:t>, SSH, DNS).</a:t>
+            </a:r>
+          </a:p>
+          <a:p>
+            <a:r>
+              <a:rPr lang="ru-RU" dirty="0" smtClean="0"/>
+              <a:t>1024–49151</a:t>
+            </a:r>
+            <a:r>
+              <a:rPr lang="ru-RU" dirty="0"/>
+              <a:t>: </a:t>
+            </a:r>
+            <a:r>
+              <a:rPr lang="ru-RU" dirty="0" smtClean="0"/>
+              <a:t>Зарегистрированные</a:t>
+            </a:r>
+            <a:r>
+              <a:rPr lang="ru-RU" dirty="0"/>
+              <a:t>.</a:t>
+            </a:r>
+          </a:p>
+          <a:p>
+            <a:r>
+              <a:rPr lang="ru-RU" dirty="0" smtClean="0"/>
+              <a:t>49152–65535</a:t>
+            </a:r>
+            <a:r>
+              <a:rPr lang="ru-RU" dirty="0"/>
+              <a:t>: Эфемерные / Клиентские.</a:t>
+            </a:r>
+          </a:p>
+          <a:p>
+            <a:pPr marL="0" indent="0">
+              <a:buNone/>
+            </a:pPr>
+            <a:endParaRPr lang="ru-RU" dirty="0"/>
+          </a:p>
+        </p:txBody>
+      </p:sp>
+      <p:sp>
+        <p:nvSpPr>
+          <p:cNvPr id="7" name="Объект 5"/>
+          <p:cNvSpPr txBox="1">
+            <a:spLocks/>
+          </p:cNvSpPr>
+          <p:nvPr/>
+        </p:nvSpPr>
+        <p:spPr>
+          <a:xfrm>
+            <a:off x="838200" y="1513713"/>
+            <a:ext cx="11025554" cy="1132772"/>
+          </a:xfrm>
+          <a:prstGeom prst="rect">
+            <a:avLst/>
+          </a:prstGeom>
+        </p:spPr>
+        <p:txBody>
+          <a:bodyPr vert="horz" lIns="91440" tIns="45720" rIns="91440" bIns="45720" rtlCol="0">
+            <a:normAutofit/>
+          </a:bodyPr>
+          <a:lstStyle>
+            <a:lvl1pPr marL="228600" indent="-228600" algn="l" defTabSz="914400" rtl="0" eaLnBrk="1" latinLnBrk="0" hangingPunct="1">
+              <a:lnSpc>
+                <a:spcPct val="90000"/>
+              </a:lnSpc>
+              <a:spcBef>
+                <a:spcPts val="1000"/>
+              </a:spcBef>
+              <a:buFont typeface="Arial" panose="020B0604020202020204" pitchFamily="34" charset="0"/>
+              <a:buChar char="•"/>
+              <a:defRPr sz="2800" kern="1200">
+                <a:solidFill>
+                  <a:schemeClr val="tx1"/>
+                </a:solidFill>
+                <a:latin typeface="+mn-lt"/>
+                <a:ea typeface="+mn-ea"/>
+                <a:cs typeface="+mn-cs"/>
+              </a:defRPr>
+            </a:lvl1pPr>
+            <a:lvl2pPr marL="685800" indent="-228600" algn="l" defTabSz="914400" rtl="0" eaLnBrk="1" latinLnBrk="0" hangingPunct="1">
+              <a:lnSpc>
+                <a:spcPct val="90000"/>
+              </a:lnSpc>
+              <a:spcBef>
+                <a:spcPts val="500"/>
+              </a:spcBef>
+              <a:buFont typeface="Arial" panose="020B0604020202020204" pitchFamily="34" charset="0"/>
+              <a:buChar char="•"/>
+              <a:defRPr sz="2400" kern="1200">
+                <a:solidFill>
+                  <a:schemeClr val="tx1"/>
+                </a:solidFill>
+                <a:latin typeface="+mn-lt"/>
+                <a:ea typeface="+mn-ea"/>
+                <a:cs typeface="+mn-cs"/>
+              </a:defRPr>
+            </a:lvl2pPr>
+            <a:lvl3pPr marL="1143000" indent="-228600" algn="l" defTabSz="914400" rtl="0" eaLnBrk="1" latinLnBrk="0" hangingPunct="1">
+              <a:lnSpc>
+                <a:spcPct val="90000"/>
+              </a:lnSpc>
+              <a:spcBef>
+                <a:spcPts val="500"/>
+              </a:spcBef>
+              <a:buFont typeface="Arial" panose="020B0604020202020204" pitchFamily="34" charset="0"/>
+              <a:buChar char="•"/>
+              <a:defRPr sz="2000" kern="1200">
+                <a:solidFill>
+                  <a:schemeClr val="tx1"/>
+                </a:solidFill>
+                <a:latin typeface="+mn-lt"/>
+                <a:ea typeface="+mn-ea"/>
+                <a:cs typeface="+mn-cs"/>
+              </a:defRPr>
+            </a:lvl3pPr>
+            <a:lvl4pPr marL="1600200" indent="-228600" algn="l" defTabSz="914400" rtl="0" eaLnBrk="1" latinLnBrk="0" hangingPunct="1">
+              <a:lnSpc>
+                <a:spcPct val="90000"/>
+              </a:lnSpc>
+              <a:spcBef>
+                <a:spcPts val="500"/>
+              </a:spcBef>
+              <a:buFont typeface="Arial" panose="020B0604020202020204" pitchFamily="34" charset="0"/>
+              <a:buChar char="•"/>
+              <a:defRPr sz="1800" kern="1200">
+                <a:solidFill>
+                  <a:schemeClr val="tx1"/>
+                </a:solidFill>
+                <a:latin typeface="+mn-lt"/>
+                <a:ea typeface="+mn-ea"/>
+                <a:cs typeface="+mn-cs"/>
+              </a:defRPr>
+            </a:lvl4pPr>
+            <a:lvl5pPr marL="2057400" indent="-228600" algn="l" defTabSz="914400" rtl="0" eaLnBrk="1" latinLnBrk="0" hangingPunct="1">
+              <a:lnSpc>
+                <a:spcPct val="90000"/>
+              </a:lnSpc>
+              <a:spcBef>
+                <a:spcPts val="500"/>
+              </a:spcBef>
+              <a:buFont typeface="Arial" panose="020B0604020202020204" pitchFamily="34" charset="0"/>
+              <a:buChar char="•"/>
+              <a:defRPr sz="1800" kern="1200">
+                <a:solidFill>
+                  <a:schemeClr val="tx1"/>
+                </a:solidFill>
+                <a:latin typeface="+mn-lt"/>
+                <a:ea typeface="+mn-ea"/>
+                <a:cs typeface="+mn-cs"/>
+              </a:defRPr>
+            </a:lvl5pPr>
+            <a:lvl6pPr marL="2514600" indent="-228600" algn="l" defTabSz="914400" rtl="0" eaLnBrk="1" latinLnBrk="0" hangingPunct="1">
+              <a:lnSpc>
+                <a:spcPct val="90000"/>
+              </a:lnSpc>
+              <a:spcBef>
+                <a:spcPts val="500"/>
+              </a:spcBef>
+              <a:buFont typeface="Arial" panose="020B0604020202020204" pitchFamily="34" charset="0"/>
+              <a:buChar char="•"/>
+              <a:defRPr sz="1800" kern="1200">
+                <a:solidFill>
+                  <a:schemeClr val="tx1"/>
+                </a:solidFill>
+                <a:latin typeface="+mn-lt"/>
+                <a:ea typeface="+mn-ea"/>
+                <a:cs typeface="+mn-cs"/>
+              </a:defRPr>
+            </a:lvl6pPr>
+            <a:lvl7pPr marL="2971800" indent="-228600" algn="l" defTabSz="914400" rtl="0" eaLnBrk="1" latinLnBrk="0" hangingPunct="1">
+              <a:lnSpc>
+                <a:spcPct val="90000"/>
+              </a:lnSpc>
+              <a:spcBef>
+                <a:spcPts val="500"/>
+              </a:spcBef>
+              <a:buFont typeface="Arial" panose="020B0604020202020204" pitchFamily="34" charset="0"/>
+              <a:buChar char="•"/>
+              <a:defRPr sz="1800" kern="1200">
+                <a:solidFill>
+                  <a:schemeClr val="tx1"/>
+                </a:solidFill>
+                <a:latin typeface="+mn-lt"/>
+                <a:ea typeface="+mn-ea"/>
+                <a:cs typeface="+mn-cs"/>
+              </a:defRPr>
+            </a:lvl7pPr>
+            <a:lvl8pPr marL="3429000" indent="-228600" algn="l" defTabSz="914400" rtl="0" eaLnBrk="1" latinLnBrk="0" hangingPunct="1">
+              <a:lnSpc>
+                <a:spcPct val="90000"/>
+              </a:lnSpc>
+              <a:spcBef>
+                <a:spcPts val="500"/>
+              </a:spcBef>
+              <a:buFont typeface="Arial" panose="020B0604020202020204" pitchFamily="34" charset="0"/>
+              <a:buChar char="•"/>
+              <a:defRPr sz="1800" kern="1200">
+                <a:solidFill>
+                  <a:schemeClr val="tx1"/>
+                </a:solidFill>
+                <a:latin typeface="+mn-lt"/>
+                <a:ea typeface="+mn-ea"/>
+                <a:cs typeface="+mn-cs"/>
+              </a:defRPr>
+            </a:lvl8pPr>
+            <a:lvl9pPr marL="3886200" indent="-228600" algn="l" defTabSz="914400" rtl="0" eaLnBrk="1" latinLnBrk="0" hangingPunct="1">
+              <a:lnSpc>
+                <a:spcPct val="90000"/>
+              </a:lnSpc>
+              <a:spcBef>
+                <a:spcPts val="500"/>
+              </a:spcBef>
+              <a:buFont typeface="Arial" panose="020B0604020202020204" pitchFamily="34" charset="0"/>
+              <a:buChar char="•"/>
+              <a:defRPr sz="1800" kern="1200">
+                <a:solidFill>
+                  <a:schemeClr val="tx1"/>
+                </a:solidFill>
+                <a:latin typeface="+mn-lt"/>
+                <a:ea typeface="+mn-ea"/>
+                <a:cs typeface="+mn-cs"/>
+              </a:defRPr>
+            </a:lvl9pPr>
+          </a:lstStyle>
+          <a:p>
+            <a:pPr marL="0" indent="0">
+              <a:buFont typeface="Arial" panose="020B0604020202020204" pitchFamily="34" charset="0"/>
+              <a:buNone/>
+            </a:pPr>
+            <a:r>
+              <a:rPr lang="ru-RU" dirty="0" smtClean="0"/>
+              <a:t>Порт – виртуальный номер (16 бит) по которому узел определяет какой именно программе или службе предназначены данные. </a:t>
+            </a:r>
+            <a:endParaRPr lang="ru-RU" dirty="0"/>
           </a:p>
         </p:txBody>
       </p:sp>
@@ -3671,6 +6527,3185 @@
     <p:extLst>
       <p:ext uri="{BB962C8B-B14F-4D97-AF65-F5344CB8AC3E}">
         <p14:creationId xmlns:p14="http://schemas.microsoft.com/office/powerpoint/2010/main" val="410657160"/>
+      </p:ext>
+    </p:extLst>
+  </p:cSld>
+  <p:clrMapOvr>
+    <a:masterClrMapping/>
+  </p:clrMapOvr>
+</p:sld>
+</file>
+
+<file path=ppt/slides/slide7.xml><?xml version="1.0" encoding="utf-8"?>
+<p:sld xmlns:a="http://schemas.openxmlformats.org/drawingml/2006/main" xmlns:r="http://schemas.openxmlformats.org/officeDocument/2006/relationships" xmlns:p="http://schemas.openxmlformats.org/presentationml/2006/main">
+  <p:cSld>
+    <p:spTree>
+      <p:nvGrpSpPr>
+        <p:cNvPr id="1" name=""/>
+        <p:cNvGrpSpPr/>
+        <p:nvPr/>
+      </p:nvGrpSpPr>
+      <p:grpSpPr>
+        <a:xfrm>
+          <a:off x="0" y="0"/>
+          <a:ext cx="0" cy="0"/>
+          <a:chOff x="0" y="0"/>
+          <a:chExt cx="0" cy="0"/>
+        </a:xfrm>
+      </p:grpSpPr>
+      <p:sp>
+        <p:nvSpPr>
+          <p:cNvPr id="2" name="Заголовок 1"/>
+          <p:cNvSpPr>
+            <a:spLocks noGrp="1"/>
+          </p:cNvSpPr>
+          <p:nvPr>
+            <p:ph type="title"/>
+          </p:nvPr>
+        </p:nvSpPr>
+        <p:spPr>
+          <a:xfrm>
+            <a:off x="838200" y="180488"/>
+            <a:ext cx="10515600" cy="628406"/>
+          </a:xfrm>
+        </p:spPr>
+        <p:txBody>
+          <a:bodyPr>
+            <a:normAutofit fontScale="90000"/>
+          </a:bodyPr>
+          <a:lstStyle/>
+          <a:p>
+            <a:r>
+              <a:rPr lang="ru-RU" b="1" dirty="0" smtClean="0"/>
+              <a:t>Сокеты</a:t>
+            </a:r>
+            <a:endParaRPr lang="ru-RU" b="1" dirty="0"/>
+          </a:p>
+        </p:txBody>
+      </p:sp>
+      <p:pic>
+        <p:nvPicPr>
+          <p:cNvPr id="5" name="Объект 4"/>
+          <p:cNvPicPr>
+            <a:picLocks noGrp="1" noChangeAspect="1"/>
+          </p:cNvPicPr>
+          <p:nvPr>
+            <p:ph sz="half" idx="1"/>
+          </p:nvPr>
+        </p:nvPicPr>
+        <p:blipFill>
+          <a:blip r:embed="rId2"/>
+          <a:stretch>
+            <a:fillRect/>
+          </a:stretch>
+        </p:blipFill>
+        <p:spPr>
+          <a:xfrm>
+            <a:off x="2628900" y="2021840"/>
+            <a:ext cx="6934200" cy="4836160"/>
+          </a:xfrm>
+          <a:prstGeom prst="rect">
+            <a:avLst/>
+          </a:prstGeom>
+        </p:spPr>
+      </p:pic>
+      <p:sp>
+        <p:nvSpPr>
+          <p:cNvPr id="4" name="Объект 3"/>
+          <p:cNvSpPr>
+            <a:spLocks noGrp="1"/>
+          </p:cNvSpPr>
+          <p:nvPr>
+            <p:ph sz="half" idx="2"/>
+          </p:nvPr>
+        </p:nvSpPr>
+        <p:spPr>
+          <a:xfrm>
+            <a:off x="838200" y="717406"/>
+            <a:ext cx="10515600" cy="1418737"/>
+          </a:xfrm>
+        </p:spPr>
+        <p:txBody>
+          <a:bodyPr/>
+          <a:lstStyle/>
+          <a:p>
+            <a:pPr marL="0" indent="0">
+              <a:buNone/>
+            </a:pPr>
+            <a:r>
+              <a:rPr lang="ru-RU" dirty="0" smtClean="0"/>
+              <a:t>Сокет </a:t>
+            </a:r>
+            <a:r>
+              <a:rPr lang="en-US" dirty="0" smtClean="0"/>
+              <a:t>(IP</a:t>
+            </a:r>
+            <a:r>
+              <a:rPr lang="ru-RU" dirty="0" smtClean="0"/>
+              <a:t> + Порт</a:t>
+            </a:r>
+            <a:r>
+              <a:rPr lang="en-US" dirty="0" smtClean="0"/>
+              <a:t>) – </a:t>
+            </a:r>
+            <a:r>
+              <a:rPr lang="ru-RU" dirty="0" smtClean="0"/>
+              <a:t>идентифицирует приложение на узле.</a:t>
+            </a:r>
+          </a:p>
+          <a:p>
+            <a:pPr marL="0" indent="0">
+              <a:buNone/>
+            </a:pPr>
+            <a:r>
+              <a:rPr lang="ru-RU" dirty="0" err="1" smtClean="0"/>
+              <a:t>Сокетная</a:t>
+            </a:r>
+            <a:r>
+              <a:rPr lang="ru-RU" dirty="0" smtClean="0"/>
+              <a:t> пара </a:t>
+            </a:r>
+            <a:r>
+              <a:rPr lang="ru-RU" dirty="0"/>
+              <a:t>(</a:t>
+            </a:r>
+            <a:r>
+              <a:rPr lang="en-US" dirty="0" err="1" smtClean="0"/>
+              <a:t>Src</a:t>
+            </a:r>
+            <a:r>
+              <a:rPr lang="en-US" dirty="0" smtClean="0"/>
+              <a:t> IP, </a:t>
+            </a:r>
+            <a:r>
+              <a:rPr lang="en-US" dirty="0" err="1" smtClean="0"/>
+              <a:t>Src</a:t>
+            </a:r>
+            <a:r>
+              <a:rPr lang="en-US" dirty="0" smtClean="0"/>
+              <a:t> Port, </a:t>
+            </a:r>
+            <a:r>
+              <a:rPr lang="en-US" dirty="0" err="1" smtClean="0"/>
+              <a:t>Dst</a:t>
+            </a:r>
+            <a:r>
+              <a:rPr lang="en-US" dirty="0" smtClean="0"/>
+              <a:t> IP, </a:t>
+            </a:r>
+            <a:r>
+              <a:rPr lang="en-US" dirty="0" err="1" smtClean="0"/>
+              <a:t>Dst</a:t>
+            </a:r>
+            <a:r>
+              <a:rPr lang="en-US" dirty="0" smtClean="0"/>
+              <a:t> Port</a:t>
+            </a:r>
+            <a:r>
+              <a:rPr lang="ru-RU" dirty="0" smtClean="0"/>
+              <a:t>) - </a:t>
+            </a:r>
+            <a:r>
+              <a:rPr lang="ru-RU" dirty="0"/>
+              <a:t> идентифицирует конкретное соединение</a:t>
+            </a:r>
+            <a:endParaRPr lang="ru-RU" dirty="0"/>
+          </a:p>
+        </p:txBody>
+      </p:sp>
+    </p:spTree>
+    <p:extLst>
+      <p:ext uri="{BB962C8B-B14F-4D97-AF65-F5344CB8AC3E}">
+        <p14:creationId xmlns:p14="http://schemas.microsoft.com/office/powerpoint/2010/main" val="3820681318"/>
+      </p:ext>
+    </p:extLst>
+  </p:cSld>
+  <p:clrMapOvr>
+    <a:masterClrMapping/>
+  </p:clrMapOvr>
+</p:sld>
+</file>
+
+<file path=ppt/slides/slide8.xml><?xml version="1.0" encoding="utf-8"?>
+<p:sld xmlns:a="http://schemas.openxmlformats.org/drawingml/2006/main" xmlns:r="http://schemas.openxmlformats.org/officeDocument/2006/relationships" xmlns:p="http://schemas.openxmlformats.org/presentationml/2006/main">
+  <p:cSld>
+    <p:spTree>
+      <p:nvGrpSpPr>
+        <p:cNvPr id="1" name=""/>
+        <p:cNvGrpSpPr/>
+        <p:nvPr/>
+      </p:nvGrpSpPr>
+      <p:grpSpPr>
+        <a:xfrm>
+          <a:off x="0" y="0"/>
+          <a:ext cx="0" cy="0"/>
+          <a:chOff x="0" y="0"/>
+          <a:chExt cx="0" cy="0"/>
+        </a:xfrm>
+      </p:grpSpPr>
+      <p:sp>
+        <p:nvSpPr>
+          <p:cNvPr id="5" name="Заголовок 4"/>
+          <p:cNvSpPr>
+            <a:spLocks noGrp="1"/>
+          </p:cNvSpPr>
+          <p:nvPr>
+            <p:ph type="title"/>
+          </p:nvPr>
+        </p:nvSpPr>
+        <p:spPr/>
+        <p:txBody>
+          <a:bodyPr/>
+          <a:lstStyle/>
+          <a:p>
+            <a:r>
+              <a:rPr lang="ru-RU" b="1" dirty="0" smtClean="0"/>
+              <a:t>Известные порты</a:t>
+            </a:r>
+            <a:endParaRPr lang="ru-RU" b="1" dirty="0"/>
+          </a:p>
+        </p:txBody>
+      </p:sp>
+      <p:graphicFrame>
+        <p:nvGraphicFramePr>
+          <p:cNvPr id="7" name="Объект 6"/>
+          <p:cNvGraphicFramePr>
+            <a:graphicFrameLocks noGrp="1"/>
+          </p:cNvGraphicFramePr>
+          <p:nvPr>
+            <p:ph idx="1"/>
+            <p:extLst>
+              <p:ext uri="{D42A27DB-BD31-4B8C-83A1-F6EECF244321}">
+                <p14:modId xmlns:p14="http://schemas.microsoft.com/office/powerpoint/2010/main" val="1255693071"/>
+              </p:ext>
+            </p:extLst>
+          </p:nvPr>
+        </p:nvGraphicFramePr>
+        <p:xfrm>
+          <a:off x="2242038" y="1538652"/>
+          <a:ext cx="7543799" cy="5020409"/>
+        </p:xfrm>
+        <a:graphic>
+          <a:graphicData uri="http://schemas.openxmlformats.org/drawingml/2006/table">
+            <a:tbl>
+              <a:tblPr/>
+              <a:tblGrid>
+                <a:gridCol w="1388068">
+                  <a:extLst>
+                    <a:ext uri="{9D8B030D-6E8A-4147-A177-3AD203B41FA5}">
+                      <a16:colId xmlns:a16="http://schemas.microsoft.com/office/drawing/2014/main" val="1943333483"/>
+                    </a:ext>
+                  </a:extLst>
+                </a:gridCol>
+                <a:gridCol w="1384858">
+                  <a:extLst>
+                    <a:ext uri="{9D8B030D-6E8A-4147-A177-3AD203B41FA5}">
+                      <a16:colId xmlns:a16="http://schemas.microsoft.com/office/drawing/2014/main" val="3623994693"/>
+                    </a:ext>
+                  </a:extLst>
+                </a:gridCol>
+                <a:gridCol w="4770873">
+                  <a:extLst>
+                    <a:ext uri="{9D8B030D-6E8A-4147-A177-3AD203B41FA5}">
+                      <a16:colId xmlns:a16="http://schemas.microsoft.com/office/drawing/2014/main" val="1973449759"/>
+                    </a:ext>
+                  </a:extLst>
+                </a:gridCol>
+              </a:tblGrid>
+              <a:tr h="248586">
+                <a:tc>
+                  <a:txBody>
+                    <a:bodyPr/>
+                    <a:lstStyle/>
+                    <a:p>
+                      <a:pPr algn="ctr"/>
+                      <a:r>
+                        <a:rPr lang="ru-RU" sz="1000" b="1" dirty="0">
+                          <a:effectLst/>
+                        </a:rPr>
+                        <a:t>Номер порта</a:t>
+                      </a:r>
+                    </a:p>
+                  </a:txBody>
+                  <a:tcPr marL="55530" marR="55530" marT="27765" marB="27765" anchor="ctr">
+                    <a:lnL w="12700" cap="flat" cmpd="sng" algn="ctr">
+                      <a:solidFill>
+                        <a:schemeClr val="tx1"/>
+                      </a:solidFill>
+                      <a:prstDash val="solid"/>
+                      <a:round/>
+                      <a:headEnd type="none" w="med" len="med"/>
+                      <a:tailEnd type="none" w="med" len="med"/>
+                    </a:lnL>
+                    <a:lnR w="12700" cap="flat" cmpd="sng" algn="ctr">
+                      <a:solidFill>
+                        <a:schemeClr val="tx1"/>
+                      </a:solidFill>
+                      <a:prstDash val="solid"/>
+                      <a:round/>
+                      <a:headEnd type="none" w="med" len="med"/>
+                      <a:tailEnd type="none" w="med" len="med"/>
+                    </a:lnR>
+                    <a:lnT w="12700" cap="flat" cmpd="sng" algn="ctr">
+                      <a:solidFill>
+                        <a:schemeClr val="tx1"/>
+                      </a:solidFill>
+                      <a:prstDash val="solid"/>
+                      <a:round/>
+                      <a:headEnd type="none" w="med" len="med"/>
+                      <a:tailEnd type="none" w="med" len="med"/>
+                    </a:lnT>
+                    <a:lnB w="12700" cap="flat" cmpd="sng" algn="ctr">
+                      <a:solidFill>
+                        <a:schemeClr val="tx1"/>
+                      </a:solidFill>
+                      <a:prstDash val="solid"/>
+                      <a:round/>
+                      <a:headEnd type="none" w="med" len="med"/>
+                      <a:tailEnd type="none" w="med" len="med"/>
+                    </a:lnB>
+                  </a:tcPr>
+                </a:tc>
+                <a:tc>
+                  <a:txBody>
+                    <a:bodyPr/>
+                    <a:lstStyle/>
+                    <a:p>
+                      <a:pPr algn="ctr"/>
+                      <a:r>
+                        <a:rPr lang="ru-RU" sz="1000" b="1" dirty="0">
+                          <a:effectLst/>
+                        </a:rPr>
+                        <a:t>Протокол</a:t>
+                      </a:r>
+                    </a:p>
+                  </a:txBody>
+                  <a:tcPr marL="55530" marR="55530" marT="27765" marB="27765" anchor="ctr">
+                    <a:lnL w="12700" cap="flat" cmpd="sng" algn="ctr">
+                      <a:solidFill>
+                        <a:schemeClr val="tx1"/>
+                      </a:solidFill>
+                      <a:prstDash val="solid"/>
+                      <a:round/>
+                      <a:headEnd type="none" w="med" len="med"/>
+                      <a:tailEnd type="none" w="med" len="med"/>
+                    </a:lnL>
+                    <a:lnR w="12700" cap="flat" cmpd="sng" algn="ctr">
+                      <a:solidFill>
+                        <a:schemeClr val="tx1"/>
+                      </a:solidFill>
+                      <a:prstDash val="solid"/>
+                      <a:round/>
+                      <a:headEnd type="none" w="med" len="med"/>
+                      <a:tailEnd type="none" w="med" len="med"/>
+                    </a:lnR>
+                    <a:lnT w="12700" cap="flat" cmpd="sng" algn="ctr">
+                      <a:solidFill>
+                        <a:schemeClr val="tx1"/>
+                      </a:solidFill>
+                      <a:prstDash val="solid"/>
+                      <a:round/>
+                      <a:headEnd type="none" w="med" len="med"/>
+                      <a:tailEnd type="none" w="med" len="med"/>
+                    </a:lnT>
+                    <a:lnB w="12700" cap="flat" cmpd="sng" algn="ctr">
+                      <a:solidFill>
+                        <a:schemeClr val="tx1"/>
+                      </a:solidFill>
+                      <a:prstDash val="solid"/>
+                      <a:round/>
+                      <a:headEnd type="none" w="med" len="med"/>
+                      <a:tailEnd type="none" w="med" len="med"/>
+                    </a:lnB>
+                  </a:tcPr>
+                </a:tc>
+                <a:tc>
+                  <a:txBody>
+                    <a:bodyPr/>
+                    <a:lstStyle/>
+                    <a:p>
+                      <a:pPr algn="l"/>
+                      <a:r>
+                        <a:rPr lang="ru-RU" sz="1000" b="1" dirty="0">
+                          <a:effectLst/>
+                        </a:rPr>
+                        <a:t>Уровень приложений</a:t>
+                      </a:r>
+                    </a:p>
+                  </a:txBody>
+                  <a:tcPr marL="55530" marR="55530" marT="27765" marB="27765" anchor="ctr">
+                    <a:lnL w="12700" cap="flat" cmpd="sng" algn="ctr">
+                      <a:solidFill>
+                        <a:schemeClr val="tx1"/>
+                      </a:solidFill>
+                      <a:prstDash val="solid"/>
+                      <a:round/>
+                      <a:headEnd type="none" w="med" len="med"/>
+                      <a:tailEnd type="none" w="med" len="med"/>
+                    </a:lnL>
+                    <a:lnR w="12700" cap="flat" cmpd="sng" algn="ctr">
+                      <a:solidFill>
+                        <a:schemeClr val="tx1"/>
+                      </a:solidFill>
+                      <a:prstDash val="solid"/>
+                      <a:round/>
+                      <a:headEnd type="none" w="med" len="med"/>
+                      <a:tailEnd type="none" w="med" len="med"/>
+                    </a:lnR>
+                    <a:lnT w="12700" cap="flat" cmpd="sng" algn="ctr">
+                      <a:solidFill>
+                        <a:schemeClr val="tx1"/>
+                      </a:solidFill>
+                      <a:prstDash val="solid"/>
+                      <a:round/>
+                      <a:headEnd type="none" w="med" len="med"/>
+                      <a:tailEnd type="none" w="med" len="med"/>
+                    </a:lnT>
+                    <a:lnB w="12700" cap="flat" cmpd="sng" algn="ctr">
+                      <a:solidFill>
+                        <a:schemeClr val="tx1"/>
+                      </a:solidFill>
+                      <a:prstDash val="solid"/>
+                      <a:round/>
+                      <a:headEnd type="none" w="med" len="med"/>
+                      <a:tailEnd type="none" w="med" len="med"/>
+                    </a:lnB>
+                  </a:tcPr>
+                </a:tc>
+                <a:extLst>
+                  <a:ext uri="{0D108BD9-81ED-4DB2-BD59-A6C34878D82A}">
+                    <a16:rowId xmlns:a16="http://schemas.microsoft.com/office/drawing/2014/main" val="2272544870"/>
+                  </a:ext>
+                </a:extLst>
+              </a:tr>
+              <a:tr h="433103">
+                <a:tc>
+                  <a:txBody>
+                    <a:bodyPr/>
+                    <a:lstStyle/>
+                    <a:p>
+                      <a:pPr algn="ctr"/>
+                      <a:r>
+                        <a:rPr lang="ru-RU" sz="1000" dirty="0">
+                          <a:effectLst/>
+                        </a:rPr>
+                        <a:t>20</a:t>
+                      </a:r>
+                    </a:p>
+                  </a:txBody>
+                  <a:tcPr marL="55530" marR="55530" marT="27765" marB="27765" anchor="ctr">
+                    <a:lnL w="12700" cap="flat" cmpd="sng" algn="ctr">
+                      <a:solidFill>
+                        <a:schemeClr val="tx1"/>
+                      </a:solidFill>
+                      <a:prstDash val="solid"/>
+                      <a:round/>
+                      <a:headEnd type="none" w="med" len="med"/>
+                      <a:tailEnd type="none" w="med" len="med"/>
+                    </a:lnL>
+                    <a:lnR w="12700" cap="flat" cmpd="sng" algn="ctr">
+                      <a:solidFill>
+                        <a:schemeClr val="tx1"/>
+                      </a:solidFill>
+                      <a:prstDash val="solid"/>
+                      <a:round/>
+                      <a:headEnd type="none" w="med" len="med"/>
+                      <a:tailEnd type="none" w="med" len="med"/>
+                    </a:lnR>
+                    <a:lnT w="12700" cap="flat" cmpd="sng" algn="ctr">
+                      <a:solidFill>
+                        <a:schemeClr val="tx1"/>
+                      </a:solidFill>
+                      <a:prstDash val="solid"/>
+                      <a:round/>
+                      <a:headEnd type="none" w="med" len="med"/>
+                      <a:tailEnd type="none" w="med" len="med"/>
+                    </a:lnT>
+                    <a:lnB w="12700" cap="flat" cmpd="sng" algn="ctr">
+                      <a:solidFill>
+                        <a:schemeClr val="tx1"/>
+                      </a:solidFill>
+                      <a:prstDash val="solid"/>
+                      <a:round/>
+                      <a:headEnd type="none" w="med" len="med"/>
+                      <a:tailEnd type="none" w="med" len="med"/>
+                    </a:lnB>
+                  </a:tcPr>
+                </a:tc>
+                <a:tc>
+                  <a:txBody>
+                    <a:bodyPr/>
+                    <a:lstStyle/>
+                    <a:p>
+                      <a:pPr algn="ctr"/>
+                      <a:r>
+                        <a:rPr lang="af-ZA" sz="1000">
+                          <a:effectLst/>
+                        </a:rPr>
+                        <a:t>TCP</a:t>
+                      </a:r>
+                    </a:p>
+                  </a:txBody>
+                  <a:tcPr marL="55530" marR="55530" marT="27765" marB="27765" anchor="ctr">
+                    <a:lnL w="12700" cap="flat" cmpd="sng" algn="ctr">
+                      <a:solidFill>
+                        <a:schemeClr val="tx1"/>
+                      </a:solidFill>
+                      <a:prstDash val="solid"/>
+                      <a:round/>
+                      <a:headEnd type="none" w="med" len="med"/>
+                      <a:tailEnd type="none" w="med" len="med"/>
+                    </a:lnL>
+                    <a:lnR w="12700" cap="flat" cmpd="sng" algn="ctr">
+                      <a:solidFill>
+                        <a:schemeClr val="tx1"/>
+                      </a:solidFill>
+                      <a:prstDash val="solid"/>
+                      <a:round/>
+                      <a:headEnd type="none" w="med" len="med"/>
+                      <a:tailEnd type="none" w="med" len="med"/>
+                    </a:lnR>
+                    <a:lnT w="12700" cap="flat" cmpd="sng" algn="ctr">
+                      <a:solidFill>
+                        <a:schemeClr val="tx1"/>
+                      </a:solidFill>
+                      <a:prstDash val="solid"/>
+                      <a:round/>
+                      <a:headEnd type="none" w="med" len="med"/>
+                      <a:tailEnd type="none" w="med" len="med"/>
+                    </a:lnT>
+                    <a:lnB w="12700" cap="flat" cmpd="sng" algn="ctr">
+                      <a:solidFill>
+                        <a:schemeClr val="tx1"/>
+                      </a:solidFill>
+                      <a:prstDash val="solid"/>
+                      <a:round/>
+                      <a:headEnd type="none" w="med" len="med"/>
+                      <a:tailEnd type="none" w="med" len="med"/>
+                    </a:lnB>
+                  </a:tcPr>
+                </a:tc>
+                <a:tc>
+                  <a:txBody>
+                    <a:bodyPr/>
+                    <a:lstStyle/>
+                    <a:p>
+                      <a:pPr algn="l"/>
+                      <a:r>
+                        <a:rPr lang="af-ZA" sz="1000">
+                          <a:effectLst/>
+                        </a:rPr>
+                        <a:t>File Transfer Protocol (FTP) — </a:t>
+                      </a:r>
+                      <a:r>
+                        <a:rPr lang="ru-RU" sz="1000">
+                          <a:effectLst/>
+                        </a:rPr>
+                        <a:t>Передача данных</a:t>
+                      </a:r>
+                    </a:p>
+                  </a:txBody>
+                  <a:tcPr marL="55530" marR="55530" marT="27765" marB="27765" anchor="ctr">
+                    <a:lnL w="12700" cap="flat" cmpd="sng" algn="ctr">
+                      <a:solidFill>
+                        <a:schemeClr val="tx1"/>
+                      </a:solidFill>
+                      <a:prstDash val="solid"/>
+                      <a:round/>
+                      <a:headEnd type="none" w="med" len="med"/>
+                      <a:tailEnd type="none" w="med" len="med"/>
+                    </a:lnL>
+                    <a:lnR w="12700" cap="flat" cmpd="sng" algn="ctr">
+                      <a:solidFill>
+                        <a:schemeClr val="tx1"/>
+                      </a:solidFill>
+                      <a:prstDash val="solid"/>
+                      <a:round/>
+                      <a:headEnd type="none" w="med" len="med"/>
+                      <a:tailEnd type="none" w="med" len="med"/>
+                    </a:lnR>
+                    <a:lnT w="12700" cap="flat" cmpd="sng" algn="ctr">
+                      <a:solidFill>
+                        <a:schemeClr val="tx1"/>
+                      </a:solidFill>
+                      <a:prstDash val="solid"/>
+                      <a:round/>
+                      <a:headEnd type="none" w="med" len="med"/>
+                      <a:tailEnd type="none" w="med" len="med"/>
+                    </a:lnT>
+                    <a:lnB w="12700" cap="flat" cmpd="sng" algn="ctr">
+                      <a:solidFill>
+                        <a:schemeClr val="tx1"/>
+                      </a:solidFill>
+                      <a:prstDash val="solid"/>
+                      <a:round/>
+                      <a:headEnd type="none" w="med" len="med"/>
+                      <a:tailEnd type="none" w="med" len="med"/>
+                    </a:lnB>
+                  </a:tcPr>
+                </a:tc>
+                <a:extLst>
+                  <a:ext uri="{0D108BD9-81ED-4DB2-BD59-A6C34878D82A}">
+                    <a16:rowId xmlns:a16="http://schemas.microsoft.com/office/drawing/2014/main" val="2558400650"/>
+                  </a:ext>
+                </a:extLst>
+              </a:tr>
+              <a:tr h="433103">
+                <a:tc>
+                  <a:txBody>
+                    <a:bodyPr/>
+                    <a:lstStyle/>
+                    <a:p>
+                      <a:pPr algn="ctr"/>
+                      <a:r>
+                        <a:rPr lang="ru-RU" sz="1000" dirty="0">
+                          <a:effectLst/>
+                        </a:rPr>
+                        <a:t>21</a:t>
+                      </a:r>
+                    </a:p>
+                  </a:txBody>
+                  <a:tcPr marL="55530" marR="55530" marT="27765" marB="27765" anchor="ctr">
+                    <a:lnL w="12700" cap="flat" cmpd="sng" algn="ctr">
+                      <a:solidFill>
+                        <a:schemeClr val="tx1"/>
+                      </a:solidFill>
+                      <a:prstDash val="solid"/>
+                      <a:round/>
+                      <a:headEnd type="none" w="med" len="med"/>
+                      <a:tailEnd type="none" w="med" len="med"/>
+                    </a:lnL>
+                    <a:lnR w="12700" cap="flat" cmpd="sng" algn="ctr">
+                      <a:solidFill>
+                        <a:schemeClr val="tx1"/>
+                      </a:solidFill>
+                      <a:prstDash val="solid"/>
+                      <a:round/>
+                      <a:headEnd type="none" w="med" len="med"/>
+                      <a:tailEnd type="none" w="med" len="med"/>
+                    </a:lnR>
+                    <a:lnT w="12700" cap="flat" cmpd="sng" algn="ctr">
+                      <a:solidFill>
+                        <a:schemeClr val="tx1"/>
+                      </a:solidFill>
+                      <a:prstDash val="solid"/>
+                      <a:round/>
+                      <a:headEnd type="none" w="med" len="med"/>
+                      <a:tailEnd type="none" w="med" len="med"/>
+                    </a:lnT>
+                    <a:lnB w="12700" cap="flat" cmpd="sng" algn="ctr">
+                      <a:solidFill>
+                        <a:schemeClr val="tx1"/>
+                      </a:solidFill>
+                      <a:prstDash val="solid"/>
+                      <a:round/>
+                      <a:headEnd type="none" w="med" len="med"/>
+                      <a:tailEnd type="none" w="med" len="med"/>
+                    </a:lnB>
+                  </a:tcPr>
+                </a:tc>
+                <a:tc>
+                  <a:txBody>
+                    <a:bodyPr/>
+                    <a:lstStyle/>
+                    <a:p>
+                      <a:pPr algn="ctr"/>
+                      <a:r>
+                        <a:rPr lang="af-ZA" sz="1000">
+                          <a:effectLst/>
+                        </a:rPr>
+                        <a:t>TCP</a:t>
+                      </a:r>
+                    </a:p>
+                  </a:txBody>
+                  <a:tcPr marL="55530" marR="55530" marT="27765" marB="27765" anchor="ctr">
+                    <a:lnL w="12700" cap="flat" cmpd="sng" algn="ctr">
+                      <a:solidFill>
+                        <a:schemeClr val="tx1"/>
+                      </a:solidFill>
+                      <a:prstDash val="solid"/>
+                      <a:round/>
+                      <a:headEnd type="none" w="med" len="med"/>
+                      <a:tailEnd type="none" w="med" len="med"/>
+                    </a:lnL>
+                    <a:lnR w="12700" cap="flat" cmpd="sng" algn="ctr">
+                      <a:solidFill>
+                        <a:schemeClr val="tx1"/>
+                      </a:solidFill>
+                      <a:prstDash val="solid"/>
+                      <a:round/>
+                      <a:headEnd type="none" w="med" len="med"/>
+                      <a:tailEnd type="none" w="med" len="med"/>
+                    </a:lnR>
+                    <a:lnT w="12700" cap="flat" cmpd="sng" algn="ctr">
+                      <a:solidFill>
+                        <a:schemeClr val="tx1"/>
+                      </a:solidFill>
+                      <a:prstDash val="solid"/>
+                      <a:round/>
+                      <a:headEnd type="none" w="med" len="med"/>
+                      <a:tailEnd type="none" w="med" len="med"/>
+                    </a:lnT>
+                    <a:lnB w="12700" cap="flat" cmpd="sng" algn="ctr">
+                      <a:solidFill>
+                        <a:schemeClr val="tx1"/>
+                      </a:solidFill>
+                      <a:prstDash val="solid"/>
+                      <a:round/>
+                      <a:headEnd type="none" w="med" len="med"/>
+                      <a:tailEnd type="none" w="med" len="med"/>
+                    </a:lnB>
+                  </a:tcPr>
+                </a:tc>
+                <a:tc>
+                  <a:txBody>
+                    <a:bodyPr/>
+                    <a:lstStyle/>
+                    <a:p>
+                      <a:pPr algn="l"/>
+                      <a:r>
+                        <a:rPr lang="af-ZA" sz="1000">
+                          <a:effectLst/>
+                        </a:rPr>
+                        <a:t>File Transfer Protocol (FTP) — </a:t>
+                      </a:r>
+                      <a:r>
+                        <a:rPr lang="ru-RU" sz="1000">
+                          <a:effectLst/>
+                        </a:rPr>
+                        <a:t>Управление передачей</a:t>
+                      </a:r>
+                    </a:p>
+                  </a:txBody>
+                  <a:tcPr marL="55530" marR="55530" marT="27765" marB="27765" anchor="ctr">
+                    <a:lnL w="12700" cap="flat" cmpd="sng" algn="ctr">
+                      <a:solidFill>
+                        <a:schemeClr val="tx1"/>
+                      </a:solidFill>
+                      <a:prstDash val="solid"/>
+                      <a:round/>
+                      <a:headEnd type="none" w="med" len="med"/>
+                      <a:tailEnd type="none" w="med" len="med"/>
+                    </a:lnL>
+                    <a:lnR w="12700" cap="flat" cmpd="sng" algn="ctr">
+                      <a:solidFill>
+                        <a:schemeClr val="tx1"/>
+                      </a:solidFill>
+                      <a:prstDash val="solid"/>
+                      <a:round/>
+                      <a:headEnd type="none" w="med" len="med"/>
+                      <a:tailEnd type="none" w="med" len="med"/>
+                    </a:lnR>
+                    <a:lnT w="12700" cap="flat" cmpd="sng" algn="ctr">
+                      <a:solidFill>
+                        <a:schemeClr val="tx1"/>
+                      </a:solidFill>
+                      <a:prstDash val="solid"/>
+                      <a:round/>
+                      <a:headEnd type="none" w="med" len="med"/>
+                      <a:tailEnd type="none" w="med" len="med"/>
+                    </a:lnT>
+                    <a:lnB w="12700" cap="flat" cmpd="sng" algn="ctr">
+                      <a:solidFill>
+                        <a:schemeClr val="tx1"/>
+                      </a:solidFill>
+                      <a:prstDash val="solid"/>
+                      <a:round/>
+                      <a:headEnd type="none" w="med" len="med"/>
+                      <a:tailEnd type="none" w="med" len="med"/>
+                    </a:lnB>
+                  </a:tcPr>
+                </a:tc>
+                <a:extLst>
+                  <a:ext uri="{0D108BD9-81ED-4DB2-BD59-A6C34878D82A}">
+                    <a16:rowId xmlns:a16="http://schemas.microsoft.com/office/drawing/2014/main" val="1628936600"/>
+                  </a:ext>
+                </a:extLst>
+              </a:tr>
+              <a:tr h="248586">
+                <a:tc>
+                  <a:txBody>
+                    <a:bodyPr/>
+                    <a:lstStyle/>
+                    <a:p>
+                      <a:pPr algn="ctr"/>
+                      <a:r>
+                        <a:rPr lang="ru-RU" sz="1000" dirty="0">
+                          <a:effectLst/>
+                        </a:rPr>
+                        <a:t>22</a:t>
+                      </a:r>
+                    </a:p>
+                  </a:txBody>
+                  <a:tcPr marL="55530" marR="55530" marT="27765" marB="27765" anchor="ctr">
+                    <a:lnL w="12700" cap="flat" cmpd="sng" algn="ctr">
+                      <a:solidFill>
+                        <a:schemeClr val="tx1"/>
+                      </a:solidFill>
+                      <a:prstDash val="solid"/>
+                      <a:round/>
+                      <a:headEnd type="none" w="med" len="med"/>
+                      <a:tailEnd type="none" w="med" len="med"/>
+                    </a:lnL>
+                    <a:lnR w="12700" cap="flat" cmpd="sng" algn="ctr">
+                      <a:solidFill>
+                        <a:schemeClr val="tx1"/>
+                      </a:solidFill>
+                      <a:prstDash val="solid"/>
+                      <a:round/>
+                      <a:headEnd type="none" w="med" len="med"/>
+                      <a:tailEnd type="none" w="med" len="med"/>
+                    </a:lnR>
+                    <a:lnT w="12700" cap="flat" cmpd="sng" algn="ctr">
+                      <a:solidFill>
+                        <a:schemeClr val="tx1"/>
+                      </a:solidFill>
+                      <a:prstDash val="solid"/>
+                      <a:round/>
+                      <a:headEnd type="none" w="med" len="med"/>
+                      <a:tailEnd type="none" w="med" len="med"/>
+                    </a:lnT>
+                    <a:lnB w="12700" cap="flat" cmpd="sng" algn="ctr">
+                      <a:solidFill>
+                        <a:schemeClr val="tx1"/>
+                      </a:solidFill>
+                      <a:prstDash val="solid"/>
+                      <a:round/>
+                      <a:headEnd type="none" w="med" len="med"/>
+                      <a:tailEnd type="none" w="med" len="med"/>
+                    </a:lnB>
+                  </a:tcPr>
+                </a:tc>
+                <a:tc>
+                  <a:txBody>
+                    <a:bodyPr/>
+                    <a:lstStyle/>
+                    <a:p>
+                      <a:pPr algn="ctr"/>
+                      <a:r>
+                        <a:rPr lang="af-ZA" sz="1000">
+                          <a:effectLst/>
+                        </a:rPr>
+                        <a:t>TCP</a:t>
+                      </a:r>
+                    </a:p>
+                  </a:txBody>
+                  <a:tcPr marL="55530" marR="55530" marT="27765" marB="27765" anchor="ctr">
+                    <a:lnL w="12700" cap="flat" cmpd="sng" algn="ctr">
+                      <a:solidFill>
+                        <a:schemeClr val="tx1"/>
+                      </a:solidFill>
+                      <a:prstDash val="solid"/>
+                      <a:round/>
+                      <a:headEnd type="none" w="med" len="med"/>
+                      <a:tailEnd type="none" w="med" len="med"/>
+                    </a:lnL>
+                    <a:lnR w="12700" cap="flat" cmpd="sng" algn="ctr">
+                      <a:solidFill>
+                        <a:schemeClr val="tx1"/>
+                      </a:solidFill>
+                      <a:prstDash val="solid"/>
+                      <a:round/>
+                      <a:headEnd type="none" w="med" len="med"/>
+                      <a:tailEnd type="none" w="med" len="med"/>
+                    </a:lnR>
+                    <a:lnT w="12700" cap="flat" cmpd="sng" algn="ctr">
+                      <a:solidFill>
+                        <a:schemeClr val="tx1"/>
+                      </a:solidFill>
+                      <a:prstDash val="solid"/>
+                      <a:round/>
+                      <a:headEnd type="none" w="med" len="med"/>
+                      <a:tailEnd type="none" w="med" len="med"/>
+                    </a:lnT>
+                    <a:lnB w="12700" cap="flat" cmpd="sng" algn="ctr">
+                      <a:solidFill>
+                        <a:schemeClr val="tx1"/>
+                      </a:solidFill>
+                      <a:prstDash val="solid"/>
+                      <a:round/>
+                      <a:headEnd type="none" w="med" len="med"/>
+                      <a:tailEnd type="none" w="med" len="med"/>
+                    </a:lnB>
+                  </a:tcPr>
+                </a:tc>
+                <a:tc>
+                  <a:txBody>
+                    <a:bodyPr/>
+                    <a:lstStyle/>
+                    <a:p>
+                      <a:pPr algn="l"/>
+                      <a:r>
+                        <a:rPr lang="ru-RU" sz="1000">
+                          <a:effectLst/>
+                        </a:rPr>
+                        <a:t>Протокол </a:t>
+                      </a:r>
+                      <a:r>
+                        <a:rPr lang="af-ZA" sz="1000">
+                          <a:effectLst/>
+                        </a:rPr>
+                        <a:t>Secure Shell (SSH)</a:t>
+                      </a:r>
+                    </a:p>
+                  </a:txBody>
+                  <a:tcPr marL="55530" marR="55530" marT="27765" marB="27765" anchor="ctr">
+                    <a:lnL w="12700" cap="flat" cmpd="sng" algn="ctr">
+                      <a:solidFill>
+                        <a:schemeClr val="tx1"/>
+                      </a:solidFill>
+                      <a:prstDash val="solid"/>
+                      <a:round/>
+                      <a:headEnd type="none" w="med" len="med"/>
+                      <a:tailEnd type="none" w="med" len="med"/>
+                    </a:lnL>
+                    <a:lnR w="12700" cap="flat" cmpd="sng" algn="ctr">
+                      <a:solidFill>
+                        <a:schemeClr val="tx1"/>
+                      </a:solidFill>
+                      <a:prstDash val="solid"/>
+                      <a:round/>
+                      <a:headEnd type="none" w="med" len="med"/>
+                      <a:tailEnd type="none" w="med" len="med"/>
+                    </a:lnR>
+                    <a:lnT w="12700" cap="flat" cmpd="sng" algn="ctr">
+                      <a:solidFill>
+                        <a:schemeClr val="tx1"/>
+                      </a:solidFill>
+                      <a:prstDash val="solid"/>
+                      <a:round/>
+                      <a:headEnd type="none" w="med" len="med"/>
+                      <a:tailEnd type="none" w="med" len="med"/>
+                    </a:lnT>
+                    <a:lnB w="12700" cap="flat" cmpd="sng" algn="ctr">
+                      <a:solidFill>
+                        <a:schemeClr val="tx1"/>
+                      </a:solidFill>
+                      <a:prstDash val="solid"/>
+                      <a:round/>
+                      <a:headEnd type="none" w="med" len="med"/>
+                      <a:tailEnd type="none" w="med" len="med"/>
+                    </a:lnB>
+                  </a:tcPr>
+                </a:tc>
+                <a:extLst>
+                  <a:ext uri="{0D108BD9-81ED-4DB2-BD59-A6C34878D82A}">
+                    <a16:rowId xmlns:a16="http://schemas.microsoft.com/office/drawing/2014/main" val="1331712316"/>
+                  </a:ext>
+                </a:extLst>
+              </a:tr>
+              <a:tr h="248586">
+                <a:tc>
+                  <a:txBody>
+                    <a:bodyPr/>
+                    <a:lstStyle/>
+                    <a:p>
+                      <a:pPr algn="ctr"/>
+                      <a:r>
+                        <a:rPr lang="ru-RU" sz="1000" dirty="0">
+                          <a:effectLst/>
+                        </a:rPr>
+                        <a:t>23</a:t>
+                      </a:r>
+                    </a:p>
+                  </a:txBody>
+                  <a:tcPr marL="55530" marR="55530" marT="27765" marB="27765" anchor="ctr">
+                    <a:lnL w="12700" cap="flat" cmpd="sng" algn="ctr">
+                      <a:solidFill>
+                        <a:schemeClr val="tx1"/>
+                      </a:solidFill>
+                      <a:prstDash val="solid"/>
+                      <a:round/>
+                      <a:headEnd type="none" w="med" len="med"/>
+                      <a:tailEnd type="none" w="med" len="med"/>
+                    </a:lnL>
+                    <a:lnR w="12700" cap="flat" cmpd="sng" algn="ctr">
+                      <a:solidFill>
+                        <a:schemeClr val="tx1"/>
+                      </a:solidFill>
+                      <a:prstDash val="solid"/>
+                      <a:round/>
+                      <a:headEnd type="none" w="med" len="med"/>
+                      <a:tailEnd type="none" w="med" len="med"/>
+                    </a:lnR>
+                    <a:lnT w="12700" cap="flat" cmpd="sng" algn="ctr">
+                      <a:solidFill>
+                        <a:schemeClr val="tx1"/>
+                      </a:solidFill>
+                      <a:prstDash val="solid"/>
+                      <a:round/>
+                      <a:headEnd type="none" w="med" len="med"/>
+                      <a:tailEnd type="none" w="med" len="med"/>
+                    </a:lnT>
+                    <a:lnB w="12700" cap="flat" cmpd="sng" algn="ctr">
+                      <a:solidFill>
+                        <a:schemeClr val="tx1"/>
+                      </a:solidFill>
+                      <a:prstDash val="solid"/>
+                      <a:round/>
+                      <a:headEnd type="none" w="med" len="med"/>
+                      <a:tailEnd type="none" w="med" len="med"/>
+                    </a:lnB>
+                  </a:tcPr>
+                </a:tc>
+                <a:tc>
+                  <a:txBody>
+                    <a:bodyPr/>
+                    <a:lstStyle/>
+                    <a:p>
+                      <a:pPr algn="ctr"/>
+                      <a:r>
+                        <a:rPr lang="af-ZA" sz="1000">
+                          <a:effectLst/>
+                        </a:rPr>
+                        <a:t>TCP</a:t>
+                      </a:r>
+                    </a:p>
+                  </a:txBody>
+                  <a:tcPr marL="55530" marR="55530" marT="27765" marB="27765" anchor="ctr">
+                    <a:lnL w="12700" cap="flat" cmpd="sng" algn="ctr">
+                      <a:solidFill>
+                        <a:schemeClr val="tx1"/>
+                      </a:solidFill>
+                      <a:prstDash val="solid"/>
+                      <a:round/>
+                      <a:headEnd type="none" w="med" len="med"/>
+                      <a:tailEnd type="none" w="med" len="med"/>
+                    </a:lnL>
+                    <a:lnR w="12700" cap="flat" cmpd="sng" algn="ctr">
+                      <a:solidFill>
+                        <a:schemeClr val="tx1"/>
+                      </a:solidFill>
+                      <a:prstDash val="solid"/>
+                      <a:round/>
+                      <a:headEnd type="none" w="med" len="med"/>
+                      <a:tailEnd type="none" w="med" len="med"/>
+                    </a:lnR>
+                    <a:lnT w="12700" cap="flat" cmpd="sng" algn="ctr">
+                      <a:solidFill>
+                        <a:schemeClr val="tx1"/>
+                      </a:solidFill>
+                      <a:prstDash val="solid"/>
+                      <a:round/>
+                      <a:headEnd type="none" w="med" len="med"/>
+                      <a:tailEnd type="none" w="med" len="med"/>
+                    </a:lnT>
+                    <a:lnB w="12700" cap="flat" cmpd="sng" algn="ctr">
+                      <a:solidFill>
+                        <a:schemeClr val="tx1"/>
+                      </a:solidFill>
+                      <a:prstDash val="solid"/>
+                      <a:round/>
+                      <a:headEnd type="none" w="med" len="med"/>
+                      <a:tailEnd type="none" w="med" len="med"/>
+                    </a:lnB>
+                  </a:tcPr>
+                </a:tc>
+                <a:tc>
+                  <a:txBody>
+                    <a:bodyPr/>
+                    <a:lstStyle/>
+                    <a:p>
+                      <a:pPr algn="l"/>
+                      <a:r>
+                        <a:rPr lang="ru-RU" sz="1000">
+                          <a:effectLst/>
+                        </a:rPr>
+                        <a:t>Программа </a:t>
+                      </a:r>
+                      <a:r>
+                        <a:rPr lang="af-ZA" sz="1000">
+                          <a:effectLst/>
+                        </a:rPr>
+                        <a:t>Telnet</a:t>
+                      </a:r>
+                    </a:p>
+                  </a:txBody>
+                  <a:tcPr marL="55530" marR="55530" marT="27765" marB="27765" anchor="ctr">
+                    <a:lnL w="12700" cap="flat" cmpd="sng" algn="ctr">
+                      <a:solidFill>
+                        <a:schemeClr val="tx1"/>
+                      </a:solidFill>
+                      <a:prstDash val="solid"/>
+                      <a:round/>
+                      <a:headEnd type="none" w="med" len="med"/>
+                      <a:tailEnd type="none" w="med" len="med"/>
+                    </a:lnL>
+                    <a:lnR w="12700" cap="flat" cmpd="sng" algn="ctr">
+                      <a:solidFill>
+                        <a:schemeClr val="tx1"/>
+                      </a:solidFill>
+                      <a:prstDash val="solid"/>
+                      <a:round/>
+                      <a:headEnd type="none" w="med" len="med"/>
+                      <a:tailEnd type="none" w="med" len="med"/>
+                    </a:lnR>
+                    <a:lnT w="12700" cap="flat" cmpd="sng" algn="ctr">
+                      <a:solidFill>
+                        <a:schemeClr val="tx1"/>
+                      </a:solidFill>
+                      <a:prstDash val="solid"/>
+                      <a:round/>
+                      <a:headEnd type="none" w="med" len="med"/>
+                      <a:tailEnd type="none" w="med" len="med"/>
+                    </a:lnT>
+                    <a:lnB w="12700" cap="flat" cmpd="sng" algn="ctr">
+                      <a:solidFill>
+                        <a:schemeClr val="tx1"/>
+                      </a:solidFill>
+                      <a:prstDash val="solid"/>
+                      <a:round/>
+                      <a:headEnd type="none" w="med" len="med"/>
+                      <a:tailEnd type="none" w="med" len="med"/>
+                    </a:lnB>
+                  </a:tcPr>
+                </a:tc>
+                <a:extLst>
+                  <a:ext uri="{0D108BD9-81ED-4DB2-BD59-A6C34878D82A}">
+                    <a16:rowId xmlns:a16="http://schemas.microsoft.com/office/drawing/2014/main" val="551674022"/>
+                  </a:ext>
+                </a:extLst>
+              </a:tr>
+              <a:tr h="248586">
+                <a:tc>
+                  <a:txBody>
+                    <a:bodyPr/>
+                    <a:lstStyle/>
+                    <a:p>
+                      <a:pPr algn="ctr"/>
+                      <a:r>
+                        <a:rPr lang="ru-RU" sz="1000" dirty="0">
+                          <a:effectLst/>
+                        </a:rPr>
+                        <a:t>25</a:t>
+                      </a:r>
+                    </a:p>
+                  </a:txBody>
+                  <a:tcPr marL="55530" marR="55530" marT="27765" marB="27765" anchor="ctr">
+                    <a:lnL w="12700" cap="flat" cmpd="sng" algn="ctr">
+                      <a:solidFill>
+                        <a:schemeClr val="tx1"/>
+                      </a:solidFill>
+                      <a:prstDash val="solid"/>
+                      <a:round/>
+                      <a:headEnd type="none" w="med" len="med"/>
+                      <a:tailEnd type="none" w="med" len="med"/>
+                    </a:lnL>
+                    <a:lnR w="12700" cap="flat" cmpd="sng" algn="ctr">
+                      <a:solidFill>
+                        <a:schemeClr val="tx1"/>
+                      </a:solidFill>
+                      <a:prstDash val="solid"/>
+                      <a:round/>
+                      <a:headEnd type="none" w="med" len="med"/>
+                      <a:tailEnd type="none" w="med" len="med"/>
+                    </a:lnR>
+                    <a:lnT w="12700" cap="flat" cmpd="sng" algn="ctr">
+                      <a:solidFill>
+                        <a:schemeClr val="tx1"/>
+                      </a:solidFill>
+                      <a:prstDash val="solid"/>
+                      <a:round/>
+                      <a:headEnd type="none" w="med" len="med"/>
+                      <a:tailEnd type="none" w="med" len="med"/>
+                    </a:lnT>
+                    <a:lnB w="12700" cap="flat" cmpd="sng" algn="ctr">
+                      <a:solidFill>
+                        <a:schemeClr val="tx1"/>
+                      </a:solidFill>
+                      <a:prstDash val="solid"/>
+                      <a:round/>
+                      <a:headEnd type="none" w="med" len="med"/>
+                      <a:tailEnd type="none" w="med" len="med"/>
+                    </a:lnB>
+                  </a:tcPr>
+                </a:tc>
+                <a:tc>
+                  <a:txBody>
+                    <a:bodyPr/>
+                    <a:lstStyle/>
+                    <a:p>
+                      <a:pPr algn="ctr"/>
+                      <a:r>
+                        <a:rPr lang="af-ZA" sz="1000">
+                          <a:effectLst/>
+                        </a:rPr>
+                        <a:t>TCP</a:t>
+                      </a:r>
+                    </a:p>
+                  </a:txBody>
+                  <a:tcPr marL="55530" marR="55530" marT="27765" marB="27765" anchor="ctr">
+                    <a:lnL w="12700" cap="flat" cmpd="sng" algn="ctr">
+                      <a:solidFill>
+                        <a:schemeClr val="tx1"/>
+                      </a:solidFill>
+                      <a:prstDash val="solid"/>
+                      <a:round/>
+                      <a:headEnd type="none" w="med" len="med"/>
+                      <a:tailEnd type="none" w="med" len="med"/>
+                    </a:lnL>
+                    <a:lnR w="12700" cap="flat" cmpd="sng" algn="ctr">
+                      <a:solidFill>
+                        <a:schemeClr val="tx1"/>
+                      </a:solidFill>
+                      <a:prstDash val="solid"/>
+                      <a:round/>
+                      <a:headEnd type="none" w="med" len="med"/>
+                      <a:tailEnd type="none" w="med" len="med"/>
+                    </a:lnR>
+                    <a:lnT w="12700" cap="flat" cmpd="sng" algn="ctr">
+                      <a:solidFill>
+                        <a:schemeClr val="tx1"/>
+                      </a:solidFill>
+                      <a:prstDash val="solid"/>
+                      <a:round/>
+                      <a:headEnd type="none" w="med" len="med"/>
+                      <a:tailEnd type="none" w="med" len="med"/>
+                    </a:lnT>
+                    <a:lnB w="12700" cap="flat" cmpd="sng" algn="ctr">
+                      <a:solidFill>
+                        <a:schemeClr val="tx1"/>
+                      </a:solidFill>
+                      <a:prstDash val="solid"/>
+                      <a:round/>
+                      <a:headEnd type="none" w="med" len="med"/>
+                      <a:tailEnd type="none" w="med" len="med"/>
+                    </a:lnB>
+                  </a:tcPr>
+                </a:tc>
+                <a:tc>
+                  <a:txBody>
+                    <a:bodyPr/>
+                    <a:lstStyle/>
+                    <a:p>
+                      <a:pPr algn="l"/>
+                      <a:r>
+                        <a:rPr lang="ru-RU" sz="1000">
+                          <a:effectLst/>
+                        </a:rPr>
+                        <a:t>Протокол </a:t>
+                      </a:r>
+                      <a:r>
+                        <a:rPr lang="af-ZA" sz="1000">
+                          <a:effectLst/>
+                        </a:rPr>
+                        <a:t>SMTP</a:t>
+                      </a:r>
+                    </a:p>
+                  </a:txBody>
+                  <a:tcPr marL="55530" marR="55530" marT="27765" marB="27765" anchor="ctr">
+                    <a:lnL w="12700" cap="flat" cmpd="sng" algn="ctr">
+                      <a:solidFill>
+                        <a:schemeClr val="tx1"/>
+                      </a:solidFill>
+                      <a:prstDash val="solid"/>
+                      <a:round/>
+                      <a:headEnd type="none" w="med" len="med"/>
+                      <a:tailEnd type="none" w="med" len="med"/>
+                    </a:lnL>
+                    <a:lnR w="12700" cap="flat" cmpd="sng" algn="ctr">
+                      <a:solidFill>
+                        <a:schemeClr val="tx1"/>
+                      </a:solidFill>
+                      <a:prstDash val="solid"/>
+                      <a:round/>
+                      <a:headEnd type="none" w="med" len="med"/>
+                      <a:tailEnd type="none" w="med" len="med"/>
+                    </a:lnR>
+                    <a:lnT w="12700" cap="flat" cmpd="sng" algn="ctr">
+                      <a:solidFill>
+                        <a:schemeClr val="tx1"/>
+                      </a:solidFill>
+                      <a:prstDash val="solid"/>
+                      <a:round/>
+                      <a:headEnd type="none" w="med" len="med"/>
+                      <a:tailEnd type="none" w="med" len="med"/>
+                    </a:lnT>
+                    <a:lnB w="12700" cap="flat" cmpd="sng" algn="ctr">
+                      <a:solidFill>
+                        <a:schemeClr val="tx1"/>
+                      </a:solidFill>
+                      <a:prstDash val="solid"/>
+                      <a:round/>
+                      <a:headEnd type="none" w="med" len="med"/>
+                      <a:tailEnd type="none" w="med" len="med"/>
+                    </a:lnB>
+                  </a:tcPr>
+                </a:tc>
+                <a:extLst>
+                  <a:ext uri="{0D108BD9-81ED-4DB2-BD59-A6C34878D82A}">
+                    <a16:rowId xmlns:a16="http://schemas.microsoft.com/office/drawing/2014/main" val="11083581"/>
+                  </a:ext>
+                </a:extLst>
+              </a:tr>
+              <a:tr h="248586">
+                <a:tc>
+                  <a:txBody>
+                    <a:bodyPr/>
+                    <a:lstStyle/>
+                    <a:p>
+                      <a:pPr algn="ctr"/>
+                      <a:r>
+                        <a:rPr lang="ru-RU" sz="1000">
+                          <a:effectLst/>
+                        </a:rPr>
+                        <a:t>53</a:t>
+                      </a:r>
+                    </a:p>
+                  </a:txBody>
+                  <a:tcPr marL="55530" marR="55530" marT="27765" marB="27765" anchor="ctr">
+                    <a:lnL w="12700" cap="flat" cmpd="sng" algn="ctr">
+                      <a:solidFill>
+                        <a:schemeClr val="tx1"/>
+                      </a:solidFill>
+                      <a:prstDash val="solid"/>
+                      <a:round/>
+                      <a:headEnd type="none" w="med" len="med"/>
+                      <a:tailEnd type="none" w="med" len="med"/>
+                    </a:lnL>
+                    <a:lnR w="12700" cap="flat" cmpd="sng" algn="ctr">
+                      <a:solidFill>
+                        <a:schemeClr val="tx1"/>
+                      </a:solidFill>
+                      <a:prstDash val="solid"/>
+                      <a:round/>
+                      <a:headEnd type="none" w="med" len="med"/>
+                      <a:tailEnd type="none" w="med" len="med"/>
+                    </a:lnR>
+                    <a:lnT w="12700" cap="flat" cmpd="sng" algn="ctr">
+                      <a:solidFill>
+                        <a:schemeClr val="tx1"/>
+                      </a:solidFill>
+                      <a:prstDash val="solid"/>
+                      <a:round/>
+                      <a:headEnd type="none" w="med" len="med"/>
+                      <a:tailEnd type="none" w="med" len="med"/>
+                    </a:lnT>
+                    <a:lnB w="12700" cap="flat" cmpd="sng" algn="ctr">
+                      <a:solidFill>
+                        <a:schemeClr val="tx1"/>
+                      </a:solidFill>
+                      <a:prstDash val="solid"/>
+                      <a:round/>
+                      <a:headEnd type="none" w="med" len="med"/>
+                      <a:tailEnd type="none" w="med" len="med"/>
+                    </a:lnB>
+                  </a:tcPr>
+                </a:tc>
+                <a:tc>
+                  <a:txBody>
+                    <a:bodyPr/>
+                    <a:lstStyle/>
+                    <a:p>
+                      <a:pPr algn="ctr"/>
+                      <a:r>
+                        <a:rPr lang="af-ZA" sz="1000" dirty="0">
+                          <a:effectLst/>
+                        </a:rPr>
+                        <a:t>UDP, TCP</a:t>
+                      </a:r>
+                    </a:p>
+                  </a:txBody>
+                  <a:tcPr marL="55530" marR="55530" marT="27765" marB="27765" anchor="ctr">
+                    <a:lnL w="12700" cap="flat" cmpd="sng" algn="ctr">
+                      <a:solidFill>
+                        <a:schemeClr val="tx1"/>
+                      </a:solidFill>
+                      <a:prstDash val="solid"/>
+                      <a:round/>
+                      <a:headEnd type="none" w="med" len="med"/>
+                      <a:tailEnd type="none" w="med" len="med"/>
+                    </a:lnL>
+                    <a:lnR w="12700" cap="flat" cmpd="sng" algn="ctr">
+                      <a:solidFill>
+                        <a:schemeClr val="tx1"/>
+                      </a:solidFill>
+                      <a:prstDash val="solid"/>
+                      <a:round/>
+                      <a:headEnd type="none" w="med" len="med"/>
+                      <a:tailEnd type="none" w="med" len="med"/>
+                    </a:lnR>
+                    <a:lnT w="12700" cap="flat" cmpd="sng" algn="ctr">
+                      <a:solidFill>
+                        <a:schemeClr val="tx1"/>
+                      </a:solidFill>
+                      <a:prstDash val="solid"/>
+                      <a:round/>
+                      <a:headEnd type="none" w="med" len="med"/>
+                      <a:tailEnd type="none" w="med" len="med"/>
+                    </a:lnT>
+                    <a:lnB w="12700" cap="flat" cmpd="sng" algn="ctr">
+                      <a:solidFill>
+                        <a:schemeClr val="tx1"/>
+                      </a:solidFill>
+                      <a:prstDash val="solid"/>
+                      <a:round/>
+                      <a:headEnd type="none" w="med" len="med"/>
+                      <a:tailEnd type="none" w="med" len="med"/>
+                    </a:lnB>
+                  </a:tcPr>
+                </a:tc>
+                <a:tc>
+                  <a:txBody>
+                    <a:bodyPr/>
+                    <a:lstStyle/>
+                    <a:p>
+                      <a:pPr algn="l"/>
+                      <a:r>
+                        <a:rPr lang="ru-RU" sz="1000">
+                          <a:effectLst/>
+                        </a:rPr>
+                        <a:t>Служба доменных имён (</a:t>
+                      </a:r>
+                      <a:r>
+                        <a:rPr lang="af-ZA" sz="1000">
+                          <a:effectLst/>
+                        </a:rPr>
+                        <a:t>DNS)</a:t>
+                      </a:r>
+                    </a:p>
+                  </a:txBody>
+                  <a:tcPr marL="55530" marR="55530" marT="27765" marB="27765" anchor="ctr">
+                    <a:lnL w="12700" cap="flat" cmpd="sng" algn="ctr">
+                      <a:solidFill>
+                        <a:schemeClr val="tx1"/>
+                      </a:solidFill>
+                      <a:prstDash val="solid"/>
+                      <a:round/>
+                      <a:headEnd type="none" w="med" len="med"/>
+                      <a:tailEnd type="none" w="med" len="med"/>
+                    </a:lnL>
+                    <a:lnR w="12700" cap="flat" cmpd="sng" algn="ctr">
+                      <a:solidFill>
+                        <a:schemeClr val="tx1"/>
+                      </a:solidFill>
+                      <a:prstDash val="solid"/>
+                      <a:round/>
+                      <a:headEnd type="none" w="med" len="med"/>
+                      <a:tailEnd type="none" w="med" len="med"/>
+                    </a:lnR>
+                    <a:lnT w="12700" cap="flat" cmpd="sng" algn="ctr">
+                      <a:solidFill>
+                        <a:schemeClr val="tx1"/>
+                      </a:solidFill>
+                      <a:prstDash val="solid"/>
+                      <a:round/>
+                      <a:headEnd type="none" w="med" len="med"/>
+                      <a:tailEnd type="none" w="med" len="med"/>
+                    </a:lnT>
+                    <a:lnB w="12700" cap="flat" cmpd="sng" algn="ctr">
+                      <a:solidFill>
+                        <a:schemeClr val="tx1"/>
+                      </a:solidFill>
+                      <a:prstDash val="solid"/>
+                      <a:round/>
+                      <a:headEnd type="none" w="med" len="med"/>
+                      <a:tailEnd type="none" w="med" len="med"/>
+                    </a:lnB>
+                  </a:tcPr>
+                </a:tc>
+                <a:extLst>
+                  <a:ext uri="{0D108BD9-81ED-4DB2-BD59-A6C34878D82A}">
+                    <a16:rowId xmlns:a16="http://schemas.microsoft.com/office/drawing/2014/main" val="2899083790"/>
+                  </a:ext>
+                </a:extLst>
+              </a:tr>
+              <a:tr h="433103">
+                <a:tc>
+                  <a:txBody>
+                    <a:bodyPr/>
+                    <a:lstStyle/>
+                    <a:p>
+                      <a:pPr algn="ctr"/>
+                      <a:r>
+                        <a:rPr lang="ru-RU" sz="1000">
+                          <a:effectLst/>
+                        </a:rPr>
+                        <a:t>67</a:t>
+                      </a:r>
+                    </a:p>
+                  </a:txBody>
+                  <a:tcPr marL="55530" marR="55530" marT="27765" marB="27765" anchor="ctr">
+                    <a:lnL w="12700" cap="flat" cmpd="sng" algn="ctr">
+                      <a:solidFill>
+                        <a:schemeClr val="tx1"/>
+                      </a:solidFill>
+                      <a:prstDash val="solid"/>
+                      <a:round/>
+                      <a:headEnd type="none" w="med" len="med"/>
+                      <a:tailEnd type="none" w="med" len="med"/>
+                    </a:lnL>
+                    <a:lnR w="12700" cap="flat" cmpd="sng" algn="ctr">
+                      <a:solidFill>
+                        <a:schemeClr val="tx1"/>
+                      </a:solidFill>
+                      <a:prstDash val="solid"/>
+                      <a:round/>
+                      <a:headEnd type="none" w="med" len="med"/>
+                      <a:tailEnd type="none" w="med" len="med"/>
+                    </a:lnR>
+                    <a:lnT w="12700" cap="flat" cmpd="sng" algn="ctr">
+                      <a:solidFill>
+                        <a:schemeClr val="tx1"/>
+                      </a:solidFill>
+                      <a:prstDash val="solid"/>
+                      <a:round/>
+                      <a:headEnd type="none" w="med" len="med"/>
+                      <a:tailEnd type="none" w="med" len="med"/>
+                    </a:lnT>
+                    <a:lnB w="12700" cap="flat" cmpd="sng" algn="ctr">
+                      <a:solidFill>
+                        <a:schemeClr val="tx1"/>
+                      </a:solidFill>
+                      <a:prstDash val="solid"/>
+                      <a:round/>
+                      <a:headEnd type="none" w="med" len="med"/>
+                      <a:tailEnd type="none" w="med" len="med"/>
+                    </a:lnB>
+                  </a:tcPr>
+                </a:tc>
+                <a:tc>
+                  <a:txBody>
+                    <a:bodyPr/>
+                    <a:lstStyle/>
+                    <a:p>
+                      <a:pPr algn="ctr"/>
+                      <a:r>
+                        <a:rPr lang="af-ZA" sz="1000" dirty="0">
+                          <a:effectLst/>
+                        </a:rPr>
+                        <a:t>UDP</a:t>
+                      </a:r>
+                    </a:p>
+                  </a:txBody>
+                  <a:tcPr marL="55530" marR="55530" marT="27765" marB="27765" anchor="ctr">
+                    <a:lnL w="12700" cap="flat" cmpd="sng" algn="ctr">
+                      <a:solidFill>
+                        <a:schemeClr val="tx1"/>
+                      </a:solidFill>
+                      <a:prstDash val="solid"/>
+                      <a:round/>
+                      <a:headEnd type="none" w="med" len="med"/>
+                      <a:tailEnd type="none" w="med" len="med"/>
+                    </a:lnL>
+                    <a:lnR w="12700" cap="flat" cmpd="sng" algn="ctr">
+                      <a:solidFill>
+                        <a:schemeClr val="tx1"/>
+                      </a:solidFill>
+                      <a:prstDash val="solid"/>
+                      <a:round/>
+                      <a:headEnd type="none" w="med" len="med"/>
+                      <a:tailEnd type="none" w="med" len="med"/>
+                    </a:lnR>
+                    <a:lnT w="12700" cap="flat" cmpd="sng" algn="ctr">
+                      <a:solidFill>
+                        <a:schemeClr val="tx1"/>
+                      </a:solidFill>
+                      <a:prstDash val="solid"/>
+                      <a:round/>
+                      <a:headEnd type="none" w="med" len="med"/>
+                      <a:tailEnd type="none" w="med" len="med"/>
+                    </a:lnT>
+                    <a:lnB w="12700" cap="flat" cmpd="sng" algn="ctr">
+                      <a:solidFill>
+                        <a:schemeClr val="tx1"/>
+                      </a:solidFill>
+                      <a:prstDash val="solid"/>
+                      <a:round/>
+                      <a:headEnd type="none" w="med" len="med"/>
+                      <a:tailEnd type="none" w="med" len="med"/>
+                    </a:lnB>
+                  </a:tcPr>
+                </a:tc>
+                <a:tc>
+                  <a:txBody>
+                    <a:bodyPr/>
+                    <a:lstStyle/>
+                    <a:p>
+                      <a:pPr algn="l"/>
+                      <a:r>
+                        <a:rPr lang="ru-RU" sz="1000">
+                          <a:effectLst/>
+                        </a:rPr>
+                        <a:t>Сервер протокола динамической конфигурации узла (DHCP)</a:t>
+                      </a:r>
+                    </a:p>
+                  </a:txBody>
+                  <a:tcPr marL="55530" marR="55530" marT="27765" marB="27765" anchor="ctr">
+                    <a:lnL w="12700" cap="flat" cmpd="sng" algn="ctr">
+                      <a:solidFill>
+                        <a:schemeClr val="tx1"/>
+                      </a:solidFill>
+                      <a:prstDash val="solid"/>
+                      <a:round/>
+                      <a:headEnd type="none" w="med" len="med"/>
+                      <a:tailEnd type="none" w="med" len="med"/>
+                    </a:lnL>
+                    <a:lnR w="12700" cap="flat" cmpd="sng" algn="ctr">
+                      <a:solidFill>
+                        <a:schemeClr val="tx1"/>
+                      </a:solidFill>
+                      <a:prstDash val="solid"/>
+                      <a:round/>
+                      <a:headEnd type="none" w="med" len="med"/>
+                      <a:tailEnd type="none" w="med" len="med"/>
+                    </a:lnR>
+                    <a:lnT w="12700" cap="flat" cmpd="sng" algn="ctr">
+                      <a:solidFill>
+                        <a:schemeClr val="tx1"/>
+                      </a:solidFill>
+                      <a:prstDash val="solid"/>
+                      <a:round/>
+                      <a:headEnd type="none" w="med" len="med"/>
+                      <a:tailEnd type="none" w="med" len="med"/>
+                    </a:lnT>
+                    <a:lnB w="12700" cap="flat" cmpd="sng" algn="ctr">
+                      <a:solidFill>
+                        <a:schemeClr val="tx1"/>
+                      </a:solidFill>
+                      <a:prstDash val="solid"/>
+                      <a:round/>
+                      <a:headEnd type="none" w="med" len="med"/>
+                      <a:tailEnd type="none" w="med" len="med"/>
+                    </a:lnB>
+                  </a:tcPr>
+                </a:tc>
+                <a:extLst>
+                  <a:ext uri="{0D108BD9-81ED-4DB2-BD59-A6C34878D82A}">
+                    <a16:rowId xmlns:a16="http://schemas.microsoft.com/office/drawing/2014/main" val="1495882636"/>
+                  </a:ext>
+                </a:extLst>
+              </a:tr>
+              <a:tr h="433103">
+                <a:tc>
+                  <a:txBody>
+                    <a:bodyPr/>
+                    <a:lstStyle/>
+                    <a:p>
+                      <a:pPr algn="ctr"/>
+                      <a:r>
+                        <a:rPr lang="ru-RU" sz="1000">
+                          <a:effectLst/>
+                        </a:rPr>
+                        <a:t>68</a:t>
+                      </a:r>
+                    </a:p>
+                  </a:txBody>
+                  <a:tcPr marL="55530" marR="55530" marT="27765" marB="27765" anchor="ctr">
+                    <a:lnL w="12700" cap="flat" cmpd="sng" algn="ctr">
+                      <a:solidFill>
+                        <a:schemeClr val="tx1"/>
+                      </a:solidFill>
+                      <a:prstDash val="solid"/>
+                      <a:round/>
+                      <a:headEnd type="none" w="med" len="med"/>
+                      <a:tailEnd type="none" w="med" len="med"/>
+                    </a:lnL>
+                    <a:lnR w="12700" cap="flat" cmpd="sng" algn="ctr">
+                      <a:solidFill>
+                        <a:schemeClr val="tx1"/>
+                      </a:solidFill>
+                      <a:prstDash val="solid"/>
+                      <a:round/>
+                      <a:headEnd type="none" w="med" len="med"/>
+                      <a:tailEnd type="none" w="med" len="med"/>
+                    </a:lnR>
+                    <a:lnT w="12700" cap="flat" cmpd="sng" algn="ctr">
+                      <a:solidFill>
+                        <a:schemeClr val="tx1"/>
+                      </a:solidFill>
+                      <a:prstDash val="solid"/>
+                      <a:round/>
+                      <a:headEnd type="none" w="med" len="med"/>
+                      <a:tailEnd type="none" w="med" len="med"/>
+                    </a:lnT>
+                    <a:lnB w="12700" cap="flat" cmpd="sng" algn="ctr">
+                      <a:solidFill>
+                        <a:schemeClr val="tx1"/>
+                      </a:solidFill>
+                      <a:prstDash val="solid"/>
+                      <a:round/>
+                      <a:headEnd type="none" w="med" len="med"/>
+                      <a:tailEnd type="none" w="med" len="med"/>
+                    </a:lnB>
+                  </a:tcPr>
+                </a:tc>
+                <a:tc>
+                  <a:txBody>
+                    <a:bodyPr/>
+                    <a:lstStyle/>
+                    <a:p>
+                      <a:pPr algn="ctr"/>
+                      <a:r>
+                        <a:rPr lang="af-ZA" sz="1000" dirty="0">
+                          <a:effectLst/>
+                        </a:rPr>
+                        <a:t>UDP</a:t>
+                      </a:r>
+                    </a:p>
+                  </a:txBody>
+                  <a:tcPr marL="55530" marR="55530" marT="27765" marB="27765" anchor="ctr">
+                    <a:lnL w="12700" cap="flat" cmpd="sng" algn="ctr">
+                      <a:solidFill>
+                        <a:schemeClr val="tx1"/>
+                      </a:solidFill>
+                      <a:prstDash val="solid"/>
+                      <a:round/>
+                      <a:headEnd type="none" w="med" len="med"/>
+                      <a:tailEnd type="none" w="med" len="med"/>
+                    </a:lnL>
+                    <a:lnR w="12700" cap="flat" cmpd="sng" algn="ctr">
+                      <a:solidFill>
+                        <a:schemeClr val="tx1"/>
+                      </a:solidFill>
+                      <a:prstDash val="solid"/>
+                      <a:round/>
+                      <a:headEnd type="none" w="med" len="med"/>
+                      <a:tailEnd type="none" w="med" len="med"/>
+                    </a:lnR>
+                    <a:lnT w="12700" cap="flat" cmpd="sng" algn="ctr">
+                      <a:solidFill>
+                        <a:schemeClr val="tx1"/>
+                      </a:solidFill>
+                      <a:prstDash val="solid"/>
+                      <a:round/>
+                      <a:headEnd type="none" w="med" len="med"/>
+                      <a:tailEnd type="none" w="med" len="med"/>
+                    </a:lnT>
+                    <a:lnB w="12700" cap="flat" cmpd="sng" algn="ctr">
+                      <a:solidFill>
+                        <a:schemeClr val="tx1"/>
+                      </a:solidFill>
+                      <a:prstDash val="solid"/>
+                      <a:round/>
+                      <a:headEnd type="none" w="med" len="med"/>
+                      <a:tailEnd type="none" w="med" len="med"/>
+                    </a:lnB>
+                  </a:tcPr>
+                </a:tc>
+                <a:tc>
+                  <a:txBody>
+                    <a:bodyPr/>
+                    <a:lstStyle/>
+                    <a:p>
+                      <a:pPr algn="l"/>
+                      <a:r>
+                        <a:rPr lang="af-ZA" sz="1000">
+                          <a:effectLst/>
+                        </a:rPr>
+                        <a:t>Dynamic Host Configuration Protocol (DHCP) — </a:t>
+                      </a:r>
+                      <a:r>
+                        <a:rPr lang="ru-RU" sz="1000">
+                          <a:effectLst/>
+                        </a:rPr>
+                        <a:t>клиент</a:t>
+                      </a:r>
+                    </a:p>
+                  </a:txBody>
+                  <a:tcPr marL="55530" marR="55530" marT="27765" marB="27765" anchor="ctr">
+                    <a:lnL w="12700" cap="flat" cmpd="sng" algn="ctr">
+                      <a:solidFill>
+                        <a:schemeClr val="tx1"/>
+                      </a:solidFill>
+                      <a:prstDash val="solid"/>
+                      <a:round/>
+                      <a:headEnd type="none" w="med" len="med"/>
+                      <a:tailEnd type="none" w="med" len="med"/>
+                    </a:lnL>
+                    <a:lnR w="12700" cap="flat" cmpd="sng" algn="ctr">
+                      <a:solidFill>
+                        <a:schemeClr val="tx1"/>
+                      </a:solidFill>
+                      <a:prstDash val="solid"/>
+                      <a:round/>
+                      <a:headEnd type="none" w="med" len="med"/>
+                      <a:tailEnd type="none" w="med" len="med"/>
+                    </a:lnR>
+                    <a:lnT w="12700" cap="flat" cmpd="sng" algn="ctr">
+                      <a:solidFill>
+                        <a:schemeClr val="tx1"/>
+                      </a:solidFill>
+                      <a:prstDash val="solid"/>
+                      <a:round/>
+                      <a:headEnd type="none" w="med" len="med"/>
+                      <a:tailEnd type="none" w="med" len="med"/>
+                    </a:lnT>
+                    <a:lnB w="12700" cap="flat" cmpd="sng" algn="ctr">
+                      <a:solidFill>
+                        <a:schemeClr val="tx1"/>
+                      </a:solidFill>
+                      <a:prstDash val="solid"/>
+                      <a:round/>
+                      <a:headEnd type="none" w="med" len="med"/>
+                      <a:tailEnd type="none" w="med" len="med"/>
+                    </a:lnB>
+                  </a:tcPr>
+                </a:tc>
+                <a:extLst>
+                  <a:ext uri="{0D108BD9-81ED-4DB2-BD59-A6C34878D82A}">
+                    <a16:rowId xmlns:a16="http://schemas.microsoft.com/office/drawing/2014/main" val="991202852"/>
+                  </a:ext>
+                </a:extLst>
+              </a:tr>
+              <a:tr h="433103">
+                <a:tc>
+                  <a:txBody>
+                    <a:bodyPr/>
+                    <a:lstStyle/>
+                    <a:p>
+                      <a:pPr algn="ctr"/>
+                      <a:r>
+                        <a:rPr lang="ru-RU" sz="1000">
+                          <a:effectLst/>
+                        </a:rPr>
+                        <a:t>69</a:t>
+                      </a:r>
+                    </a:p>
+                  </a:txBody>
+                  <a:tcPr marL="55530" marR="55530" marT="27765" marB="27765" anchor="ctr">
+                    <a:lnL w="12700" cap="flat" cmpd="sng" algn="ctr">
+                      <a:solidFill>
+                        <a:schemeClr val="tx1"/>
+                      </a:solidFill>
+                      <a:prstDash val="solid"/>
+                      <a:round/>
+                      <a:headEnd type="none" w="med" len="med"/>
+                      <a:tailEnd type="none" w="med" len="med"/>
+                    </a:lnL>
+                    <a:lnR w="12700" cap="flat" cmpd="sng" algn="ctr">
+                      <a:solidFill>
+                        <a:schemeClr val="tx1"/>
+                      </a:solidFill>
+                      <a:prstDash val="solid"/>
+                      <a:round/>
+                      <a:headEnd type="none" w="med" len="med"/>
+                      <a:tailEnd type="none" w="med" len="med"/>
+                    </a:lnR>
+                    <a:lnT w="12700" cap="flat" cmpd="sng" algn="ctr">
+                      <a:solidFill>
+                        <a:schemeClr val="tx1"/>
+                      </a:solidFill>
+                      <a:prstDash val="solid"/>
+                      <a:round/>
+                      <a:headEnd type="none" w="med" len="med"/>
+                      <a:tailEnd type="none" w="med" len="med"/>
+                    </a:lnT>
+                    <a:lnB w="12700" cap="flat" cmpd="sng" algn="ctr">
+                      <a:solidFill>
+                        <a:schemeClr val="tx1"/>
+                      </a:solidFill>
+                      <a:prstDash val="solid"/>
+                      <a:round/>
+                      <a:headEnd type="none" w="med" len="med"/>
+                      <a:tailEnd type="none" w="med" len="med"/>
+                    </a:lnB>
+                  </a:tcPr>
+                </a:tc>
+                <a:tc>
+                  <a:txBody>
+                    <a:bodyPr/>
+                    <a:lstStyle/>
+                    <a:p>
+                      <a:pPr algn="ctr"/>
+                      <a:r>
+                        <a:rPr lang="af-ZA" sz="1000" dirty="0">
+                          <a:effectLst/>
+                        </a:rPr>
+                        <a:t>UDP</a:t>
+                      </a:r>
+                    </a:p>
+                  </a:txBody>
+                  <a:tcPr marL="55530" marR="55530" marT="27765" marB="27765" anchor="ctr">
+                    <a:lnL w="12700" cap="flat" cmpd="sng" algn="ctr">
+                      <a:solidFill>
+                        <a:schemeClr val="tx1"/>
+                      </a:solidFill>
+                      <a:prstDash val="solid"/>
+                      <a:round/>
+                      <a:headEnd type="none" w="med" len="med"/>
+                      <a:tailEnd type="none" w="med" len="med"/>
+                    </a:lnL>
+                    <a:lnR w="12700" cap="flat" cmpd="sng" algn="ctr">
+                      <a:solidFill>
+                        <a:schemeClr val="tx1"/>
+                      </a:solidFill>
+                      <a:prstDash val="solid"/>
+                      <a:round/>
+                      <a:headEnd type="none" w="med" len="med"/>
+                      <a:tailEnd type="none" w="med" len="med"/>
+                    </a:lnR>
+                    <a:lnT w="12700" cap="flat" cmpd="sng" algn="ctr">
+                      <a:solidFill>
+                        <a:schemeClr val="tx1"/>
+                      </a:solidFill>
+                      <a:prstDash val="solid"/>
+                      <a:round/>
+                      <a:headEnd type="none" w="med" len="med"/>
+                      <a:tailEnd type="none" w="med" len="med"/>
+                    </a:lnT>
+                    <a:lnB w="12700" cap="flat" cmpd="sng" algn="ctr">
+                      <a:solidFill>
+                        <a:schemeClr val="tx1"/>
+                      </a:solidFill>
+                      <a:prstDash val="solid"/>
+                      <a:round/>
+                      <a:headEnd type="none" w="med" len="med"/>
+                      <a:tailEnd type="none" w="med" len="med"/>
+                    </a:lnB>
+                  </a:tcPr>
+                </a:tc>
+                <a:tc>
+                  <a:txBody>
+                    <a:bodyPr/>
+                    <a:lstStyle/>
+                    <a:p>
+                      <a:pPr algn="l"/>
+                      <a:r>
+                        <a:rPr lang="ru-RU" sz="1000">
+                          <a:effectLst/>
+                        </a:rPr>
+                        <a:t>Простейший протокол передачи файлов (TFTP)</a:t>
+                      </a:r>
+                    </a:p>
+                  </a:txBody>
+                  <a:tcPr marL="55530" marR="55530" marT="27765" marB="27765" anchor="ctr">
+                    <a:lnL w="12700" cap="flat" cmpd="sng" algn="ctr">
+                      <a:solidFill>
+                        <a:schemeClr val="tx1"/>
+                      </a:solidFill>
+                      <a:prstDash val="solid"/>
+                      <a:round/>
+                      <a:headEnd type="none" w="med" len="med"/>
+                      <a:tailEnd type="none" w="med" len="med"/>
+                    </a:lnL>
+                    <a:lnR w="12700" cap="flat" cmpd="sng" algn="ctr">
+                      <a:solidFill>
+                        <a:schemeClr val="tx1"/>
+                      </a:solidFill>
+                      <a:prstDash val="solid"/>
+                      <a:round/>
+                      <a:headEnd type="none" w="med" len="med"/>
+                      <a:tailEnd type="none" w="med" len="med"/>
+                    </a:lnR>
+                    <a:lnT w="12700" cap="flat" cmpd="sng" algn="ctr">
+                      <a:solidFill>
+                        <a:schemeClr val="tx1"/>
+                      </a:solidFill>
+                      <a:prstDash val="solid"/>
+                      <a:round/>
+                      <a:headEnd type="none" w="med" len="med"/>
+                      <a:tailEnd type="none" w="med" len="med"/>
+                    </a:lnT>
+                    <a:lnB w="12700" cap="flat" cmpd="sng" algn="ctr">
+                      <a:solidFill>
+                        <a:schemeClr val="tx1"/>
+                      </a:solidFill>
+                      <a:prstDash val="solid"/>
+                      <a:round/>
+                      <a:headEnd type="none" w="med" len="med"/>
+                      <a:tailEnd type="none" w="med" len="med"/>
+                    </a:lnB>
+                  </a:tcPr>
+                </a:tc>
+                <a:extLst>
+                  <a:ext uri="{0D108BD9-81ED-4DB2-BD59-A6C34878D82A}">
+                    <a16:rowId xmlns:a16="http://schemas.microsoft.com/office/drawing/2014/main" val="495385690"/>
+                  </a:ext>
+                </a:extLst>
+              </a:tr>
+              <a:tr h="248586">
+                <a:tc>
+                  <a:txBody>
+                    <a:bodyPr/>
+                    <a:lstStyle/>
+                    <a:p>
+                      <a:pPr algn="ctr"/>
+                      <a:r>
+                        <a:rPr lang="ru-RU" sz="1000">
+                          <a:effectLst/>
+                        </a:rPr>
+                        <a:t>80</a:t>
+                      </a:r>
+                    </a:p>
+                  </a:txBody>
+                  <a:tcPr marL="55530" marR="55530" marT="27765" marB="27765" anchor="ctr">
+                    <a:lnL w="12700" cap="flat" cmpd="sng" algn="ctr">
+                      <a:solidFill>
+                        <a:schemeClr val="tx1"/>
+                      </a:solidFill>
+                      <a:prstDash val="solid"/>
+                      <a:round/>
+                      <a:headEnd type="none" w="med" len="med"/>
+                      <a:tailEnd type="none" w="med" len="med"/>
+                    </a:lnL>
+                    <a:lnR w="12700" cap="flat" cmpd="sng" algn="ctr">
+                      <a:solidFill>
+                        <a:schemeClr val="tx1"/>
+                      </a:solidFill>
+                      <a:prstDash val="solid"/>
+                      <a:round/>
+                      <a:headEnd type="none" w="med" len="med"/>
+                      <a:tailEnd type="none" w="med" len="med"/>
+                    </a:lnR>
+                    <a:lnT w="12700" cap="flat" cmpd="sng" algn="ctr">
+                      <a:solidFill>
+                        <a:schemeClr val="tx1"/>
+                      </a:solidFill>
+                      <a:prstDash val="solid"/>
+                      <a:round/>
+                      <a:headEnd type="none" w="med" len="med"/>
+                      <a:tailEnd type="none" w="med" len="med"/>
+                    </a:lnT>
+                    <a:lnB w="12700" cap="flat" cmpd="sng" algn="ctr">
+                      <a:solidFill>
+                        <a:schemeClr val="tx1"/>
+                      </a:solidFill>
+                      <a:prstDash val="solid"/>
+                      <a:round/>
+                      <a:headEnd type="none" w="med" len="med"/>
+                      <a:tailEnd type="none" w="med" len="med"/>
+                    </a:lnB>
+                  </a:tcPr>
+                </a:tc>
+                <a:tc>
+                  <a:txBody>
+                    <a:bodyPr/>
+                    <a:lstStyle/>
+                    <a:p>
+                      <a:pPr algn="ctr"/>
+                      <a:r>
+                        <a:rPr lang="af-ZA" sz="1000" dirty="0">
+                          <a:effectLst/>
+                        </a:rPr>
+                        <a:t>TCP</a:t>
+                      </a:r>
+                    </a:p>
+                  </a:txBody>
+                  <a:tcPr marL="55530" marR="55530" marT="27765" marB="27765" anchor="ctr">
+                    <a:lnL w="12700" cap="flat" cmpd="sng" algn="ctr">
+                      <a:solidFill>
+                        <a:schemeClr val="tx1"/>
+                      </a:solidFill>
+                      <a:prstDash val="solid"/>
+                      <a:round/>
+                      <a:headEnd type="none" w="med" len="med"/>
+                      <a:tailEnd type="none" w="med" len="med"/>
+                    </a:lnL>
+                    <a:lnR w="12700" cap="flat" cmpd="sng" algn="ctr">
+                      <a:solidFill>
+                        <a:schemeClr val="tx1"/>
+                      </a:solidFill>
+                      <a:prstDash val="solid"/>
+                      <a:round/>
+                      <a:headEnd type="none" w="med" len="med"/>
+                      <a:tailEnd type="none" w="med" len="med"/>
+                    </a:lnR>
+                    <a:lnT w="12700" cap="flat" cmpd="sng" algn="ctr">
+                      <a:solidFill>
+                        <a:schemeClr val="tx1"/>
+                      </a:solidFill>
+                      <a:prstDash val="solid"/>
+                      <a:round/>
+                      <a:headEnd type="none" w="med" len="med"/>
+                      <a:tailEnd type="none" w="med" len="med"/>
+                    </a:lnT>
+                    <a:lnB w="12700" cap="flat" cmpd="sng" algn="ctr">
+                      <a:solidFill>
+                        <a:schemeClr val="tx1"/>
+                      </a:solidFill>
+                      <a:prstDash val="solid"/>
+                      <a:round/>
+                      <a:headEnd type="none" w="med" len="med"/>
+                      <a:tailEnd type="none" w="med" len="med"/>
+                    </a:lnB>
+                  </a:tcPr>
+                </a:tc>
+                <a:tc>
+                  <a:txBody>
+                    <a:bodyPr/>
+                    <a:lstStyle/>
+                    <a:p>
+                      <a:pPr algn="l"/>
+                      <a:r>
+                        <a:rPr lang="ru-RU" sz="1000">
+                          <a:effectLst/>
+                        </a:rPr>
+                        <a:t>Протокол </a:t>
+                      </a:r>
+                      <a:r>
+                        <a:rPr lang="af-ZA" sz="1000">
+                          <a:effectLst/>
+                        </a:rPr>
+                        <a:t>HTTP</a:t>
+                      </a:r>
+                    </a:p>
+                  </a:txBody>
+                  <a:tcPr marL="55530" marR="55530" marT="27765" marB="27765" anchor="ctr">
+                    <a:lnL w="12700" cap="flat" cmpd="sng" algn="ctr">
+                      <a:solidFill>
+                        <a:schemeClr val="tx1"/>
+                      </a:solidFill>
+                      <a:prstDash val="solid"/>
+                      <a:round/>
+                      <a:headEnd type="none" w="med" len="med"/>
+                      <a:tailEnd type="none" w="med" len="med"/>
+                    </a:lnL>
+                    <a:lnR w="12700" cap="flat" cmpd="sng" algn="ctr">
+                      <a:solidFill>
+                        <a:schemeClr val="tx1"/>
+                      </a:solidFill>
+                      <a:prstDash val="solid"/>
+                      <a:round/>
+                      <a:headEnd type="none" w="med" len="med"/>
+                      <a:tailEnd type="none" w="med" len="med"/>
+                    </a:lnR>
+                    <a:lnT w="12700" cap="flat" cmpd="sng" algn="ctr">
+                      <a:solidFill>
+                        <a:schemeClr val="tx1"/>
+                      </a:solidFill>
+                      <a:prstDash val="solid"/>
+                      <a:round/>
+                      <a:headEnd type="none" w="med" len="med"/>
+                      <a:tailEnd type="none" w="med" len="med"/>
+                    </a:lnT>
+                    <a:lnB w="12700" cap="flat" cmpd="sng" algn="ctr">
+                      <a:solidFill>
+                        <a:schemeClr val="tx1"/>
+                      </a:solidFill>
+                      <a:prstDash val="solid"/>
+                      <a:round/>
+                      <a:headEnd type="none" w="med" len="med"/>
+                      <a:tailEnd type="none" w="med" len="med"/>
+                    </a:lnB>
+                  </a:tcPr>
+                </a:tc>
+                <a:extLst>
+                  <a:ext uri="{0D108BD9-81ED-4DB2-BD59-A6C34878D82A}">
+                    <a16:rowId xmlns:a16="http://schemas.microsoft.com/office/drawing/2014/main" val="1009670139"/>
+                  </a:ext>
+                </a:extLst>
+              </a:tr>
+              <a:tr h="433103">
+                <a:tc>
+                  <a:txBody>
+                    <a:bodyPr/>
+                    <a:lstStyle/>
+                    <a:p>
+                      <a:pPr algn="ctr"/>
+                      <a:r>
+                        <a:rPr lang="ru-RU" sz="1000">
+                          <a:effectLst/>
+                        </a:rPr>
+                        <a:t>110</a:t>
+                      </a:r>
+                    </a:p>
+                  </a:txBody>
+                  <a:tcPr marL="55530" marR="55530" marT="27765" marB="27765" anchor="ctr">
+                    <a:lnL w="12700" cap="flat" cmpd="sng" algn="ctr">
+                      <a:solidFill>
+                        <a:schemeClr val="tx1"/>
+                      </a:solidFill>
+                      <a:prstDash val="solid"/>
+                      <a:round/>
+                      <a:headEnd type="none" w="med" len="med"/>
+                      <a:tailEnd type="none" w="med" len="med"/>
+                    </a:lnL>
+                    <a:lnR w="12700" cap="flat" cmpd="sng" algn="ctr">
+                      <a:solidFill>
+                        <a:schemeClr val="tx1"/>
+                      </a:solidFill>
+                      <a:prstDash val="solid"/>
+                      <a:round/>
+                      <a:headEnd type="none" w="med" len="med"/>
+                      <a:tailEnd type="none" w="med" len="med"/>
+                    </a:lnR>
+                    <a:lnT w="12700" cap="flat" cmpd="sng" algn="ctr">
+                      <a:solidFill>
+                        <a:schemeClr val="tx1"/>
+                      </a:solidFill>
+                      <a:prstDash val="solid"/>
+                      <a:round/>
+                      <a:headEnd type="none" w="med" len="med"/>
+                      <a:tailEnd type="none" w="med" len="med"/>
+                    </a:lnT>
+                    <a:lnB w="12700" cap="flat" cmpd="sng" algn="ctr">
+                      <a:solidFill>
+                        <a:schemeClr val="tx1"/>
+                      </a:solidFill>
+                      <a:prstDash val="solid"/>
+                      <a:round/>
+                      <a:headEnd type="none" w="med" len="med"/>
+                      <a:tailEnd type="none" w="med" len="med"/>
+                    </a:lnB>
+                  </a:tcPr>
+                </a:tc>
+                <a:tc>
+                  <a:txBody>
+                    <a:bodyPr/>
+                    <a:lstStyle/>
+                    <a:p>
+                      <a:pPr algn="ctr"/>
+                      <a:r>
+                        <a:rPr lang="af-ZA" sz="1000" dirty="0">
+                          <a:effectLst/>
+                        </a:rPr>
+                        <a:t>TCP</a:t>
+                      </a:r>
+                    </a:p>
+                  </a:txBody>
+                  <a:tcPr marL="55530" marR="55530" marT="27765" marB="27765" anchor="ctr">
+                    <a:lnL w="12700" cap="flat" cmpd="sng" algn="ctr">
+                      <a:solidFill>
+                        <a:schemeClr val="tx1"/>
+                      </a:solidFill>
+                      <a:prstDash val="solid"/>
+                      <a:round/>
+                      <a:headEnd type="none" w="med" len="med"/>
+                      <a:tailEnd type="none" w="med" len="med"/>
+                    </a:lnL>
+                    <a:lnR w="12700" cap="flat" cmpd="sng" algn="ctr">
+                      <a:solidFill>
+                        <a:schemeClr val="tx1"/>
+                      </a:solidFill>
+                      <a:prstDash val="solid"/>
+                      <a:round/>
+                      <a:headEnd type="none" w="med" len="med"/>
+                      <a:tailEnd type="none" w="med" len="med"/>
+                    </a:lnR>
+                    <a:lnT w="12700" cap="flat" cmpd="sng" algn="ctr">
+                      <a:solidFill>
+                        <a:schemeClr val="tx1"/>
+                      </a:solidFill>
+                      <a:prstDash val="solid"/>
+                      <a:round/>
+                      <a:headEnd type="none" w="med" len="med"/>
+                      <a:tailEnd type="none" w="med" len="med"/>
+                    </a:lnT>
+                    <a:lnB w="12700" cap="flat" cmpd="sng" algn="ctr">
+                      <a:solidFill>
+                        <a:schemeClr val="tx1"/>
+                      </a:solidFill>
+                      <a:prstDash val="solid"/>
+                      <a:round/>
+                      <a:headEnd type="none" w="med" len="med"/>
+                      <a:tailEnd type="none" w="med" len="med"/>
+                    </a:lnB>
+                  </a:tcPr>
+                </a:tc>
+                <a:tc>
+                  <a:txBody>
+                    <a:bodyPr/>
+                    <a:lstStyle/>
+                    <a:p>
+                      <a:pPr algn="l"/>
+                      <a:r>
+                        <a:rPr lang="ru-RU" sz="1000" dirty="0">
+                          <a:effectLst/>
+                        </a:rPr>
+                        <a:t>Протокол почтового отделения (</a:t>
+                      </a:r>
+                      <a:r>
+                        <a:rPr lang="af-ZA" sz="1000" dirty="0">
+                          <a:effectLst/>
+                        </a:rPr>
+                        <a:t>POP3)</a:t>
+                      </a:r>
+                    </a:p>
+                  </a:txBody>
+                  <a:tcPr marL="55530" marR="55530" marT="27765" marB="27765" anchor="ctr">
+                    <a:lnL w="12700" cap="flat" cmpd="sng" algn="ctr">
+                      <a:solidFill>
+                        <a:schemeClr val="tx1"/>
+                      </a:solidFill>
+                      <a:prstDash val="solid"/>
+                      <a:round/>
+                      <a:headEnd type="none" w="med" len="med"/>
+                      <a:tailEnd type="none" w="med" len="med"/>
+                    </a:lnL>
+                    <a:lnR w="12700" cap="flat" cmpd="sng" algn="ctr">
+                      <a:solidFill>
+                        <a:schemeClr val="tx1"/>
+                      </a:solidFill>
+                      <a:prstDash val="solid"/>
+                      <a:round/>
+                      <a:headEnd type="none" w="med" len="med"/>
+                      <a:tailEnd type="none" w="med" len="med"/>
+                    </a:lnR>
+                    <a:lnT w="12700" cap="flat" cmpd="sng" algn="ctr">
+                      <a:solidFill>
+                        <a:schemeClr val="tx1"/>
+                      </a:solidFill>
+                      <a:prstDash val="solid"/>
+                      <a:round/>
+                      <a:headEnd type="none" w="med" len="med"/>
+                      <a:tailEnd type="none" w="med" len="med"/>
+                    </a:lnT>
+                    <a:lnB w="12700" cap="flat" cmpd="sng" algn="ctr">
+                      <a:solidFill>
+                        <a:schemeClr val="tx1"/>
+                      </a:solidFill>
+                      <a:prstDash val="solid"/>
+                      <a:round/>
+                      <a:headEnd type="none" w="med" len="med"/>
+                      <a:tailEnd type="none" w="med" len="med"/>
+                    </a:lnB>
+                  </a:tcPr>
+                </a:tc>
+                <a:extLst>
+                  <a:ext uri="{0D108BD9-81ED-4DB2-BD59-A6C34878D82A}">
+                    <a16:rowId xmlns:a16="http://schemas.microsoft.com/office/drawing/2014/main" val="2631980761"/>
+                  </a:ext>
+                </a:extLst>
+              </a:tr>
+              <a:tr h="248586">
+                <a:tc>
+                  <a:txBody>
+                    <a:bodyPr/>
+                    <a:lstStyle/>
+                    <a:p>
+                      <a:pPr algn="ctr"/>
+                      <a:r>
+                        <a:rPr lang="ru-RU" sz="1000">
+                          <a:effectLst/>
+                        </a:rPr>
+                        <a:t>143</a:t>
+                      </a:r>
+                    </a:p>
+                  </a:txBody>
+                  <a:tcPr marL="55530" marR="55530" marT="27765" marB="27765" anchor="ctr">
+                    <a:lnL w="12700" cap="flat" cmpd="sng" algn="ctr">
+                      <a:solidFill>
+                        <a:schemeClr val="tx1"/>
+                      </a:solidFill>
+                      <a:prstDash val="solid"/>
+                      <a:round/>
+                      <a:headEnd type="none" w="med" len="med"/>
+                      <a:tailEnd type="none" w="med" len="med"/>
+                    </a:lnL>
+                    <a:lnR w="12700" cap="flat" cmpd="sng" algn="ctr">
+                      <a:solidFill>
+                        <a:schemeClr val="tx1"/>
+                      </a:solidFill>
+                      <a:prstDash val="solid"/>
+                      <a:round/>
+                      <a:headEnd type="none" w="med" len="med"/>
+                      <a:tailEnd type="none" w="med" len="med"/>
+                    </a:lnR>
+                    <a:lnT w="12700" cap="flat" cmpd="sng" algn="ctr">
+                      <a:solidFill>
+                        <a:schemeClr val="tx1"/>
+                      </a:solidFill>
+                      <a:prstDash val="solid"/>
+                      <a:round/>
+                      <a:headEnd type="none" w="med" len="med"/>
+                      <a:tailEnd type="none" w="med" len="med"/>
+                    </a:lnT>
+                    <a:lnB w="12700" cap="flat" cmpd="sng" algn="ctr">
+                      <a:solidFill>
+                        <a:schemeClr val="tx1"/>
+                      </a:solidFill>
+                      <a:prstDash val="solid"/>
+                      <a:round/>
+                      <a:headEnd type="none" w="med" len="med"/>
+                      <a:tailEnd type="none" w="med" len="med"/>
+                    </a:lnB>
+                  </a:tcPr>
+                </a:tc>
+                <a:tc>
+                  <a:txBody>
+                    <a:bodyPr/>
+                    <a:lstStyle/>
+                    <a:p>
+                      <a:pPr algn="ctr"/>
+                      <a:r>
+                        <a:rPr lang="af-ZA" sz="1000">
+                          <a:effectLst/>
+                        </a:rPr>
+                        <a:t>TCP</a:t>
+                      </a:r>
+                    </a:p>
+                  </a:txBody>
+                  <a:tcPr marL="55530" marR="55530" marT="27765" marB="27765" anchor="ctr">
+                    <a:lnL w="12700" cap="flat" cmpd="sng" algn="ctr">
+                      <a:solidFill>
+                        <a:schemeClr val="tx1"/>
+                      </a:solidFill>
+                      <a:prstDash val="solid"/>
+                      <a:round/>
+                      <a:headEnd type="none" w="med" len="med"/>
+                      <a:tailEnd type="none" w="med" len="med"/>
+                    </a:lnL>
+                    <a:lnR w="12700" cap="flat" cmpd="sng" algn="ctr">
+                      <a:solidFill>
+                        <a:schemeClr val="tx1"/>
+                      </a:solidFill>
+                      <a:prstDash val="solid"/>
+                      <a:round/>
+                      <a:headEnd type="none" w="med" len="med"/>
+                      <a:tailEnd type="none" w="med" len="med"/>
+                    </a:lnR>
+                    <a:lnT w="12700" cap="flat" cmpd="sng" algn="ctr">
+                      <a:solidFill>
+                        <a:schemeClr val="tx1"/>
+                      </a:solidFill>
+                      <a:prstDash val="solid"/>
+                      <a:round/>
+                      <a:headEnd type="none" w="med" len="med"/>
+                      <a:tailEnd type="none" w="med" len="med"/>
+                    </a:lnT>
+                    <a:lnB w="12700" cap="flat" cmpd="sng" algn="ctr">
+                      <a:solidFill>
+                        <a:schemeClr val="tx1"/>
+                      </a:solidFill>
+                      <a:prstDash val="solid"/>
+                      <a:round/>
+                      <a:headEnd type="none" w="med" len="med"/>
+                      <a:tailEnd type="none" w="med" len="med"/>
+                    </a:lnB>
+                  </a:tcPr>
+                </a:tc>
+                <a:tc>
+                  <a:txBody>
+                    <a:bodyPr/>
+                    <a:lstStyle/>
+                    <a:p>
+                      <a:pPr algn="l"/>
+                      <a:r>
+                        <a:rPr lang="ru-RU" sz="1000" dirty="0">
+                          <a:effectLst/>
+                        </a:rPr>
+                        <a:t>Протокол </a:t>
+                      </a:r>
+                      <a:r>
+                        <a:rPr lang="af-ZA" sz="1000" dirty="0">
+                          <a:effectLst/>
+                        </a:rPr>
+                        <a:t>IMAP</a:t>
+                      </a:r>
+                    </a:p>
+                  </a:txBody>
+                  <a:tcPr marL="55530" marR="55530" marT="27765" marB="27765" anchor="ctr">
+                    <a:lnL w="12700" cap="flat" cmpd="sng" algn="ctr">
+                      <a:solidFill>
+                        <a:schemeClr val="tx1"/>
+                      </a:solidFill>
+                      <a:prstDash val="solid"/>
+                      <a:round/>
+                      <a:headEnd type="none" w="med" len="med"/>
+                      <a:tailEnd type="none" w="med" len="med"/>
+                    </a:lnL>
+                    <a:lnR w="12700" cap="flat" cmpd="sng" algn="ctr">
+                      <a:solidFill>
+                        <a:schemeClr val="tx1"/>
+                      </a:solidFill>
+                      <a:prstDash val="solid"/>
+                      <a:round/>
+                      <a:headEnd type="none" w="med" len="med"/>
+                      <a:tailEnd type="none" w="med" len="med"/>
+                    </a:lnR>
+                    <a:lnT w="12700" cap="flat" cmpd="sng" algn="ctr">
+                      <a:solidFill>
+                        <a:schemeClr val="tx1"/>
+                      </a:solidFill>
+                      <a:prstDash val="solid"/>
+                      <a:round/>
+                      <a:headEnd type="none" w="med" len="med"/>
+                      <a:tailEnd type="none" w="med" len="med"/>
+                    </a:lnT>
+                    <a:lnB w="12700" cap="flat" cmpd="sng" algn="ctr">
+                      <a:solidFill>
+                        <a:schemeClr val="tx1"/>
+                      </a:solidFill>
+                      <a:prstDash val="solid"/>
+                      <a:round/>
+                      <a:headEnd type="none" w="med" len="med"/>
+                      <a:tailEnd type="none" w="med" len="med"/>
+                    </a:lnB>
+                  </a:tcPr>
+                </a:tc>
+                <a:extLst>
+                  <a:ext uri="{0D108BD9-81ED-4DB2-BD59-A6C34878D82A}">
+                    <a16:rowId xmlns:a16="http://schemas.microsoft.com/office/drawing/2014/main" val="204775533"/>
+                  </a:ext>
+                </a:extLst>
+              </a:tr>
+              <a:tr h="248586">
+                <a:tc>
+                  <a:txBody>
+                    <a:bodyPr/>
+                    <a:lstStyle/>
+                    <a:p>
+                      <a:pPr algn="ctr"/>
+                      <a:r>
+                        <a:rPr lang="ru-RU" sz="1000">
+                          <a:effectLst/>
+                        </a:rPr>
+                        <a:t>161</a:t>
+                      </a:r>
+                    </a:p>
+                  </a:txBody>
+                  <a:tcPr marL="55530" marR="55530" marT="27765" marB="27765" anchor="ctr">
+                    <a:lnL w="12700" cap="flat" cmpd="sng" algn="ctr">
+                      <a:solidFill>
+                        <a:schemeClr val="tx1"/>
+                      </a:solidFill>
+                      <a:prstDash val="solid"/>
+                      <a:round/>
+                      <a:headEnd type="none" w="med" len="med"/>
+                      <a:tailEnd type="none" w="med" len="med"/>
+                    </a:lnL>
+                    <a:lnR w="12700" cap="flat" cmpd="sng" algn="ctr">
+                      <a:solidFill>
+                        <a:schemeClr val="tx1"/>
+                      </a:solidFill>
+                      <a:prstDash val="solid"/>
+                      <a:round/>
+                      <a:headEnd type="none" w="med" len="med"/>
+                      <a:tailEnd type="none" w="med" len="med"/>
+                    </a:lnR>
+                    <a:lnT w="12700" cap="flat" cmpd="sng" algn="ctr">
+                      <a:solidFill>
+                        <a:schemeClr val="tx1"/>
+                      </a:solidFill>
+                      <a:prstDash val="solid"/>
+                      <a:round/>
+                      <a:headEnd type="none" w="med" len="med"/>
+                      <a:tailEnd type="none" w="med" len="med"/>
+                    </a:lnT>
+                    <a:lnB w="12700" cap="flat" cmpd="sng" algn="ctr">
+                      <a:solidFill>
+                        <a:schemeClr val="tx1"/>
+                      </a:solidFill>
+                      <a:prstDash val="solid"/>
+                      <a:round/>
+                      <a:headEnd type="none" w="med" len="med"/>
+                      <a:tailEnd type="none" w="med" len="med"/>
+                    </a:lnB>
+                  </a:tcPr>
+                </a:tc>
+                <a:tc>
+                  <a:txBody>
+                    <a:bodyPr/>
+                    <a:lstStyle/>
+                    <a:p>
+                      <a:pPr algn="ctr"/>
+                      <a:r>
+                        <a:rPr lang="af-ZA" sz="1000">
+                          <a:effectLst/>
+                        </a:rPr>
+                        <a:t>UDP</a:t>
+                      </a:r>
+                    </a:p>
+                  </a:txBody>
+                  <a:tcPr marL="55530" marR="55530" marT="27765" marB="27765" anchor="ctr">
+                    <a:lnL w="12700" cap="flat" cmpd="sng" algn="ctr">
+                      <a:solidFill>
+                        <a:schemeClr val="tx1"/>
+                      </a:solidFill>
+                      <a:prstDash val="solid"/>
+                      <a:round/>
+                      <a:headEnd type="none" w="med" len="med"/>
+                      <a:tailEnd type="none" w="med" len="med"/>
+                    </a:lnL>
+                    <a:lnR w="12700" cap="flat" cmpd="sng" algn="ctr">
+                      <a:solidFill>
+                        <a:schemeClr val="tx1"/>
+                      </a:solidFill>
+                      <a:prstDash val="solid"/>
+                      <a:round/>
+                      <a:headEnd type="none" w="med" len="med"/>
+                      <a:tailEnd type="none" w="med" len="med"/>
+                    </a:lnR>
+                    <a:lnT w="12700" cap="flat" cmpd="sng" algn="ctr">
+                      <a:solidFill>
+                        <a:schemeClr val="tx1"/>
+                      </a:solidFill>
+                      <a:prstDash val="solid"/>
+                      <a:round/>
+                      <a:headEnd type="none" w="med" len="med"/>
+                      <a:tailEnd type="none" w="med" len="med"/>
+                    </a:lnT>
+                    <a:lnB w="12700" cap="flat" cmpd="sng" algn="ctr">
+                      <a:solidFill>
+                        <a:schemeClr val="tx1"/>
+                      </a:solidFill>
+                      <a:prstDash val="solid"/>
+                      <a:round/>
+                      <a:headEnd type="none" w="med" len="med"/>
+                      <a:tailEnd type="none" w="med" len="med"/>
+                    </a:lnB>
+                  </a:tcPr>
+                </a:tc>
+                <a:tc>
+                  <a:txBody>
+                    <a:bodyPr/>
+                    <a:lstStyle/>
+                    <a:p>
+                      <a:pPr algn="l"/>
+                      <a:r>
+                        <a:rPr lang="ru-RU" sz="1000" dirty="0">
+                          <a:effectLst/>
+                        </a:rPr>
+                        <a:t>Протокол </a:t>
+                      </a:r>
+                      <a:r>
+                        <a:rPr lang="af-ZA" sz="1000" dirty="0">
+                          <a:effectLst/>
+                        </a:rPr>
+                        <a:t>SNMP</a:t>
+                      </a:r>
+                    </a:p>
+                  </a:txBody>
+                  <a:tcPr marL="55530" marR="55530" marT="27765" marB="27765" anchor="ctr">
+                    <a:lnL w="12700" cap="flat" cmpd="sng" algn="ctr">
+                      <a:solidFill>
+                        <a:schemeClr val="tx1"/>
+                      </a:solidFill>
+                      <a:prstDash val="solid"/>
+                      <a:round/>
+                      <a:headEnd type="none" w="med" len="med"/>
+                      <a:tailEnd type="none" w="med" len="med"/>
+                    </a:lnL>
+                    <a:lnR w="12700" cap="flat" cmpd="sng" algn="ctr">
+                      <a:solidFill>
+                        <a:schemeClr val="tx1"/>
+                      </a:solidFill>
+                      <a:prstDash val="solid"/>
+                      <a:round/>
+                      <a:headEnd type="none" w="med" len="med"/>
+                      <a:tailEnd type="none" w="med" len="med"/>
+                    </a:lnR>
+                    <a:lnT w="12700" cap="flat" cmpd="sng" algn="ctr">
+                      <a:solidFill>
+                        <a:schemeClr val="tx1"/>
+                      </a:solidFill>
+                      <a:prstDash val="solid"/>
+                      <a:round/>
+                      <a:headEnd type="none" w="med" len="med"/>
+                      <a:tailEnd type="none" w="med" len="med"/>
+                    </a:lnT>
+                    <a:lnB w="12700" cap="flat" cmpd="sng" algn="ctr">
+                      <a:solidFill>
+                        <a:schemeClr val="tx1"/>
+                      </a:solidFill>
+                      <a:prstDash val="solid"/>
+                      <a:round/>
+                      <a:headEnd type="none" w="med" len="med"/>
+                      <a:tailEnd type="none" w="med" len="med"/>
+                    </a:lnB>
+                  </a:tcPr>
+                </a:tc>
+                <a:extLst>
+                  <a:ext uri="{0D108BD9-81ED-4DB2-BD59-A6C34878D82A}">
+                    <a16:rowId xmlns:a16="http://schemas.microsoft.com/office/drawing/2014/main" val="2528587824"/>
+                  </a:ext>
+                </a:extLst>
+              </a:tr>
+              <a:tr h="433103">
+                <a:tc>
+                  <a:txBody>
+                    <a:bodyPr/>
+                    <a:lstStyle/>
+                    <a:p>
+                      <a:pPr algn="ctr"/>
+                      <a:r>
+                        <a:rPr lang="ru-RU" sz="1000">
+                          <a:effectLst/>
+                        </a:rPr>
+                        <a:t>443</a:t>
+                      </a:r>
+                    </a:p>
+                  </a:txBody>
+                  <a:tcPr marL="55530" marR="55530" marT="27765" marB="27765" anchor="ctr">
+                    <a:lnL w="12700" cap="flat" cmpd="sng" algn="ctr">
+                      <a:solidFill>
+                        <a:schemeClr val="tx1"/>
+                      </a:solidFill>
+                      <a:prstDash val="solid"/>
+                      <a:round/>
+                      <a:headEnd type="none" w="med" len="med"/>
+                      <a:tailEnd type="none" w="med" len="med"/>
+                    </a:lnL>
+                    <a:lnR w="12700" cap="flat" cmpd="sng" algn="ctr">
+                      <a:solidFill>
+                        <a:schemeClr val="tx1"/>
+                      </a:solidFill>
+                      <a:prstDash val="solid"/>
+                      <a:round/>
+                      <a:headEnd type="none" w="med" len="med"/>
+                      <a:tailEnd type="none" w="med" len="med"/>
+                    </a:lnR>
+                    <a:lnT w="12700" cap="flat" cmpd="sng" algn="ctr">
+                      <a:solidFill>
+                        <a:schemeClr val="tx1"/>
+                      </a:solidFill>
+                      <a:prstDash val="solid"/>
+                      <a:round/>
+                      <a:headEnd type="none" w="med" len="med"/>
+                      <a:tailEnd type="none" w="med" len="med"/>
+                    </a:lnT>
+                    <a:lnB w="12700" cap="flat" cmpd="sng" algn="ctr">
+                      <a:solidFill>
+                        <a:schemeClr val="tx1"/>
+                      </a:solidFill>
+                      <a:prstDash val="solid"/>
+                      <a:round/>
+                      <a:headEnd type="none" w="med" len="med"/>
+                      <a:tailEnd type="none" w="med" len="med"/>
+                    </a:lnB>
+                  </a:tcPr>
+                </a:tc>
+                <a:tc>
+                  <a:txBody>
+                    <a:bodyPr/>
+                    <a:lstStyle/>
+                    <a:p>
+                      <a:pPr algn="ctr"/>
+                      <a:r>
+                        <a:rPr lang="af-ZA" sz="1000">
+                          <a:effectLst/>
+                        </a:rPr>
+                        <a:t>TCP</a:t>
+                      </a:r>
+                    </a:p>
+                  </a:txBody>
+                  <a:tcPr marL="55530" marR="55530" marT="27765" marB="27765" anchor="ctr">
+                    <a:lnL w="12700" cap="flat" cmpd="sng" algn="ctr">
+                      <a:solidFill>
+                        <a:schemeClr val="tx1"/>
+                      </a:solidFill>
+                      <a:prstDash val="solid"/>
+                      <a:round/>
+                      <a:headEnd type="none" w="med" len="med"/>
+                      <a:tailEnd type="none" w="med" len="med"/>
+                    </a:lnL>
+                    <a:lnR w="12700" cap="flat" cmpd="sng" algn="ctr">
+                      <a:solidFill>
+                        <a:schemeClr val="tx1"/>
+                      </a:solidFill>
+                      <a:prstDash val="solid"/>
+                      <a:round/>
+                      <a:headEnd type="none" w="med" len="med"/>
+                      <a:tailEnd type="none" w="med" len="med"/>
+                    </a:lnR>
+                    <a:lnT w="12700" cap="flat" cmpd="sng" algn="ctr">
+                      <a:solidFill>
+                        <a:schemeClr val="tx1"/>
+                      </a:solidFill>
+                      <a:prstDash val="solid"/>
+                      <a:round/>
+                      <a:headEnd type="none" w="med" len="med"/>
+                      <a:tailEnd type="none" w="med" len="med"/>
+                    </a:lnT>
+                    <a:lnB w="12700" cap="flat" cmpd="sng" algn="ctr">
+                      <a:solidFill>
+                        <a:schemeClr val="tx1"/>
+                      </a:solidFill>
+                      <a:prstDash val="solid"/>
+                      <a:round/>
+                      <a:headEnd type="none" w="med" len="med"/>
+                      <a:tailEnd type="none" w="med" len="med"/>
+                    </a:lnB>
+                  </a:tcPr>
+                </a:tc>
+                <a:tc>
+                  <a:txBody>
+                    <a:bodyPr/>
+                    <a:lstStyle/>
+                    <a:p>
+                      <a:pPr algn="l"/>
+                      <a:r>
+                        <a:rPr lang="ru-RU" sz="1000" dirty="0">
+                          <a:effectLst/>
+                        </a:rPr>
+                        <a:t>Защищённый протокол передачи гипертекста (HTTPS)</a:t>
+                      </a:r>
+                    </a:p>
+                  </a:txBody>
+                  <a:tcPr marL="55530" marR="55530" marT="27765" marB="27765" anchor="ctr">
+                    <a:lnL w="12700" cap="flat" cmpd="sng" algn="ctr">
+                      <a:solidFill>
+                        <a:schemeClr val="tx1"/>
+                      </a:solidFill>
+                      <a:prstDash val="solid"/>
+                      <a:round/>
+                      <a:headEnd type="none" w="med" len="med"/>
+                      <a:tailEnd type="none" w="med" len="med"/>
+                    </a:lnL>
+                    <a:lnR w="12700" cap="flat" cmpd="sng" algn="ctr">
+                      <a:solidFill>
+                        <a:schemeClr val="tx1"/>
+                      </a:solidFill>
+                      <a:prstDash val="solid"/>
+                      <a:round/>
+                      <a:headEnd type="none" w="med" len="med"/>
+                      <a:tailEnd type="none" w="med" len="med"/>
+                    </a:lnR>
+                    <a:lnT w="12700" cap="flat" cmpd="sng" algn="ctr">
+                      <a:solidFill>
+                        <a:schemeClr val="tx1"/>
+                      </a:solidFill>
+                      <a:prstDash val="solid"/>
+                      <a:round/>
+                      <a:headEnd type="none" w="med" len="med"/>
+                      <a:tailEnd type="none" w="med" len="med"/>
+                    </a:lnT>
+                    <a:lnB w="12700" cap="flat" cmpd="sng" algn="ctr">
+                      <a:solidFill>
+                        <a:schemeClr val="tx1"/>
+                      </a:solidFill>
+                      <a:prstDash val="solid"/>
+                      <a:round/>
+                      <a:headEnd type="none" w="med" len="med"/>
+                      <a:tailEnd type="none" w="med" len="med"/>
+                    </a:lnB>
+                  </a:tcPr>
+                </a:tc>
+                <a:extLst>
+                  <a:ext uri="{0D108BD9-81ED-4DB2-BD59-A6C34878D82A}">
+                    <a16:rowId xmlns:a16="http://schemas.microsoft.com/office/drawing/2014/main" val="1267450668"/>
+                  </a:ext>
+                </a:extLst>
+              </a:tr>
+            </a:tbl>
+          </a:graphicData>
+        </a:graphic>
+      </p:graphicFrame>
+      <p:sp>
+        <p:nvSpPr>
+          <p:cNvPr id="8" name="Rectangle 1"/>
+          <p:cNvSpPr>
+            <a:spLocks noChangeArrowheads="1"/>
+          </p:cNvSpPr>
+          <p:nvPr/>
+        </p:nvSpPr>
+        <p:spPr bwMode="auto">
+          <a:xfrm>
+            <a:off x="0" y="0"/>
+            <a:ext cx="12192000" cy="0"/>
+          </a:xfrm>
+          <a:prstGeom prst="rect">
+            <a:avLst/>
+          </a:prstGeom>
+          <a:noFill/>
+          <a:ln>
+            <a:noFill/>
+          </a:ln>
+          <a:effectLst/>
+          <a:extLst>
+            <a:ext uri="{909E8E84-426E-40DD-AFC4-6F175D3DCCD1}">
+              <a14:hiddenFill xmlns:a14="http://schemas.microsoft.com/office/drawing/2010/main">
+                <a:solidFill>
+                  <a:schemeClr val="accent1"/>
+                </a:solidFill>
+              </a14:hiddenFill>
+            </a:ext>
+            <a:ext uri="{91240B29-F687-4F45-9708-019B960494DF}">
+              <a14:hiddenLine xmlns:a14="http://schemas.microsoft.com/office/drawing/2010/main" w="9525">
+                <a:solidFill>
+                  <a:schemeClr val="tx1"/>
+                </a:solidFill>
+                <a:miter lim="800000"/>
+                <a:headEnd/>
+                <a:tailEnd/>
+              </a14:hiddenLine>
+            </a:ext>
+            <a:ext uri="{AF507438-7753-43E0-B8FC-AC1667EBCBE1}">
+              <a14:hiddenEffects xmlns:a14="http://schemas.microsoft.com/office/drawing/2010/main">
+                <a:effectLst>
+                  <a:outerShdw dist="35921" dir="2700000" algn="ctr" rotWithShape="0">
+                    <a:schemeClr val="bg2"/>
+                  </a:outerShdw>
+                </a:effectLst>
+              </a14:hiddenEffects>
+            </a:ext>
+          </a:extLst>
+        </p:spPr>
+        <p:txBody>
+          <a:bodyPr vert="horz" wrap="none" lIns="91440" tIns="45720" rIns="91440" bIns="45720" numCol="1" anchor="ctr" anchorCtr="0" compatLnSpc="1">
+            <a:prstTxWarp prst="textNoShape">
+              <a:avLst/>
+            </a:prstTxWarp>
+            <a:spAutoFit/>
+          </a:bodyPr>
+          <a:lstStyle/>
+          <a:p>
+            <a:pPr marL="0" marR="0" lvl="0" indent="0" algn="l" defTabSz="914400" rtl="0" eaLnBrk="0" fontAlgn="base" latinLnBrk="0" hangingPunct="0">
+              <a:lnSpc>
+                <a:spcPct val="100000"/>
+              </a:lnSpc>
+              <a:spcBef>
+                <a:spcPct val="0"/>
+              </a:spcBef>
+              <a:spcAft>
+                <a:spcPct val="0"/>
+              </a:spcAft>
+              <a:buClrTx/>
+              <a:buSzTx/>
+              <a:buFontTx/>
+              <a:buNone/>
+              <a:tabLst/>
+            </a:pPr>
+            <a:r>
+              <a:rPr kumimoji="0" lang="ru-RU" altLang="ru-RU" sz="1800" b="0" i="0" u="none" strike="noStrike" cap="none" normalizeH="0" baseline="0" smtClean="0">
+                <a:ln>
+                  <a:noFill/>
+                </a:ln>
+                <a:solidFill>
+                  <a:schemeClr val="tx1"/>
+                </a:solidFill>
+                <a:effectLst/>
+                <a:latin typeface="Arial" panose="020B0604020202020204" pitchFamily="34" charset="0"/>
+              </a:rPr>
+              <a:t/>
+            </a:r>
+            <a:br>
+              <a:rPr kumimoji="0" lang="ru-RU" altLang="ru-RU" sz="1800" b="0" i="0" u="none" strike="noStrike" cap="none" normalizeH="0" baseline="0" smtClean="0">
+                <a:ln>
+                  <a:noFill/>
+                </a:ln>
+                <a:solidFill>
+                  <a:schemeClr val="tx1"/>
+                </a:solidFill>
+                <a:effectLst/>
+                <a:latin typeface="Arial" panose="020B0604020202020204" pitchFamily="34" charset="0"/>
+              </a:rPr>
+            </a:br>
+            <a:endParaRPr kumimoji="0" lang="ru-RU" altLang="ru-RU" sz="1800" b="0" i="0" u="none" strike="noStrike" cap="none" normalizeH="0" baseline="0" smtClean="0">
+              <a:ln>
+                <a:noFill/>
+              </a:ln>
+              <a:solidFill>
+                <a:schemeClr val="tx1"/>
+              </a:solidFill>
+              <a:effectLst/>
+              <a:latin typeface="Arial" panose="020B0604020202020204" pitchFamily="34" charset="0"/>
+            </a:endParaRPr>
+          </a:p>
+        </p:txBody>
+      </p:sp>
+    </p:spTree>
+    <p:extLst>
+      <p:ext uri="{BB962C8B-B14F-4D97-AF65-F5344CB8AC3E}">
+        <p14:creationId xmlns:p14="http://schemas.microsoft.com/office/powerpoint/2010/main" val="3393494333"/>
+      </p:ext>
+    </p:extLst>
+  </p:cSld>
+  <p:clrMapOvr>
+    <a:masterClrMapping/>
+  </p:clrMapOvr>
+</p:sld>
+</file>
+
+<file path=ppt/slides/slide9.xml><?xml version="1.0" encoding="utf-8"?>
+<p:sld xmlns:a="http://schemas.openxmlformats.org/drawingml/2006/main" xmlns:r="http://schemas.openxmlformats.org/officeDocument/2006/relationships" xmlns:p="http://schemas.openxmlformats.org/presentationml/2006/main">
+  <p:cSld>
+    <p:spTree>
+      <p:nvGrpSpPr>
+        <p:cNvPr id="1" name=""/>
+        <p:cNvGrpSpPr/>
+        <p:nvPr/>
+      </p:nvGrpSpPr>
+      <p:grpSpPr>
+        <a:xfrm>
+          <a:off x="0" y="0"/>
+          <a:ext cx="0" cy="0"/>
+          <a:chOff x="0" y="0"/>
+          <a:chExt cx="0" cy="0"/>
+        </a:xfrm>
+      </p:grpSpPr>
+      <p:sp>
+        <p:nvSpPr>
+          <p:cNvPr id="2" name="Заголовок 1"/>
+          <p:cNvSpPr>
+            <a:spLocks noGrp="1"/>
+          </p:cNvSpPr>
+          <p:nvPr>
+            <p:ph type="title"/>
+          </p:nvPr>
+        </p:nvSpPr>
+        <p:spPr/>
+        <p:txBody>
+          <a:bodyPr/>
+          <a:lstStyle/>
+          <a:p>
+            <a:r>
+              <a:rPr lang="en-US" b="1" dirty="0" smtClean="0"/>
+              <a:t>TCP. </a:t>
+            </a:r>
+            <a:r>
+              <a:rPr lang="ru-RU" b="1" dirty="0" smtClean="0"/>
+              <a:t>Установление соединения</a:t>
+            </a:r>
+            <a:endParaRPr lang="ru-RU" b="1" dirty="0"/>
+          </a:p>
+        </p:txBody>
+      </p:sp>
+      <p:pic>
+        <p:nvPicPr>
+          <p:cNvPr id="4" name="Объект 3"/>
+          <p:cNvPicPr>
+            <a:picLocks noGrp="1" noChangeAspect="1"/>
+          </p:cNvPicPr>
+          <p:nvPr>
+            <p:ph sz="half" idx="1"/>
+          </p:nvPr>
+        </p:nvPicPr>
+        <p:blipFill>
+          <a:blip r:embed="rId2"/>
+          <a:stretch>
+            <a:fillRect/>
+          </a:stretch>
+        </p:blipFill>
+        <p:spPr>
+          <a:xfrm>
+            <a:off x="101773" y="2409092"/>
+            <a:ext cx="5994227" cy="3160400"/>
+          </a:xfrm>
+          <a:prstGeom prst="rect">
+            <a:avLst/>
+          </a:prstGeom>
+        </p:spPr>
+      </p:pic>
+      <p:sp>
+        <p:nvSpPr>
+          <p:cNvPr id="5" name="Объект 4"/>
+          <p:cNvSpPr>
+            <a:spLocks noGrp="1"/>
+          </p:cNvSpPr>
+          <p:nvPr>
+            <p:ph sz="half" idx="2"/>
+          </p:nvPr>
+        </p:nvSpPr>
+        <p:spPr/>
+        <p:txBody>
+          <a:bodyPr>
+            <a:normAutofit fontScale="92500" lnSpcReduction="10000"/>
+          </a:bodyPr>
+          <a:lstStyle/>
+          <a:p>
+            <a:pPr marL="0" indent="0">
+              <a:buNone/>
+            </a:pPr>
+            <a:r>
+              <a:rPr lang="ru-RU" dirty="0" smtClean="0"/>
+              <a:t>Трехэтапное рукопожатие:</a:t>
+            </a:r>
+          </a:p>
+          <a:p>
+            <a:pPr marL="514350" indent="-514350">
+              <a:buFont typeface="+mj-lt"/>
+              <a:buAutoNum type="arabicPeriod"/>
+            </a:pPr>
+            <a:r>
+              <a:rPr lang="ru-RU" dirty="0" smtClean="0"/>
+              <a:t>Клиент запрашивает соединение отправляя</a:t>
+            </a:r>
+            <a:r>
+              <a:rPr lang="en-US" dirty="0" smtClean="0"/>
+              <a:t> </a:t>
+            </a:r>
+            <a:r>
+              <a:rPr lang="ru-RU" dirty="0" smtClean="0"/>
+              <a:t>сегмент с флагом </a:t>
+            </a:r>
+            <a:r>
+              <a:rPr lang="en-US" dirty="0" smtClean="0"/>
+              <a:t>SYN </a:t>
+            </a:r>
+            <a:r>
+              <a:rPr lang="ru-RU" dirty="0" smtClean="0"/>
+              <a:t>и свой </a:t>
+            </a:r>
+            <a:r>
+              <a:rPr lang="en-US" dirty="0" smtClean="0"/>
+              <a:t>ISN.</a:t>
+            </a:r>
+            <a:endParaRPr lang="ru-RU" dirty="0" smtClean="0"/>
+          </a:p>
+          <a:p>
+            <a:pPr marL="514350" indent="-514350">
+              <a:buFont typeface="+mj-lt"/>
+              <a:buAutoNum type="arabicPeriod"/>
+            </a:pPr>
+            <a:r>
+              <a:rPr lang="ru-RU" dirty="0" smtClean="0"/>
+              <a:t>Сервер подтверждает сеанс сегментов с флагами </a:t>
+            </a:r>
+            <a:r>
+              <a:rPr lang="en-US" dirty="0" smtClean="0"/>
+              <a:t>SYN, ACK</a:t>
+            </a:r>
+            <a:r>
+              <a:rPr lang="ru-RU" dirty="0" smtClean="0"/>
+              <a:t>. </a:t>
+            </a:r>
+            <a:r>
+              <a:rPr lang="en-US" dirty="0" smtClean="0"/>
+              <a:t>ACK </a:t>
+            </a:r>
+            <a:r>
+              <a:rPr lang="en-US" dirty="0" err="1" smtClean="0"/>
+              <a:t>Num</a:t>
+            </a:r>
+            <a:r>
+              <a:rPr lang="en-US" dirty="0" smtClean="0"/>
+              <a:t> = ISN+1 </a:t>
+            </a:r>
+            <a:r>
+              <a:rPr lang="ru-RU" dirty="0" smtClean="0"/>
+              <a:t>и свой </a:t>
+            </a:r>
+            <a:r>
+              <a:rPr lang="en-US" dirty="0" smtClean="0"/>
+              <a:t>ISN.</a:t>
+            </a:r>
+            <a:endParaRPr lang="ru-RU" dirty="0" smtClean="0"/>
+          </a:p>
+          <a:p>
+            <a:pPr marL="514350" indent="-514350">
+              <a:buFont typeface="+mj-lt"/>
+              <a:buAutoNum type="arabicPeriod"/>
+            </a:pPr>
+            <a:r>
+              <a:rPr lang="ru-RU" dirty="0" smtClean="0"/>
+              <a:t>Клиент завершает установление сеанса сегментом с флагом </a:t>
+            </a:r>
+            <a:r>
+              <a:rPr lang="en-US" dirty="0" smtClean="0"/>
+              <a:t>ACK </a:t>
+            </a:r>
+            <a:r>
+              <a:rPr lang="ru-RU" dirty="0" smtClean="0"/>
+              <a:t>и </a:t>
+            </a:r>
+            <a:r>
+              <a:rPr lang="en-US" dirty="0" smtClean="0"/>
+              <a:t>ACK </a:t>
+            </a:r>
+            <a:r>
+              <a:rPr lang="en-US" dirty="0" err="1" smtClean="0"/>
+              <a:t>Num</a:t>
+            </a:r>
+            <a:r>
+              <a:rPr lang="en-US" dirty="0" smtClean="0"/>
+              <a:t>=Server ISN+1</a:t>
+            </a:r>
+          </a:p>
+          <a:p>
+            <a:pPr marL="514350" indent="-514350">
+              <a:buFont typeface="+mj-lt"/>
+              <a:buAutoNum type="arabicPeriod"/>
+            </a:pPr>
+            <a:endParaRPr lang="ru-RU" dirty="0"/>
+          </a:p>
+        </p:txBody>
+      </p:sp>
+    </p:spTree>
+    <p:extLst>
+      <p:ext uri="{BB962C8B-B14F-4D97-AF65-F5344CB8AC3E}">
+        <p14:creationId xmlns:p14="http://schemas.microsoft.com/office/powerpoint/2010/main" val="873284296"/>
       </p:ext>
     </p:extLst>
   </p:cSld>

--- a/1.8 Transport Layer/1.8 Transport Layer.pptx
+++ b/1.8 Transport Layer/1.8 Transport Layer.pptx
@@ -281,7 +281,7 @@
           <a:p>
             <a:fld id="{F3DF6F99-26EF-44A0-AB0C-04C766CF99AB}" type="datetimeFigureOut">
               <a:rPr lang="ru-RU" smtClean="0"/>
-              <a:t>06.09.2026</a:t>
+              <a:t>28.09.2026</a:t>
             </a:fld>
             <a:endParaRPr lang="ru-RU"/>
           </a:p>
@@ -451,7 +451,7 @@
           <a:p>
             <a:fld id="{F3DF6F99-26EF-44A0-AB0C-04C766CF99AB}" type="datetimeFigureOut">
               <a:rPr lang="ru-RU" smtClean="0"/>
-              <a:t>06.09.2026</a:t>
+              <a:t>28.09.2026</a:t>
             </a:fld>
             <a:endParaRPr lang="ru-RU"/>
           </a:p>
@@ -631,7 +631,7 @@
           <a:p>
             <a:fld id="{F3DF6F99-26EF-44A0-AB0C-04C766CF99AB}" type="datetimeFigureOut">
               <a:rPr lang="ru-RU" smtClean="0"/>
-              <a:t>06.09.2026</a:t>
+              <a:t>28.09.2026</a:t>
             </a:fld>
             <a:endParaRPr lang="ru-RU"/>
           </a:p>
@@ -801,7 +801,7 @@
           <a:p>
             <a:fld id="{F3DF6F99-26EF-44A0-AB0C-04C766CF99AB}" type="datetimeFigureOut">
               <a:rPr lang="ru-RU" smtClean="0"/>
-              <a:t>06.09.2026</a:t>
+              <a:t>28.09.2026</a:t>
             </a:fld>
             <a:endParaRPr lang="ru-RU"/>
           </a:p>
@@ -1047,7 +1047,7 @@
           <a:p>
             <a:fld id="{F3DF6F99-26EF-44A0-AB0C-04C766CF99AB}" type="datetimeFigureOut">
               <a:rPr lang="ru-RU" smtClean="0"/>
-              <a:t>06.09.2026</a:t>
+              <a:t>28.09.2026</a:t>
             </a:fld>
             <a:endParaRPr lang="ru-RU"/>
           </a:p>
@@ -1279,7 +1279,7 @@
           <a:p>
             <a:fld id="{F3DF6F99-26EF-44A0-AB0C-04C766CF99AB}" type="datetimeFigureOut">
               <a:rPr lang="ru-RU" smtClean="0"/>
-              <a:t>06.09.2026</a:t>
+              <a:t>28.09.2026</a:t>
             </a:fld>
             <a:endParaRPr lang="ru-RU"/>
           </a:p>
@@ -1646,7 +1646,7 @@
           <a:p>
             <a:fld id="{F3DF6F99-26EF-44A0-AB0C-04C766CF99AB}" type="datetimeFigureOut">
               <a:rPr lang="ru-RU" smtClean="0"/>
-              <a:t>06.09.2026</a:t>
+              <a:t>28.09.2026</a:t>
             </a:fld>
             <a:endParaRPr lang="ru-RU"/>
           </a:p>
@@ -1764,7 +1764,7 @@
           <a:p>
             <a:fld id="{F3DF6F99-26EF-44A0-AB0C-04C766CF99AB}" type="datetimeFigureOut">
               <a:rPr lang="ru-RU" smtClean="0"/>
-              <a:t>06.09.2026</a:t>
+              <a:t>28.09.2026</a:t>
             </a:fld>
             <a:endParaRPr lang="ru-RU"/>
           </a:p>
@@ -1859,7 +1859,7 @@
           <a:p>
             <a:fld id="{F3DF6F99-26EF-44A0-AB0C-04C766CF99AB}" type="datetimeFigureOut">
               <a:rPr lang="ru-RU" smtClean="0"/>
-              <a:t>06.09.2026</a:t>
+              <a:t>28.09.2026</a:t>
             </a:fld>
             <a:endParaRPr lang="ru-RU"/>
           </a:p>
@@ -2136,7 +2136,7 @@
           <a:p>
             <a:fld id="{F3DF6F99-26EF-44A0-AB0C-04C766CF99AB}" type="datetimeFigureOut">
               <a:rPr lang="ru-RU" smtClean="0"/>
-              <a:t>06.09.2026</a:t>
+              <a:t>28.09.2026</a:t>
             </a:fld>
             <a:endParaRPr lang="ru-RU"/>
           </a:p>
@@ -2389,7 +2389,7 @@
           <a:p>
             <a:fld id="{F3DF6F99-26EF-44A0-AB0C-04C766CF99AB}" type="datetimeFigureOut">
               <a:rPr lang="ru-RU" smtClean="0"/>
-              <a:t>06.09.2026</a:t>
+              <a:t>28.09.2026</a:t>
             </a:fld>
             <a:endParaRPr lang="ru-RU"/>
           </a:p>
@@ -2602,7 +2602,7 @@
           <a:p>
             <a:fld id="{F3DF6F99-26EF-44A0-AB0C-04C766CF99AB}" type="datetimeFigureOut">
               <a:rPr lang="ru-RU" smtClean="0"/>
-              <a:t>06.09.2026</a:t>
+              <a:t>28.09.2026</a:t>
             </a:fld>
             <a:endParaRPr lang="ru-RU"/>
           </a:p>
@@ -3044,6 +3044,13 @@
   <p:clrMapOvr>
     <a:masterClrMapping/>
   </p:clrMapOvr>
+  <p:timing>
+    <p:tnLst>
+      <p:par>
+        <p:cTn id="1" dur="indefinite" restart="never" nodeType="tmRoot"/>
+      </p:par>
+    </p:tnLst>
+  </p:timing>
 </p:sld>
 </file>
 
@@ -3207,6 +3214,13 @@
   <p:clrMapOvr>
     <a:masterClrMapping/>
   </p:clrMapOvr>
+  <p:timing>
+    <p:tnLst>
+      <p:par>
+        <p:cTn id="1" dur="indefinite" restart="never" nodeType="tmRoot"/>
+      </p:par>
+    </p:tnLst>
+  </p:timing>
 </p:sld>
 </file>
 
@@ -3297,6 +3311,13 @@
   <p:clrMapOvr>
     <a:masterClrMapping/>
   </p:clrMapOvr>
+  <p:timing>
+    <p:tnLst>
+      <p:par>
+        <p:cTn id="1" dur="indefinite" restart="never" nodeType="tmRoot"/>
+      </p:par>
+    </p:tnLst>
+  </p:timing>
 </p:sld>
 </file>
 
@@ -3387,6 +3408,13 @@
   <p:clrMapOvr>
     <a:masterClrMapping/>
   </p:clrMapOvr>
+  <p:timing>
+    <p:tnLst>
+      <p:par>
+        <p:cTn id="1" dur="indefinite" restart="never" nodeType="tmRoot"/>
+      </p:par>
+    </p:tnLst>
+  </p:timing>
 </p:sld>
 </file>
 
@@ -3527,7 +3555,6 @@
               <a:rPr lang="ru-RU" dirty="0"/>
               <a:t>объем неподтвержденных данных в канале</a:t>
             </a:r>
-            <a:endParaRPr lang="ru-RU" dirty="0"/>
           </a:p>
         </p:txBody>
       </p:sp>
@@ -3541,6 +3568,13 @@
   <p:clrMapOvr>
     <a:masterClrMapping/>
   </p:clrMapOvr>
+  <p:timing>
+    <p:tnLst>
+      <p:par>
+        <p:cTn id="1" dur="indefinite" restart="never" nodeType="tmRoot"/>
+      </p:par>
+    </p:tnLst>
+  </p:timing>
 </p:sld>
 </file>
 
@@ -3609,7 +3643,7 @@
         </p:blipFill>
         <p:spPr>
           <a:xfrm>
-            <a:off x="2949903" y="1547653"/>
+            <a:off x="5798610" y="1503691"/>
             <a:ext cx="6292194" cy="5033756"/>
           </a:xfrm>
           <a:prstGeom prst="rect">
@@ -3617,6 +3651,55 @@
           </a:prstGeom>
         </p:spPr>
       </p:pic>
+      <p:sp>
+        <p:nvSpPr>
+          <p:cNvPr id="3" name="Прямоугольник 2"/>
+          <p:cNvSpPr/>
+          <p:nvPr/>
+        </p:nvSpPr>
+        <p:spPr>
+          <a:xfrm>
+            <a:off x="310660" y="2344352"/>
+            <a:ext cx="5646211" cy="3108543"/>
+          </a:xfrm>
+          <a:prstGeom prst="rect">
+            <a:avLst/>
+          </a:prstGeom>
+        </p:spPr>
+        <p:txBody>
+          <a:bodyPr wrap="square">
+            <a:spAutoFit/>
+          </a:bodyPr>
+          <a:lstStyle/>
+          <a:p>
+            <a:r>
+              <a:rPr lang="ru-RU" sz="2800" dirty="0">
+                <a:latin typeface="Google Sans"/>
+              </a:rPr>
+              <a:t>Алгоритм скользящего </a:t>
+            </a:r>
+            <a:r>
+              <a:rPr lang="ru-RU" sz="2800" dirty="0" smtClean="0">
+                <a:latin typeface="Google Sans"/>
+              </a:rPr>
+              <a:t>окна — </a:t>
+            </a:r>
+            <a:r>
+              <a:rPr lang="ru-RU" sz="2800" dirty="0">
+                <a:latin typeface="Google Sans"/>
+              </a:rPr>
+              <a:t>это метод управления потоком данных, который позволяет передавать несколько пакетов подряд без ожидания подтверждения для каждого из </a:t>
+            </a:r>
+            <a:r>
+              <a:rPr lang="ru-RU" sz="2800" dirty="0" smtClean="0">
+                <a:latin typeface="Google Sans"/>
+              </a:rPr>
+              <a:t>них.</a:t>
+            </a:r>
+            <a:endParaRPr lang="ru-RU" sz="2800" dirty="0"/>
+          </a:p>
+        </p:txBody>
+      </p:sp>
     </p:spTree>
     <p:extLst>
       <p:ext uri="{BB962C8B-B14F-4D97-AF65-F5344CB8AC3E}">
@@ -3627,6 +3710,13 @@
   <p:clrMapOvr>
     <a:masterClrMapping/>
   </p:clrMapOvr>
+  <p:timing>
+    <p:tnLst>
+      <p:par>
+        <p:cTn id="1" dur="indefinite" restart="never" nodeType="tmRoot"/>
+      </p:par>
+    </p:tnLst>
+  </p:timing>
 </p:sld>
 </file>
 
@@ -3896,6 +3986,13 @@
   <p:clrMapOvr>
     <a:masterClrMapping/>
   </p:clrMapOvr>
+  <p:timing>
+    <p:tnLst>
+      <p:par>
+        <p:cTn id="1" dur="indefinite" restart="never" nodeType="tmRoot"/>
+      </p:par>
+    </p:tnLst>
+  </p:timing>
 </p:sld>
 </file>
 
@@ -4093,6 +4190,13 @@
   <p:clrMapOvr>
     <a:masterClrMapping/>
   </p:clrMapOvr>
+  <p:timing>
+    <p:tnLst>
+      <p:par>
+        <p:cTn id="1" dur="indefinite" restart="never" nodeType="tmRoot"/>
+      </p:par>
+    </p:tnLst>
+  </p:timing>
 </p:sld>
 </file>
 
@@ -4169,7 +4273,7 @@
         </p:blipFill>
         <p:spPr>
           <a:xfrm>
-            <a:off x="3147688" y="1009417"/>
+            <a:off x="5776588" y="1009417"/>
             <a:ext cx="5632856" cy="5848583"/>
           </a:xfrm>
           <a:prstGeom prst="rect">
@@ -4177,6 +4281,36 @@
           </a:prstGeom>
         </p:spPr>
       </p:pic>
+      <p:sp>
+        <p:nvSpPr>
+          <p:cNvPr id="2" name="TextBox 1"/>
+          <p:cNvSpPr txBox="1"/>
+          <p:nvPr/>
+        </p:nvSpPr>
+        <p:spPr>
+          <a:xfrm>
+            <a:off x="290146" y="2769577"/>
+            <a:ext cx="5161084" cy="1815882"/>
+          </a:xfrm>
+          <a:prstGeom prst="rect">
+            <a:avLst/>
+          </a:prstGeom>
+          <a:noFill/>
+        </p:spPr>
+        <p:txBody>
+          <a:bodyPr wrap="square" rtlCol="0">
+            <a:spAutoFit/>
+          </a:bodyPr>
+          <a:lstStyle/>
+          <a:p>
+            <a:r>
+              <a:rPr lang="ru-RU" sz="2800" dirty="0" smtClean="0"/>
+              <a:t>Кумулятивное подтверждение – номер в квитанции означает, что все данные до этого номера также успешно получены.</a:t>
+            </a:r>
+            <a:endParaRPr lang="ru-RU" sz="2800" dirty="0"/>
+          </a:p>
+        </p:txBody>
+      </p:sp>
     </p:spTree>
     <p:extLst>
       <p:ext uri="{BB962C8B-B14F-4D97-AF65-F5344CB8AC3E}">
@@ -4187,6 +4321,13 @@
   <p:clrMapOvr>
     <a:masterClrMapping/>
   </p:clrMapOvr>
+  <p:timing>
+    <p:tnLst>
+      <p:par>
+        <p:cTn id="1" dur="indefinite" restart="never" nodeType="tmRoot"/>
+      </p:par>
+    </p:tnLst>
+  </p:timing>
 </p:sld>
 </file>
 
@@ -4272,8 +4413,8 @@
         </p:nvSpPr>
         <p:spPr>
           <a:xfrm>
-            <a:off x="6172200" y="2478636"/>
-            <a:ext cx="5181600" cy="3045313"/>
+            <a:off x="6172199" y="2478636"/>
+            <a:ext cx="5794131" cy="2691241"/>
           </a:xfrm>
         </p:spPr>
         <p:txBody>
@@ -4323,6 +4464,13 @@
   <p:clrMapOvr>
     <a:masterClrMapping/>
   </p:clrMapOvr>
+  <p:timing>
+    <p:tnLst>
+      <p:par>
+        <p:cTn id="1" dur="indefinite" restart="never" nodeType="tmRoot"/>
+      </p:par>
+    </p:tnLst>
+  </p:timing>
 </p:sld>
 </file>
 
@@ -4442,11 +4590,11 @@
             </a:pPr>
             <a:r>
               <a:rPr lang="ru-RU" b="1" i="1" dirty="0" smtClean="0"/>
-              <a:t>Начальный </a:t>
-            </a:r>
-            <a:r>
-              <a:rPr lang="ru-RU" b="1" i="1" dirty="0"/>
-              <a:t>номер байта</a:t>
+              <a:t>Н</a:t>
+            </a:r>
+            <a:r>
+              <a:rPr lang="ru-RU" b="1" i="1" dirty="0" smtClean="0"/>
+              <a:t>ачальный последовательный номер</a:t>
             </a:r>
             <a:r>
               <a:rPr lang="ru-RU" b="1" dirty="0"/>
@@ -4552,6 +4700,13 @@
   <p:clrMapOvr>
     <a:masterClrMapping/>
   </p:clrMapOvr>
+  <p:timing>
+    <p:tnLst>
+      <p:par>
+        <p:cTn id="1" dur="indefinite" restart="never" nodeType="tmRoot"/>
+      </p:par>
+    </p:tnLst>
+  </p:timing>
 </p:sld>
 </file>
 
@@ -4753,6 +4908,13 @@
   <p:clrMapOvr>
     <a:masterClrMapping/>
   </p:clrMapOvr>
+  <p:timing>
+    <p:tnLst>
+      <p:par>
+        <p:cTn id="1" dur="indefinite" restart="never" nodeType="tmRoot"/>
+      </p:par>
+    </p:tnLst>
+  </p:timing>
 </p:sld>
 </file>
 
@@ -4836,6 +4998,13 @@
   <p:clrMapOvr>
     <a:masterClrMapping/>
   </p:clrMapOvr>
+  <p:timing>
+    <p:tnLst>
+      <p:par>
+        <p:cTn id="1" dur="indefinite" restart="never" nodeType="tmRoot"/>
+      </p:par>
+    </p:tnLst>
+  </p:timing>
 </p:sld>
 </file>
 
@@ -4924,6 +5093,13 @@
   <p:clrMapOvr>
     <a:masterClrMapping/>
   </p:clrMapOvr>
+  <p:timing>
+    <p:tnLst>
+      <p:par>
+        <p:cTn id="1" dur="indefinite" restart="never" nodeType="tmRoot"/>
+      </p:par>
+    </p:tnLst>
+  </p:timing>
 </p:sld>
 </file>
 
@@ -4980,6 +5156,13 @@
   <p:clrMapOvr>
     <a:masterClrMapping/>
   </p:clrMapOvr>
+  <p:timing>
+    <p:tnLst>
+      <p:par>
+        <p:cTn id="1" dur="indefinite" restart="never" nodeType="tmRoot"/>
+      </p:par>
+    </p:tnLst>
+  </p:timing>
 </p:sld>
 </file>
 
@@ -5319,6 +5502,13 @@
   <p:clrMapOvr>
     <a:masterClrMapping/>
   </p:clrMapOvr>
+  <p:timing>
+    <p:tnLst>
+      <p:par>
+        <p:cTn id="1" dur="indefinite" restart="never" nodeType="tmRoot"/>
+      </p:par>
+    </p:tnLst>
+  </p:timing>
 </p:sld>
 </file>
 
@@ -5448,6 +5638,13 @@
   <p:clrMapOvr>
     <a:masterClrMapping/>
   </p:clrMapOvr>
+  <p:timing>
+    <p:tnLst>
+      <p:par>
+        <p:cTn id="1" dur="indefinite" restart="never" nodeType="tmRoot"/>
+      </p:par>
+    </p:tnLst>
+  </p:timing>
 </p:sld>
 </file>
 
@@ -5527,6 +5724,13 @@
   <p:clrMapOvr>
     <a:masterClrMapping/>
   </p:clrMapOvr>
+  <p:timing>
+    <p:tnLst>
+      <p:par>
+        <p:cTn id="1" dur="indefinite" restart="never" nodeType="tmRoot"/>
+      </p:par>
+    </p:tnLst>
+  </p:timing>
 </p:sld>
 </file>
 
@@ -5696,6 +5900,13 @@
   <p:clrMapOvr>
     <a:masterClrMapping/>
   </p:clrMapOvr>
+  <p:timing>
+    <p:tnLst>
+      <p:par>
+        <p:cTn id="1" dur="indefinite" restart="never" nodeType="tmRoot"/>
+      </p:par>
+    </p:tnLst>
+  </p:timing>
 </p:sld>
 </file>
 
@@ -5816,6 +6027,13 @@
   <p:clrMapOvr>
     <a:masterClrMapping/>
   </p:clrMapOvr>
+  <p:timing>
+    <p:tnLst>
+      <p:par>
+        <p:cTn id="1" dur="indefinite" restart="never" nodeType="tmRoot"/>
+      </p:par>
+    </p:tnLst>
+  </p:timing>
 </p:sld>
 </file>
 
@@ -5895,6 +6113,13 @@
   <p:clrMapOvr>
     <a:masterClrMapping/>
   </p:clrMapOvr>
+  <p:timing>
+    <p:tnLst>
+      <p:par>
+        <p:cTn id="1" dur="indefinite" restart="never" nodeType="tmRoot"/>
+      </p:par>
+    </p:tnLst>
+  </p:timing>
 </p:sld>
 </file>
 
@@ -6024,6 +6249,13 @@
   <p:clrMapOvr>
     <a:masterClrMapping/>
   </p:clrMapOvr>
+  <p:timing>
+    <p:tnLst>
+      <p:par>
+        <p:cTn id="1" dur="indefinite" restart="never" nodeType="tmRoot"/>
+      </p:par>
+    </p:tnLst>
+  </p:timing>
 </p:sld>
 </file>
 
@@ -6533,6 +6765,13 @@
   <p:clrMapOvr>
     <a:masterClrMapping/>
   </p:clrMapOvr>
+  <p:timing>
+    <p:tnLst>
+      <p:par>
+        <p:cTn id="1" dur="indefinite" restart="never" nodeType="tmRoot"/>
+      </p:par>
+    </p:tnLst>
+  </p:timing>
 </p:sld>
 </file>
 
@@ -6709,7 +6948,6 @@
               <a:rPr lang="ru-RU" dirty="0"/>
               <a:t> идентифицирует конкретное соединение</a:t>
             </a:r>
-            <a:endParaRPr lang="ru-RU" dirty="0"/>
           </a:p>
         </p:txBody>
       </p:sp>
@@ -6723,6 +6961,13 @@
   <p:clrMapOvr>
     <a:masterClrMapping/>
   </p:clrMapOvr>
+  <p:timing>
+    <p:tnLst>
+      <p:par>
+        <p:cTn id="1" dur="indefinite" restart="never" nodeType="tmRoot"/>
+      </p:par>
+    </p:tnLst>
+  </p:timing>
 </p:sld>
 </file>
 
@@ -9495,6 +9740,13 @@
   <p:clrMapOvr>
     <a:masterClrMapping/>
   </p:clrMapOvr>
+  <p:timing>
+    <p:tnLst>
+      <p:par>
+        <p:cTn id="1" dur="indefinite" restart="never" nodeType="tmRoot"/>
+      </p:par>
+    </p:tnLst>
+  </p:timing>
 </p:sld>
 </file>
 
@@ -9712,6 +9964,13 @@
   <p:clrMapOvr>
     <a:masterClrMapping/>
   </p:clrMapOvr>
+  <p:timing>
+    <p:tnLst>
+      <p:par>
+        <p:cTn id="1" dur="indefinite" restart="never" nodeType="tmRoot"/>
+      </p:par>
+    </p:tnLst>
+  </p:timing>
 </p:sld>
 </file>
 

--- a/1.8 Transport Layer/1.8 Transport Layer.pptx
+++ b/1.8 Transport Layer/1.8 Transport Layer.pptx
@@ -32,7 +32,8 @@
     <p:sldId id="281" r:id="rId26"/>
     <p:sldId id="282" r:id="rId27"/>
     <p:sldId id="283" r:id="rId28"/>
-    <p:sldId id="278" r:id="rId29"/>
+    <p:sldId id="284" r:id="rId29"/>
+    <p:sldId id="278" r:id="rId30"/>
   </p:sldIdLst>
   <p:sldSz cx="12192000" cy="6858000"/>
   <p:notesSz cx="6858000" cy="9144000"/>
@@ -281,7 +282,7 @@
           <a:p>
             <a:fld id="{F3DF6F99-26EF-44A0-AB0C-04C766CF99AB}" type="datetimeFigureOut">
               <a:rPr lang="ru-RU" smtClean="0"/>
-              <a:t>28.09.2026</a:t>
+              <a:t>02.10.2026</a:t>
             </a:fld>
             <a:endParaRPr lang="ru-RU"/>
           </a:p>
@@ -451,7 +452,7 @@
           <a:p>
             <a:fld id="{F3DF6F99-26EF-44A0-AB0C-04C766CF99AB}" type="datetimeFigureOut">
               <a:rPr lang="ru-RU" smtClean="0"/>
-              <a:t>28.09.2026</a:t>
+              <a:t>02.10.2026</a:t>
             </a:fld>
             <a:endParaRPr lang="ru-RU"/>
           </a:p>
@@ -631,7 +632,7 @@
           <a:p>
             <a:fld id="{F3DF6F99-26EF-44A0-AB0C-04C766CF99AB}" type="datetimeFigureOut">
               <a:rPr lang="ru-RU" smtClean="0"/>
-              <a:t>28.09.2026</a:t>
+              <a:t>02.10.2026</a:t>
             </a:fld>
             <a:endParaRPr lang="ru-RU"/>
           </a:p>
@@ -801,7 +802,7 @@
           <a:p>
             <a:fld id="{F3DF6F99-26EF-44A0-AB0C-04C766CF99AB}" type="datetimeFigureOut">
               <a:rPr lang="ru-RU" smtClean="0"/>
-              <a:t>28.09.2026</a:t>
+              <a:t>02.10.2026</a:t>
             </a:fld>
             <a:endParaRPr lang="ru-RU"/>
           </a:p>
@@ -1047,7 +1048,7 @@
           <a:p>
             <a:fld id="{F3DF6F99-26EF-44A0-AB0C-04C766CF99AB}" type="datetimeFigureOut">
               <a:rPr lang="ru-RU" smtClean="0"/>
-              <a:t>28.09.2026</a:t>
+              <a:t>02.10.2026</a:t>
             </a:fld>
             <a:endParaRPr lang="ru-RU"/>
           </a:p>
@@ -1279,7 +1280,7 @@
           <a:p>
             <a:fld id="{F3DF6F99-26EF-44A0-AB0C-04C766CF99AB}" type="datetimeFigureOut">
               <a:rPr lang="ru-RU" smtClean="0"/>
-              <a:t>28.09.2026</a:t>
+              <a:t>02.10.2026</a:t>
             </a:fld>
             <a:endParaRPr lang="ru-RU"/>
           </a:p>
@@ -1646,7 +1647,7 @@
           <a:p>
             <a:fld id="{F3DF6F99-26EF-44A0-AB0C-04C766CF99AB}" type="datetimeFigureOut">
               <a:rPr lang="ru-RU" smtClean="0"/>
-              <a:t>28.09.2026</a:t>
+              <a:t>02.10.2026</a:t>
             </a:fld>
             <a:endParaRPr lang="ru-RU"/>
           </a:p>
@@ -1764,7 +1765,7 @@
           <a:p>
             <a:fld id="{F3DF6F99-26EF-44A0-AB0C-04C766CF99AB}" type="datetimeFigureOut">
               <a:rPr lang="ru-RU" smtClean="0"/>
-              <a:t>28.09.2026</a:t>
+              <a:t>02.10.2026</a:t>
             </a:fld>
             <a:endParaRPr lang="ru-RU"/>
           </a:p>
@@ -1859,7 +1860,7 @@
           <a:p>
             <a:fld id="{F3DF6F99-26EF-44A0-AB0C-04C766CF99AB}" type="datetimeFigureOut">
               <a:rPr lang="ru-RU" smtClean="0"/>
-              <a:t>28.09.2026</a:t>
+              <a:t>02.10.2026</a:t>
             </a:fld>
             <a:endParaRPr lang="ru-RU"/>
           </a:p>
@@ -2136,7 +2137,7 @@
           <a:p>
             <a:fld id="{F3DF6F99-26EF-44A0-AB0C-04C766CF99AB}" type="datetimeFigureOut">
               <a:rPr lang="ru-RU" smtClean="0"/>
-              <a:t>28.09.2026</a:t>
+              <a:t>02.10.2026</a:t>
             </a:fld>
             <a:endParaRPr lang="ru-RU"/>
           </a:p>
@@ -2389,7 +2390,7 @@
           <a:p>
             <a:fld id="{F3DF6F99-26EF-44A0-AB0C-04C766CF99AB}" type="datetimeFigureOut">
               <a:rPr lang="ru-RU" smtClean="0"/>
-              <a:t>28.09.2026</a:t>
+              <a:t>02.10.2026</a:t>
             </a:fld>
             <a:endParaRPr lang="ru-RU"/>
           </a:p>
@@ -2602,7 +2603,7 @@
           <a:p>
             <a:fld id="{F3DF6F99-26EF-44A0-AB0C-04C766CF99AB}" type="datetimeFigureOut">
               <a:rPr lang="ru-RU" smtClean="0"/>
-              <a:t>28.09.2026</a:t>
+              <a:t>02.10.2026</a:t>
             </a:fld>
             <a:endParaRPr lang="ru-RU"/>
           </a:p>
@@ -4590,11 +4591,7 @@
             </a:pPr>
             <a:r>
               <a:rPr lang="ru-RU" b="1" i="1" dirty="0" smtClean="0"/>
-              <a:t>Н</a:t>
-            </a:r>
-            <a:r>
-              <a:rPr lang="ru-RU" b="1" i="1" dirty="0" smtClean="0"/>
-              <a:t>ачальный последовательный номер</a:t>
+              <a:t>Начальный последовательный номер</a:t>
             </a:r>
             <a:r>
               <a:rPr lang="ru-RU" b="1" dirty="0"/>
@@ -5251,6 +5248,13 @@
   <p:clrMapOvr>
     <a:masterClrMapping/>
   </p:clrMapOvr>
+  <p:timing>
+    <p:tnLst>
+      <p:par>
+        <p:cTn id="1" dur="indefinite" restart="never" nodeType="tmRoot"/>
+      </p:par>
+    </p:tnLst>
+  </p:timing>
 </p:sld>
 </file>
 
@@ -5911,6 +5915,214 @@
 </file>
 
 <file path=ppt/slides/slide28.xml><?xml version="1.0" encoding="utf-8"?>
+<p:sld xmlns:a="http://schemas.openxmlformats.org/drawingml/2006/main" xmlns:r="http://schemas.openxmlformats.org/officeDocument/2006/relationships" xmlns:p="http://schemas.openxmlformats.org/presentationml/2006/main">
+  <p:cSld>
+    <p:spTree>
+      <p:nvGrpSpPr>
+        <p:cNvPr id="1" name=""/>
+        <p:cNvGrpSpPr/>
+        <p:nvPr/>
+      </p:nvGrpSpPr>
+      <p:grpSpPr>
+        <a:xfrm>
+          <a:off x="0" y="0"/>
+          <a:ext cx="0" cy="0"/>
+          <a:chOff x="0" y="0"/>
+          <a:chExt cx="0" cy="0"/>
+        </a:xfrm>
+      </p:grpSpPr>
+      <p:sp>
+        <p:nvSpPr>
+          <p:cNvPr id="2" name="Заголовок 1"/>
+          <p:cNvSpPr>
+            <a:spLocks noGrp="1"/>
+          </p:cNvSpPr>
+          <p:nvPr>
+            <p:ph type="title"/>
+          </p:nvPr>
+        </p:nvSpPr>
+        <p:spPr/>
+        <p:txBody>
+          <a:bodyPr/>
+          <a:lstStyle/>
+          <a:p>
+            <a:r>
+              <a:rPr lang="en-US" dirty="0" smtClean="0"/>
+              <a:t>TCP MSS </a:t>
+            </a:r>
+            <a:r>
+              <a:rPr lang="ru-RU" dirty="0" smtClean="0"/>
+              <a:t>и </a:t>
+            </a:r>
+            <a:r>
+              <a:rPr lang="en-US" dirty="0" smtClean="0"/>
+              <a:t>MSS Clamping</a:t>
+            </a:r>
+            <a:endParaRPr lang="ru-RU" dirty="0"/>
+          </a:p>
+        </p:txBody>
+      </p:sp>
+      <p:sp>
+        <p:nvSpPr>
+          <p:cNvPr id="6" name="Текст 5"/>
+          <p:cNvSpPr>
+            <a:spLocks noGrp="1"/>
+          </p:cNvSpPr>
+          <p:nvPr>
+            <p:ph type="body" idx="1"/>
+          </p:nvPr>
+        </p:nvSpPr>
+        <p:spPr>
+          <a:xfrm>
+            <a:off x="284651" y="1775781"/>
+            <a:ext cx="5812937" cy="823912"/>
+          </a:xfrm>
+        </p:spPr>
+        <p:txBody>
+          <a:bodyPr>
+            <a:normAutofit fontScale="92500" lnSpcReduction="20000"/>
+          </a:bodyPr>
+          <a:lstStyle/>
+          <a:p>
+            <a:r>
+              <a:rPr lang="en-US" b="0" dirty="0" smtClean="0"/>
+              <a:t>TCP MSS - </a:t>
+            </a:r>
+            <a:r>
+              <a:rPr lang="ru-RU" b="0" dirty="0" smtClean="0"/>
+              <a:t>максимальный </a:t>
+            </a:r>
+            <a:r>
+              <a:rPr lang="ru-RU" b="0" dirty="0"/>
+              <a:t>размер полезных данных (</a:t>
+            </a:r>
+            <a:r>
+              <a:rPr lang="ru-RU" b="0" dirty="0" err="1"/>
+              <a:t>payload</a:t>
+            </a:r>
+            <a:r>
+              <a:rPr lang="ru-RU" b="0" dirty="0"/>
+              <a:t>) в одном TCP-сегменте, который сторона готова принять.</a:t>
+            </a:r>
+            <a:endParaRPr lang="ru-RU" dirty="0"/>
+          </a:p>
+        </p:txBody>
+      </p:sp>
+      <p:pic>
+        <p:nvPicPr>
+          <p:cNvPr id="10" name="Объект 9"/>
+          <p:cNvPicPr>
+            <a:picLocks noGrp="1" noChangeAspect="1"/>
+          </p:cNvPicPr>
+          <p:nvPr>
+            <p:ph sz="half" idx="2"/>
+          </p:nvPr>
+        </p:nvPicPr>
+        <p:blipFill>
+          <a:blip r:embed="rId2"/>
+          <a:stretch>
+            <a:fillRect/>
+          </a:stretch>
+        </p:blipFill>
+        <p:spPr>
+          <a:xfrm>
+            <a:off x="83650" y="2935084"/>
+            <a:ext cx="5157787" cy="2930077"/>
+          </a:xfrm>
+          <a:prstGeom prst="rect">
+            <a:avLst/>
+          </a:prstGeom>
+        </p:spPr>
+      </p:pic>
+      <p:sp>
+        <p:nvSpPr>
+          <p:cNvPr id="8" name="Текст 7"/>
+          <p:cNvSpPr>
+            <a:spLocks noGrp="1"/>
+          </p:cNvSpPr>
+          <p:nvPr>
+            <p:ph type="body" sz="quarter" idx="3"/>
+          </p:nvPr>
+        </p:nvSpPr>
+        <p:spPr>
+          <a:xfrm>
+            <a:off x="5997575" y="1681162"/>
+            <a:ext cx="5922101" cy="1114791"/>
+          </a:xfrm>
+        </p:spPr>
+        <p:txBody>
+          <a:bodyPr>
+            <a:normAutofit fontScale="92500" lnSpcReduction="20000"/>
+          </a:bodyPr>
+          <a:lstStyle/>
+          <a:p>
+            <a:r>
+              <a:rPr lang="ru-RU" b="0" dirty="0"/>
+              <a:t>MSS </a:t>
+            </a:r>
+            <a:r>
+              <a:rPr lang="ru-RU" b="0" dirty="0" err="1" smtClean="0"/>
+              <a:t>Clamping</a:t>
+            </a:r>
+            <a:r>
+              <a:rPr lang="ru-RU" b="0" dirty="0" smtClean="0"/>
+              <a:t> - принудительная </a:t>
+            </a:r>
+            <a:r>
+              <a:rPr lang="ru-RU" b="0" dirty="0"/>
+              <a:t>корректировка значения MSS в проходящих TCP-пакетах (обычно в SYN) маршрутизатором/шлюзом, чтобы оно не превышало MTU канала. </a:t>
+            </a:r>
+            <a:endParaRPr lang="ru-RU" dirty="0"/>
+          </a:p>
+        </p:txBody>
+      </p:sp>
+      <p:pic>
+        <p:nvPicPr>
+          <p:cNvPr id="11" name="Объект 10"/>
+          <p:cNvPicPr>
+            <a:picLocks noGrp="1" noChangeAspect="1"/>
+          </p:cNvPicPr>
+          <p:nvPr>
+            <p:ph sz="quarter" idx="4"/>
+          </p:nvPr>
+        </p:nvPicPr>
+        <p:blipFill>
+          <a:blip r:embed="rId3"/>
+          <a:stretch>
+            <a:fillRect/>
+          </a:stretch>
+        </p:blipFill>
+        <p:spPr>
+          <a:xfrm>
+            <a:off x="5241436" y="3084552"/>
+            <a:ext cx="6678240" cy="2930077"/>
+          </a:xfrm>
+          <a:prstGeom prst="rect">
+            <a:avLst/>
+          </a:prstGeom>
+        </p:spPr>
+      </p:pic>
+    </p:spTree>
+    <p:extLst>
+      <p:ext uri="{BB962C8B-B14F-4D97-AF65-F5344CB8AC3E}">
+        <p14:creationId xmlns:p14="http://schemas.microsoft.com/office/powerpoint/2010/main" val="1245735157"/>
+      </p:ext>
+    </p:extLst>
+  </p:cSld>
+  <p:clrMapOvr>
+    <a:masterClrMapping/>
+  </p:clrMapOvr>
+  <p:timing>
+    <p:tnLst>
+      <p:par>
+        <p:cTn id="1" dur="indefinite" restart="never" nodeType="tmRoot"/>
+      </p:par>
+    </p:tnLst>
+  </p:timing>
+</p:sld>
+</file>
+
+<file path=ppt/slides/slide29.xml><?xml version="1.0" encoding="utf-8"?>
 <p:sld xmlns:a="http://schemas.openxmlformats.org/drawingml/2006/main" xmlns:r="http://schemas.openxmlformats.org/officeDocument/2006/relationships" xmlns:p="http://schemas.openxmlformats.org/presentationml/2006/main">
   <p:cSld>
     <p:spTree>

--- a/1.8 Transport Layer/1.8 Transport Layer.pptx
+++ b/1.8 Transport Layer/1.8 Transport Layer.pptx
@@ -34,6 +34,21 @@
     <p:sldId id="283" r:id="rId28"/>
     <p:sldId id="284" r:id="rId29"/>
     <p:sldId id="278" r:id="rId30"/>
+    <p:sldId id="285" r:id="rId31"/>
+    <p:sldId id="286" r:id="rId32"/>
+    <p:sldId id="287" r:id="rId33"/>
+    <p:sldId id="288" r:id="rId34"/>
+    <p:sldId id="289" r:id="rId35"/>
+    <p:sldId id="290" r:id="rId36"/>
+    <p:sldId id="291" r:id="rId37"/>
+    <p:sldId id="292" r:id="rId38"/>
+    <p:sldId id="293" r:id="rId39"/>
+    <p:sldId id="294" r:id="rId40"/>
+    <p:sldId id="295" r:id="rId41"/>
+    <p:sldId id="296" r:id="rId42"/>
+    <p:sldId id="297" r:id="rId43"/>
+    <p:sldId id="298" r:id="rId44"/>
+    <p:sldId id="299" r:id="rId45"/>
   </p:sldIdLst>
   <p:sldSz cx="12192000" cy="6858000"/>
   <p:notesSz cx="6858000" cy="9144000"/>
@@ -282,7 +297,7 @@
           <a:p>
             <a:fld id="{F3DF6F99-26EF-44A0-AB0C-04C766CF99AB}" type="datetimeFigureOut">
               <a:rPr lang="ru-RU" smtClean="0"/>
-              <a:t>02.10.2026</a:t>
+              <a:t>13.10.2026</a:t>
             </a:fld>
             <a:endParaRPr lang="ru-RU"/>
           </a:p>
@@ -452,7 +467,7 @@
           <a:p>
             <a:fld id="{F3DF6F99-26EF-44A0-AB0C-04C766CF99AB}" type="datetimeFigureOut">
               <a:rPr lang="ru-RU" smtClean="0"/>
-              <a:t>02.10.2026</a:t>
+              <a:t>13.10.2026</a:t>
             </a:fld>
             <a:endParaRPr lang="ru-RU"/>
           </a:p>
@@ -632,7 +647,7 @@
           <a:p>
             <a:fld id="{F3DF6F99-26EF-44A0-AB0C-04C766CF99AB}" type="datetimeFigureOut">
               <a:rPr lang="ru-RU" smtClean="0"/>
-              <a:t>02.10.2026</a:t>
+              <a:t>13.10.2026</a:t>
             </a:fld>
             <a:endParaRPr lang="ru-RU"/>
           </a:p>
@@ -802,7 +817,7 @@
           <a:p>
             <a:fld id="{F3DF6F99-26EF-44A0-AB0C-04C766CF99AB}" type="datetimeFigureOut">
               <a:rPr lang="ru-RU" smtClean="0"/>
-              <a:t>02.10.2026</a:t>
+              <a:t>13.10.2026</a:t>
             </a:fld>
             <a:endParaRPr lang="ru-RU"/>
           </a:p>
@@ -1048,7 +1063,7 @@
           <a:p>
             <a:fld id="{F3DF6F99-26EF-44A0-AB0C-04C766CF99AB}" type="datetimeFigureOut">
               <a:rPr lang="ru-RU" smtClean="0"/>
-              <a:t>02.10.2026</a:t>
+              <a:t>13.10.2026</a:t>
             </a:fld>
             <a:endParaRPr lang="ru-RU"/>
           </a:p>
@@ -1280,7 +1295,7 @@
           <a:p>
             <a:fld id="{F3DF6F99-26EF-44A0-AB0C-04C766CF99AB}" type="datetimeFigureOut">
               <a:rPr lang="ru-RU" smtClean="0"/>
-              <a:t>02.10.2026</a:t>
+              <a:t>13.10.2026</a:t>
             </a:fld>
             <a:endParaRPr lang="ru-RU"/>
           </a:p>
@@ -1647,7 +1662,7 @@
           <a:p>
             <a:fld id="{F3DF6F99-26EF-44A0-AB0C-04C766CF99AB}" type="datetimeFigureOut">
               <a:rPr lang="ru-RU" smtClean="0"/>
-              <a:t>02.10.2026</a:t>
+              <a:t>13.10.2026</a:t>
             </a:fld>
             <a:endParaRPr lang="ru-RU"/>
           </a:p>
@@ -1765,7 +1780,7 @@
           <a:p>
             <a:fld id="{F3DF6F99-26EF-44A0-AB0C-04C766CF99AB}" type="datetimeFigureOut">
               <a:rPr lang="ru-RU" smtClean="0"/>
-              <a:t>02.10.2026</a:t>
+              <a:t>13.10.2026</a:t>
             </a:fld>
             <a:endParaRPr lang="ru-RU"/>
           </a:p>
@@ -1860,7 +1875,7 @@
           <a:p>
             <a:fld id="{F3DF6F99-26EF-44A0-AB0C-04C766CF99AB}" type="datetimeFigureOut">
               <a:rPr lang="ru-RU" smtClean="0"/>
-              <a:t>02.10.2026</a:t>
+              <a:t>13.10.2026</a:t>
             </a:fld>
             <a:endParaRPr lang="ru-RU"/>
           </a:p>
@@ -2137,7 +2152,7 @@
           <a:p>
             <a:fld id="{F3DF6F99-26EF-44A0-AB0C-04C766CF99AB}" type="datetimeFigureOut">
               <a:rPr lang="ru-RU" smtClean="0"/>
-              <a:t>02.10.2026</a:t>
+              <a:t>13.10.2026</a:t>
             </a:fld>
             <a:endParaRPr lang="ru-RU"/>
           </a:p>
@@ -2390,7 +2405,7 @@
           <a:p>
             <a:fld id="{F3DF6F99-26EF-44A0-AB0C-04C766CF99AB}" type="datetimeFigureOut">
               <a:rPr lang="ru-RU" smtClean="0"/>
-              <a:t>02.10.2026</a:t>
+              <a:t>13.10.2026</a:t>
             </a:fld>
             <a:endParaRPr lang="ru-RU"/>
           </a:p>
@@ -2603,7 +2618,7 @@
           <a:p>
             <a:fld id="{F3DF6F99-26EF-44A0-AB0C-04C766CF99AB}" type="datetimeFigureOut">
               <a:rPr lang="ru-RU" smtClean="0"/>
-              <a:t>02.10.2026</a:t>
+              <a:t>13.10.2026</a:t>
             </a:fld>
             <a:endParaRPr lang="ru-RU"/>
           </a:p>
@@ -6335,6 +6350,1702 @@
 </p:sld>
 </file>
 
+<file path=ppt/slides/slide30.xml><?xml version="1.0" encoding="utf-8"?>
+<p:sld xmlns:a="http://schemas.openxmlformats.org/drawingml/2006/main" xmlns:r="http://schemas.openxmlformats.org/officeDocument/2006/relationships" xmlns:p="http://schemas.openxmlformats.org/presentationml/2006/main">
+  <p:cSld>
+    <p:spTree>
+      <p:nvGrpSpPr>
+        <p:cNvPr id="1" name=""/>
+        <p:cNvGrpSpPr/>
+        <p:nvPr/>
+      </p:nvGrpSpPr>
+      <p:grpSpPr>
+        <a:xfrm>
+          <a:off x="0" y="0"/>
+          <a:ext cx="0" cy="0"/>
+          <a:chOff x="0" y="0"/>
+          <a:chExt cx="0" cy="0"/>
+        </a:xfrm>
+      </p:grpSpPr>
+      <p:sp>
+        <p:nvSpPr>
+          <p:cNvPr id="2" name="Заголовок 1"/>
+          <p:cNvSpPr>
+            <a:spLocks noGrp="1"/>
+          </p:cNvSpPr>
+          <p:nvPr>
+            <p:ph type="title"/>
+          </p:nvPr>
+        </p:nvSpPr>
+        <p:spPr/>
+        <p:txBody>
+          <a:bodyPr>
+            <a:normAutofit/>
+          </a:bodyPr>
+          <a:lstStyle/>
+          <a:p>
+            <a:r>
+              <a:rPr lang="ru-RU" b="1" dirty="0"/>
+              <a:t>Установите соответствие: Диапазоны </a:t>
+            </a:r>
+            <a:r>
+              <a:rPr lang="ru-RU" b="1" dirty="0" smtClean="0"/>
+              <a:t>портов</a:t>
+            </a:r>
+            <a:endParaRPr lang="ru-RU" dirty="0"/>
+          </a:p>
+        </p:txBody>
+      </p:sp>
+      <p:graphicFrame>
+        <p:nvGraphicFramePr>
+          <p:cNvPr id="4" name="Объект 3"/>
+          <p:cNvGraphicFramePr>
+            <a:graphicFrameLocks noGrp="1"/>
+          </p:cNvGraphicFramePr>
+          <p:nvPr>
+            <p:ph idx="1"/>
+          </p:nvPr>
+        </p:nvGraphicFramePr>
+        <p:xfrm>
+          <a:off x="838200" y="3262154"/>
+          <a:ext cx="10515600" cy="1478280"/>
+        </p:xfrm>
+        <a:graphic>
+          <a:graphicData uri="http://schemas.openxmlformats.org/drawingml/2006/table">
+            <a:tbl>
+              <a:tblPr/>
+              <a:tblGrid>
+                <a:gridCol w="5257800">
+                  <a:extLst>
+                    <a:ext uri="{9D8B030D-6E8A-4147-A177-3AD203B41FA5}">
+                      <a16:colId xmlns:a16="http://schemas.microsoft.com/office/drawing/2014/main" val="2157265646"/>
+                    </a:ext>
+                  </a:extLst>
+                </a:gridCol>
+                <a:gridCol w="5257800">
+                  <a:extLst>
+                    <a:ext uri="{9D8B030D-6E8A-4147-A177-3AD203B41FA5}">
+                      <a16:colId xmlns:a16="http://schemas.microsoft.com/office/drawing/2014/main" val="2057823053"/>
+                    </a:ext>
+                  </a:extLst>
+                </a:gridCol>
+              </a:tblGrid>
+              <a:tr h="0">
+                <a:tc>
+                  <a:txBody>
+                    <a:bodyPr/>
+                    <a:lstStyle/>
+                    <a:p>
+                      <a:pPr algn="l"/>
+                      <a:r>
+                        <a:rPr lang="ru-RU">
+                          <a:effectLst/>
+                        </a:rPr>
+                        <a:t>Категория</a:t>
+                      </a:r>
+                    </a:p>
+                  </a:txBody>
+                  <a:tcPr marL="95250" marR="95250" marT="47625" marB="47625" anchor="ctr">
+                    <a:lnL>
+                      <a:noFill/>
+                    </a:lnL>
+                    <a:lnR>
+                      <a:noFill/>
+                    </a:lnR>
+                    <a:lnT>
+                      <a:noFill/>
+                    </a:lnT>
+                    <a:lnB>
+                      <a:noFill/>
+                    </a:lnB>
+                  </a:tcPr>
+                </a:tc>
+                <a:tc>
+                  <a:txBody>
+                    <a:bodyPr/>
+                    <a:lstStyle/>
+                    <a:p>
+                      <a:pPr algn="l"/>
+                      <a:r>
+                        <a:rPr lang="ru-RU">
+                          <a:effectLst/>
+                        </a:rPr>
+                        <a:t>Диапазон</a:t>
+                      </a:r>
+                    </a:p>
+                  </a:txBody>
+                  <a:tcPr marL="95250" marR="95250" marT="47625" marB="47625" anchor="ctr">
+                    <a:lnL>
+                      <a:noFill/>
+                    </a:lnL>
+                    <a:lnR>
+                      <a:noFill/>
+                    </a:lnR>
+                    <a:lnT>
+                      <a:noFill/>
+                    </a:lnT>
+                    <a:lnB>
+                      <a:noFill/>
+                    </a:lnB>
+                  </a:tcPr>
+                </a:tc>
+                <a:extLst>
+                  <a:ext uri="{0D108BD9-81ED-4DB2-BD59-A6C34878D82A}">
+                    <a16:rowId xmlns:a16="http://schemas.microsoft.com/office/drawing/2014/main" val="166448820"/>
+                  </a:ext>
+                </a:extLst>
+              </a:tr>
+              <a:tr h="0">
+                <a:tc>
+                  <a:txBody>
+                    <a:bodyPr/>
+                    <a:lstStyle/>
+                    <a:p>
+                      <a:pPr algn="l"/>
+                      <a:r>
+                        <a:rPr lang="ru-RU" b="1">
+                          <a:effectLst/>
+                        </a:rPr>
+                        <a:t>А)</a:t>
+                      </a:r>
+                      <a:r>
+                        <a:rPr lang="ru-RU">
+                          <a:effectLst/>
+                        </a:rPr>
+                        <a:t> Частные / динамические (</a:t>
+                      </a:r>
+                      <a:r>
+                        <a:rPr lang="af-ZA">
+                          <a:effectLst/>
+                        </a:rPr>
+                        <a:t>Ephemeral)</a:t>
+                      </a:r>
+                    </a:p>
+                  </a:txBody>
+                  <a:tcPr marL="95250" marR="95250" marT="47625" marB="47625" anchor="ctr">
+                    <a:lnL>
+                      <a:noFill/>
+                    </a:lnL>
+                    <a:lnR>
+                      <a:noFill/>
+                    </a:lnR>
+                    <a:lnT>
+                      <a:noFill/>
+                    </a:lnT>
+                    <a:lnB>
+                      <a:noFill/>
+                    </a:lnB>
+                  </a:tcPr>
+                </a:tc>
+                <a:tc>
+                  <a:txBody>
+                    <a:bodyPr/>
+                    <a:lstStyle/>
+                    <a:p>
+                      <a:pPr algn="l"/>
+                      <a:r>
+                        <a:rPr lang="ru-RU" b="1">
+                          <a:effectLst/>
+                        </a:rPr>
+                        <a:t>1)</a:t>
+                      </a:r>
+                      <a:r>
+                        <a:rPr lang="ru-RU">
+                          <a:effectLst/>
+                        </a:rPr>
+                        <a:t> 1024 – 49151</a:t>
+                      </a:r>
+                    </a:p>
+                  </a:txBody>
+                  <a:tcPr marL="95250" marR="95250" marT="47625" marB="47625" anchor="ctr">
+                    <a:lnL>
+                      <a:noFill/>
+                    </a:lnL>
+                    <a:lnR>
+                      <a:noFill/>
+                    </a:lnR>
+                    <a:lnT>
+                      <a:noFill/>
+                    </a:lnT>
+                    <a:lnB>
+                      <a:noFill/>
+                    </a:lnB>
+                  </a:tcPr>
+                </a:tc>
+                <a:extLst>
+                  <a:ext uri="{0D108BD9-81ED-4DB2-BD59-A6C34878D82A}">
+                    <a16:rowId xmlns:a16="http://schemas.microsoft.com/office/drawing/2014/main" val="2136393012"/>
+                  </a:ext>
+                </a:extLst>
+              </a:tr>
+              <a:tr h="0">
+                <a:tc>
+                  <a:txBody>
+                    <a:bodyPr/>
+                    <a:lstStyle/>
+                    <a:p>
+                      <a:pPr algn="l"/>
+                      <a:r>
+                        <a:rPr lang="ru-RU" b="1">
+                          <a:effectLst/>
+                        </a:rPr>
+                        <a:t>Б)</a:t>
+                      </a:r>
+                      <a:r>
+                        <a:rPr lang="ru-RU">
+                          <a:effectLst/>
+                        </a:rPr>
+                        <a:t> Общеизвестные (</a:t>
+                      </a:r>
+                      <a:r>
+                        <a:rPr lang="af-ZA">
+                          <a:effectLst/>
+                        </a:rPr>
+                        <a:t>Well-Known)</a:t>
+                      </a:r>
+                    </a:p>
+                  </a:txBody>
+                  <a:tcPr marL="95250" marR="95250" marT="47625" marB="47625" anchor="ctr">
+                    <a:lnL>
+                      <a:noFill/>
+                    </a:lnL>
+                    <a:lnR>
+                      <a:noFill/>
+                    </a:lnR>
+                    <a:lnT>
+                      <a:noFill/>
+                    </a:lnT>
+                    <a:lnB>
+                      <a:noFill/>
+                    </a:lnB>
+                  </a:tcPr>
+                </a:tc>
+                <a:tc>
+                  <a:txBody>
+                    <a:bodyPr/>
+                    <a:lstStyle/>
+                    <a:p>
+                      <a:pPr algn="l"/>
+                      <a:r>
+                        <a:rPr lang="ru-RU" b="1">
+                          <a:effectLst/>
+                        </a:rPr>
+                        <a:t>2)</a:t>
+                      </a:r>
+                      <a:r>
+                        <a:rPr lang="ru-RU">
+                          <a:effectLst/>
+                        </a:rPr>
+                        <a:t> 49152 – 65535</a:t>
+                      </a:r>
+                    </a:p>
+                  </a:txBody>
+                  <a:tcPr marL="95250" marR="95250" marT="47625" marB="47625" anchor="ctr">
+                    <a:lnL>
+                      <a:noFill/>
+                    </a:lnL>
+                    <a:lnR>
+                      <a:noFill/>
+                    </a:lnR>
+                    <a:lnT>
+                      <a:noFill/>
+                    </a:lnT>
+                    <a:lnB>
+                      <a:noFill/>
+                    </a:lnB>
+                  </a:tcPr>
+                </a:tc>
+                <a:extLst>
+                  <a:ext uri="{0D108BD9-81ED-4DB2-BD59-A6C34878D82A}">
+                    <a16:rowId xmlns:a16="http://schemas.microsoft.com/office/drawing/2014/main" val="938585102"/>
+                  </a:ext>
+                </a:extLst>
+              </a:tr>
+              <a:tr h="0">
+                <a:tc>
+                  <a:txBody>
+                    <a:bodyPr/>
+                    <a:lstStyle/>
+                    <a:p>
+                      <a:pPr algn="l"/>
+                      <a:r>
+                        <a:rPr lang="ru-RU" b="1">
+                          <a:effectLst/>
+                        </a:rPr>
+                        <a:t>В)</a:t>
+                      </a:r>
+                      <a:r>
+                        <a:rPr lang="ru-RU">
+                          <a:effectLst/>
+                        </a:rPr>
+                        <a:t> Зарегистрированные (</a:t>
+                      </a:r>
+                      <a:r>
+                        <a:rPr lang="af-ZA">
+                          <a:effectLst/>
+                        </a:rPr>
+                        <a:t>Registered)</a:t>
+                      </a:r>
+                    </a:p>
+                  </a:txBody>
+                  <a:tcPr marL="95250" marR="95250" marT="47625" marB="47625" anchor="ctr">
+                    <a:lnL>
+                      <a:noFill/>
+                    </a:lnL>
+                    <a:lnR>
+                      <a:noFill/>
+                    </a:lnR>
+                    <a:lnT>
+                      <a:noFill/>
+                    </a:lnT>
+                    <a:lnB>
+                      <a:noFill/>
+                    </a:lnB>
+                  </a:tcPr>
+                </a:tc>
+                <a:tc>
+                  <a:txBody>
+                    <a:bodyPr/>
+                    <a:lstStyle/>
+                    <a:p>
+                      <a:pPr algn="l"/>
+                      <a:r>
+                        <a:rPr lang="ru-RU" b="1" dirty="0">
+                          <a:effectLst/>
+                        </a:rPr>
+                        <a:t>3)</a:t>
+                      </a:r>
+                      <a:r>
+                        <a:rPr lang="ru-RU" dirty="0">
+                          <a:effectLst/>
+                        </a:rPr>
+                        <a:t> 0 – 1023</a:t>
+                      </a:r>
+                    </a:p>
+                  </a:txBody>
+                  <a:tcPr marL="95250" marR="95250" marT="47625" marB="47625" anchor="ctr">
+                    <a:lnL>
+                      <a:noFill/>
+                    </a:lnL>
+                    <a:lnR>
+                      <a:noFill/>
+                    </a:lnR>
+                    <a:lnT>
+                      <a:noFill/>
+                    </a:lnT>
+                    <a:lnB>
+                      <a:noFill/>
+                    </a:lnB>
+                  </a:tcPr>
+                </a:tc>
+                <a:extLst>
+                  <a:ext uri="{0D108BD9-81ED-4DB2-BD59-A6C34878D82A}">
+                    <a16:rowId xmlns:a16="http://schemas.microsoft.com/office/drawing/2014/main" val="3137132648"/>
+                  </a:ext>
+                </a:extLst>
+              </a:tr>
+            </a:tbl>
+          </a:graphicData>
+        </a:graphic>
+      </p:graphicFrame>
+    </p:spTree>
+    <p:extLst>
+      <p:ext uri="{BB962C8B-B14F-4D97-AF65-F5344CB8AC3E}">
+        <p14:creationId xmlns:p14="http://schemas.microsoft.com/office/powerpoint/2010/main" val="923974314"/>
+      </p:ext>
+    </p:extLst>
+  </p:cSld>
+  <p:clrMapOvr>
+    <a:masterClrMapping/>
+  </p:clrMapOvr>
+  <p:timing>
+    <p:tnLst>
+      <p:par>
+        <p:cTn id="1" dur="indefinite" restart="never" nodeType="tmRoot"/>
+      </p:par>
+    </p:tnLst>
+  </p:timing>
+</p:sld>
+</file>
+
+<file path=ppt/slides/slide31.xml><?xml version="1.0" encoding="utf-8"?>
+<p:sld xmlns:a="http://schemas.openxmlformats.org/drawingml/2006/main" xmlns:r="http://schemas.openxmlformats.org/officeDocument/2006/relationships" xmlns:p="http://schemas.openxmlformats.org/presentationml/2006/main">
+  <p:cSld>
+    <p:spTree>
+      <p:nvGrpSpPr>
+        <p:cNvPr id="1" name=""/>
+        <p:cNvGrpSpPr/>
+        <p:nvPr/>
+      </p:nvGrpSpPr>
+      <p:grpSpPr>
+        <a:xfrm>
+          <a:off x="0" y="0"/>
+          <a:ext cx="0" cy="0"/>
+          <a:chOff x="0" y="0"/>
+          <a:chExt cx="0" cy="0"/>
+        </a:xfrm>
+      </p:grpSpPr>
+      <p:sp>
+        <p:nvSpPr>
+          <p:cNvPr id="2" name="Заголовок 1"/>
+          <p:cNvSpPr>
+            <a:spLocks noGrp="1"/>
+          </p:cNvSpPr>
+          <p:nvPr>
+            <p:ph type="title"/>
+          </p:nvPr>
+        </p:nvSpPr>
+        <p:spPr/>
+        <p:txBody>
+          <a:bodyPr/>
+          <a:lstStyle/>
+          <a:p>
+            <a:r>
+              <a:rPr lang="ru-RU" b="1" dirty="0"/>
+              <a:t>Анализ </a:t>
+            </a:r>
+            <a:r>
+              <a:rPr lang="ru-RU" b="1" dirty="0" smtClean="0"/>
+              <a:t>сокетов</a:t>
+            </a:r>
+            <a:endParaRPr lang="ru-RU" dirty="0"/>
+          </a:p>
+        </p:txBody>
+      </p:sp>
+      <p:sp>
+        <p:nvSpPr>
+          <p:cNvPr id="3" name="Объект 2"/>
+          <p:cNvSpPr>
+            <a:spLocks noGrp="1"/>
+          </p:cNvSpPr>
+          <p:nvPr>
+            <p:ph idx="1"/>
+          </p:nvPr>
+        </p:nvSpPr>
+        <p:spPr/>
+        <p:txBody>
+          <a:bodyPr>
+            <a:normAutofit fontScale="85000" lnSpcReduction="20000"/>
+          </a:bodyPr>
+          <a:lstStyle/>
+          <a:p>
+            <a:pPr marL="0" indent="0">
+              <a:buNone/>
+            </a:pPr>
+            <a:r>
+              <a:rPr lang="ru-RU" dirty="0"/>
+              <a:t>На сервере с IP-адресом 192.168.1.10 запущен веб-сервер (порт 80). Два разных клиента обращаются к нему:</a:t>
+            </a:r>
+          </a:p>
+          <a:p>
+            <a:pPr marL="0" indent="0">
+              <a:buNone/>
+            </a:pPr>
+            <a:endParaRPr lang="ru-RU" dirty="0"/>
+          </a:p>
+          <a:p>
+            <a:pPr marL="0" indent="0">
+              <a:buNone/>
+            </a:pPr>
+            <a:r>
+              <a:rPr lang="ru-RU" dirty="0"/>
+              <a:t>Клиент А: 10.0.0.5:54321</a:t>
+            </a:r>
+          </a:p>
+          <a:p>
+            <a:pPr marL="0" indent="0">
+              <a:buNone/>
+            </a:pPr>
+            <a:r>
+              <a:rPr lang="ru-RU" dirty="0"/>
+              <a:t>Клиент Б: 10.0.0.6:54321</a:t>
+            </a:r>
+          </a:p>
+          <a:p>
+            <a:pPr marL="0" indent="0">
+              <a:buNone/>
+            </a:pPr>
+            <a:r>
+              <a:rPr lang="ru-RU" dirty="0"/>
+              <a:t>Вопрос: Сможет ли сервер различить эти два подключения, учитывая, что порты клиентов на их сторонах полностью совпадают? Обоснуйте выбор.</a:t>
+            </a:r>
+          </a:p>
+          <a:p>
+            <a:pPr marL="0" indent="0">
+              <a:buNone/>
+            </a:pPr>
+            <a:endParaRPr lang="ru-RU" dirty="0"/>
+          </a:p>
+          <a:p>
+            <a:pPr marL="0" indent="0">
+              <a:buNone/>
+            </a:pPr>
+            <a:r>
+              <a:rPr lang="ru-RU" dirty="0"/>
+              <a:t>А) Нет, возникнет конфликт портов.</a:t>
+            </a:r>
+          </a:p>
+          <a:p>
+            <a:pPr marL="0" indent="0">
+              <a:buNone/>
+            </a:pPr>
+            <a:r>
+              <a:rPr lang="ru-RU" dirty="0"/>
+              <a:t>Б) Да, так как уникальность соединения определяется 4-tuple (</a:t>
+            </a:r>
+            <a:r>
+              <a:rPr lang="ru-RU" dirty="0" err="1"/>
+              <a:t>сокетовой</a:t>
+            </a:r>
+            <a:r>
+              <a:rPr lang="ru-RU" dirty="0"/>
+              <a:t> парой {</a:t>
+            </a:r>
+            <a:r>
+              <a:rPr lang="ru-RU" dirty="0" err="1"/>
+              <a:t>src_ip</a:t>
+            </a:r>
+            <a:r>
+              <a:rPr lang="ru-RU" dirty="0"/>
+              <a:t>, </a:t>
+            </a:r>
+            <a:r>
+              <a:rPr lang="ru-RU" dirty="0" err="1"/>
+              <a:t>src_port</a:t>
+            </a:r>
+            <a:r>
+              <a:rPr lang="ru-RU" dirty="0"/>
+              <a:t>, </a:t>
+            </a:r>
+            <a:r>
+              <a:rPr lang="ru-RU" dirty="0" err="1"/>
+              <a:t>dst_ip</a:t>
+            </a:r>
+            <a:r>
+              <a:rPr lang="ru-RU" dirty="0"/>
+              <a:t>, </a:t>
+            </a:r>
+            <a:r>
+              <a:rPr lang="ru-RU" dirty="0" err="1"/>
+              <a:t>dst_port</a:t>
+            </a:r>
+            <a:r>
+              <a:rPr lang="ru-RU" dirty="0"/>
+              <a:t>}).</a:t>
+            </a:r>
+          </a:p>
+          <a:p>
+            <a:pPr marL="0" indent="0">
+              <a:buNone/>
+            </a:pPr>
+            <a:r>
+              <a:rPr lang="ru-RU" dirty="0"/>
+              <a:t>В) Да, но только если используется протокол UDP.</a:t>
+            </a:r>
+          </a:p>
+        </p:txBody>
+      </p:sp>
+    </p:spTree>
+    <p:extLst>
+      <p:ext uri="{BB962C8B-B14F-4D97-AF65-F5344CB8AC3E}">
+        <p14:creationId xmlns:p14="http://schemas.microsoft.com/office/powerpoint/2010/main" val="754836604"/>
+      </p:ext>
+    </p:extLst>
+  </p:cSld>
+  <p:clrMapOvr>
+    <a:masterClrMapping/>
+  </p:clrMapOvr>
+  <p:timing>
+    <p:tnLst>
+      <p:par>
+        <p:cTn id="1" dur="indefinite" restart="never" nodeType="tmRoot"/>
+      </p:par>
+    </p:tnLst>
+  </p:timing>
+</p:sld>
+</file>
+
+<file path=ppt/slides/slide32.xml><?xml version="1.0" encoding="utf-8"?>
+<p:sld xmlns:a="http://schemas.openxmlformats.org/drawingml/2006/main" xmlns:r="http://schemas.openxmlformats.org/officeDocument/2006/relationships" xmlns:p="http://schemas.openxmlformats.org/presentationml/2006/main">
+  <p:cSld>
+    <p:spTree>
+      <p:nvGrpSpPr>
+        <p:cNvPr id="1" name=""/>
+        <p:cNvGrpSpPr/>
+        <p:nvPr/>
+      </p:nvGrpSpPr>
+      <p:grpSpPr>
+        <a:xfrm>
+          <a:off x="0" y="0"/>
+          <a:ext cx="0" cy="0"/>
+          <a:chOff x="0" y="0"/>
+          <a:chExt cx="0" cy="0"/>
+        </a:xfrm>
+      </p:grpSpPr>
+      <p:sp>
+        <p:nvSpPr>
+          <p:cNvPr id="2" name="Заголовок 1"/>
+          <p:cNvSpPr>
+            <a:spLocks noGrp="1"/>
+          </p:cNvSpPr>
+          <p:nvPr>
+            <p:ph type="title"/>
+          </p:nvPr>
+        </p:nvSpPr>
+        <p:spPr/>
+        <p:txBody>
+          <a:bodyPr/>
+          <a:lstStyle/>
+          <a:p>
+            <a:r>
+              <a:rPr lang="ru-RU" b="1" dirty="0" smtClean="0"/>
+              <a:t>Общеизвестные порты</a:t>
+            </a:r>
+            <a:endParaRPr lang="ru-RU" dirty="0"/>
+          </a:p>
+        </p:txBody>
+      </p:sp>
+      <p:sp>
+        <p:nvSpPr>
+          <p:cNvPr id="3" name="Объект 2"/>
+          <p:cNvSpPr>
+            <a:spLocks noGrp="1"/>
+          </p:cNvSpPr>
+          <p:nvPr>
+            <p:ph idx="1"/>
+          </p:nvPr>
+        </p:nvSpPr>
+        <p:spPr/>
+        <p:txBody>
+          <a:bodyPr/>
+          <a:lstStyle/>
+          <a:p>
+            <a:pPr marL="0" indent="0">
+              <a:buNone/>
+            </a:pPr>
+            <a:r>
+              <a:rPr lang="ru-RU" dirty="0"/>
+              <a:t>Укажите номер стандартного порта и транспортный протокол по умолчанию (TCP/UDP):</a:t>
+            </a:r>
+          </a:p>
+          <a:p>
+            <a:pPr marL="0" indent="0">
+              <a:buNone/>
+            </a:pPr>
+            <a:endParaRPr lang="ru-RU" dirty="0"/>
+          </a:p>
+          <a:p>
+            <a:pPr marL="0" indent="0">
+              <a:buNone/>
+            </a:pPr>
+            <a:r>
+              <a:rPr lang="ru-RU" dirty="0"/>
+              <a:t>DNS — порт: ____ , протокол: ____</a:t>
+            </a:r>
+          </a:p>
+          <a:p>
+            <a:pPr marL="0" indent="0">
+              <a:buNone/>
+            </a:pPr>
+            <a:r>
+              <a:rPr lang="ru-RU" dirty="0"/>
+              <a:t>HTTPS — порт: ____ , протокол: ____</a:t>
+            </a:r>
+          </a:p>
+          <a:p>
+            <a:pPr marL="0" indent="0">
+              <a:buNone/>
+            </a:pPr>
+            <a:r>
+              <a:rPr lang="ru-RU" dirty="0"/>
+              <a:t>SSH — порт: ____ , протокол: ____</a:t>
+            </a:r>
+          </a:p>
+          <a:p>
+            <a:pPr marL="0" indent="0">
+              <a:buNone/>
+            </a:pPr>
+            <a:r>
+              <a:rPr lang="ru-RU" dirty="0"/>
+              <a:t>DHCP (сервер) — порт: ____ , протокол: ____</a:t>
+            </a:r>
+          </a:p>
+        </p:txBody>
+      </p:sp>
+    </p:spTree>
+    <p:extLst>
+      <p:ext uri="{BB962C8B-B14F-4D97-AF65-F5344CB8AC3E}">
+        <p14:creationId xmlns:p14="http://schemas.microsoft.com/office/powerpoint/2010/main" val="2343179342"/>
+      </p:ext>
+    </p:extLst>
+  </p:cSld>
+  <p:clrMapOvr>
+    <a:masterClrMapping/>
+  </p:clrMapOvr>
+  <p:timing>
+    <p:tnLst>
+      <p:par>
+        <p:cTn id="1" dur="indefinite" restart="never" nodeType="tmRoot"/>
+      </p:par>
+    </p:tnLst>
+  </p:timing>
+</p:sld>
+</file>
+
+<file path=ppt/slides/slide33.xml><?xml version="1.0" encoding="utf-8"?>
+<p:sld xmlns:a="http://schemas.openxmlformats.org/drawingml/2006/main" xmlns:r="http://schemas.openxmlformats.org/officeDocument/2006/relationships" xmlns:p="http://schemas.openxmlformats.org/presentationml/2006/main">
+  <p:cSld>
+    <p:spTree>
+      <p:nvGrpSpPr>
+        <p:cNvPr id="1" name=""/>
+        <p:cNvGrpSpPr/>
+        <p:nvPr/>
+      </p:nvGrpSpPr>
+      <p:grpSpPr>
+        <a:xfrm>
+          <a:off x="0" y="0"/>
+          <a:ext cx="0" cy="0"/>
+          <a:chOff x="0" y="0"/>
+          <a:chExt cx="0" cy="0"/>
+        </a:xfrm>
+      </p:grpSpPr>
+      <p:sp>
+        <p:nvSpPr>
+          <p:cNvPr id="2" name="Заголовок 1"/>
+          <p:cNvSpPr>
+            <a:spLocks noGrp="1"/>
+          </p:cNvSpPr>
+          <p:nvPr>
+            <p:ph type="title"/>
+          </p:nvPr>
+        </p:nvSpPr>
+        <p:spPr/>
+        <p:txBody>
+          <a:bodyPr/>
+          <a:lstStyle/>
+          <a:p>
+            <a:r>
+              <a:rPr lang="ru-RU" b="1" dirty="0"/>
+              <a:t>Заполнение </a:t>
+            </a:r>
+            <a:r>
+              <a:rPr lang="ru-RU" b="1" dirty="0" smtClean="0"/>
+              <a:t>пропусков</a:t>
+            </a:r>
+            <a:endParaRPr lang="ru-RU" dirty="0"/>
+          </a:p>
+        </p:txBody>
+      </p:sp>
+      <p:sp>
+        <p:nvSpPr>
+          <p:cNvPr id="3" name="Объект 2"/>
+          <p:cNvSpPr>
+            <a:spLocks noGrp="1"/>
+          </p:cNvSpPr>
+          <p:nvPr>
+            <p:ph idx="1"/>
+          </p:nvPr>
+        </p:nvSpPr>
+        <p:spPr/>
+        <p:txBody>
+          <a:bodyPr/>
+          <a:lstStyle/>
+          <a:p>
+            <a:pPr marL="0" indent="0">
+              <a:buNone/>
+            </a:pPr>
+            <a:endParaRPr lang="ru-RU" dirty="0" smtClean="0"/>
+          </a:p>
+          <a:p>
+            <a:pPr marL="0" indent="0">
+              <a:buNone/>
+            </a:pPr>
+            <a:endParaRPr lang="ru-RU" dirty="0"/>
+          </a:p>
+          <a:p>
+            <a:pPr marL="0" indent="0">
+              <a:buNone/>
+            </a:pPr>
+            <a:r>
+              <a:rPr lang="ru-RU" dirty="0" smtClean="0"/>
+              <a:t>Минимальный </a:t>
+            </a:r>
+            <a:r>
+              <a:rPr lang="ru-RU" dirty="0"/>
+              <a:t>размер заголовка протокола </a:t>
+            </a:r>
+            <a:r>
+              <a:rPr lang="ru-RU" b="1" dirty="0"/>
+              <a:t>UDP</a:t>
+            </a:r>
+            <a:r>
+              <a:rPr lang="ru-RU" dirty="0"/>
+              <a:t> составляет </a:t>
+            </a:r>
+            <a:r>
+              <a:rPr lang="ru-RU" b="1" dirty="0"/>
+              <a:t>[ X ]</a:t>
+            </a:r>
+            <a:r>
+              <a:rPr lang="ru-RU" dirty="0"/>
+              <a:t> байт, а минимальный размер заголовка протокола </a:t>
+            </a:r>
+            <a:r>
+              <a:rPr lang="ru-RU" b="1" dirty="0"/>
+              <a:t>TCP</a:t>
+            </a:r>
+            <a:r>
+              <a:rPr lang="ru-RU" dirty="0"/>
+              <a:t> (без опций) составляет </a:t>
+            </a:r>
+            <a:r>
+              <a:rPr lang="ru-RU" b="1" dirty="0"/>
+              <a:t>[ Y ]</a:t>
+            </a:r>
+            <a:r>
+              <a:rPr lang="ru-RU" dirty="0"/>
+              <a:t> байт.</a:t>
+            </a:r>
+            <a:endParaRPr lang="ru-RU" dirty="0"/>
+          </a:p>
+        </p:txBody>
+      </p:sp>
+    </p:spTree>
+    <p:extLst>
+      <p:ext uri="{BB962C8B-B14F-4D97-AF65-F5344CB8AC3E}">
+        <p14:creationId xmlns:p14="http://schemas.microsoft.com/office/powerpoint/2010/main" val="911954165"/>
+      </p:ext>
+    </p:extLst>
+  </p:cSld>
+  <p:clrMapOvr>
+    <a:masterClrMapping/>
+  </p:clrMapOvr>
+  <p:timing>
+    <p:tnLst>
+      <p:par>
+        <p:cTn id="1" dur="indefinite" restart="never" nodeType="tmRoot"/>
+      </p:par>
+    </p:tnLst>
+  </p:timing>
+</p:sld>
+</file>
+
+<file path=ppt/slides/slide34.xml><?xml version="1.0" encoding="utf-8"?>
+<p:sld xmlns:a="http://schemas.openxmlformats.org/drawingml/2006/main" xmlns:r="http://schemas.openxmlformats.org/officeDocument/2006/relationships" xmlns:p="http://schemas.openxmlformats.org/presentationml/2006/main">
+  <p:cSld>
+    <p:spTree>
+      <p:nvGrpSpPr>
+        <p:cNvPr id="1" name=""/>
+        <p:cNvGrpSpPr/>
+        <p:nvPr/>
+      </p:nvGrpSpPr>
+      <p:grpSpPr>
+        <a:xfrm>
+          <a:off x="0" y="0"/>
+          <a:ext cx="0" cy="0"/>
+          <a:chOff x="0" y="0"/>
+          <a:chExt cx="0" cy="0"/>
+        </a:xfrm>
+      </p:grpSpPr>
+      <p:sp>
+        <p:nvSpPr>
+          <p:cNvPr id="2" name="Заголовок 1"/>
+          <p:cNvSpPr>
+            <a:spLocks noGrp="1"/>
+          </p:cNvSpPr>
+          <p:nvPr>
+            <p:ph type="title"/>
+          </p:nvPr>
+        </p:nvSpPr>
+        <p:spPr/>
+        <p:txBody>
+          <a:bodyPr/>
+          <a:lstStyle/>
+          <a:p>
+            <a:endParaRPr lang="ru-RU" dirty="0"/>
+          </a:p>
+        </p:txBody>
+      </p:sp>
+      <p:sp>
+        <p:nvSpPr>
+          <p:cNvPr id="3" name="Объект 2"/>
+          <p:cNvSpPr>
+            <a:spLocks noGrp="1"/>
+          </p:cNvSpPr>
+          <p:nvPr>
+            <p:ph idx="1"/>
+          </p:nvPr>
+        </p:nvSpPr>
+        <p:spPr/>
+        <p:txBody>
+          <a:bodyPr/>
+          <a:lstStyle/>
+          <a:p>
+            <a:pPr marL="0" indent="0">
+              <a:buNone/>
+            </a:pPr>
+            <a:r>
+              <a:rPr lang="ru-RU" dirty="0"/>
+              <a:t>Определите справедливость утверждений:</a:t>
+            </a:r>
+          </a:p>
+          <a:p>
+            <a:r>
+              <a:rPr lang="ru-RU" dirty="0"/>
+              <a:t>Протокол UDP гарантирует, что если </a:t>
+            </a:r>
+            <a:r>
+              <a:rPr lang="ru-RU" dirty="0" err="1"/>
+              <a:t>датаграмма</a:t>
+            </a:r>
+            <a:r>
+              <a:rPr lang="ru-RU" dirty="0"/>
+              <a:t> дошла, то данные внутри неё не повреждены (благодаря контрольной сумме, отбрасывающей битые пакеты). </a:t>
+            </a:r>
+            <a:r>
+              <a:rPr lang="ru-RU" i="1" dirty="0"/>
+              <a:t>(Верно / Неверно)</a:t>
+            </a:r>
+            <a:endParaRPr lang="ru-RU" dirty="0"/>
+          </a:p>
+          <a:p>
+            <a:r>
+              <a:rPr lang="ru-RU" dirty="0"/>
+              <a:t>Протокол UDP при обнаружении ошибки запрашивает повторную передачу у отправителя. </a:t>
+            </a:r>
+            <a:r>
+              <a:rPr lang="ru-RU" i="1" dirty="0"/>
+              <a:t>(Верно / Неверно)</a:t>
+            </a:r>
+            <a:endParaRPr lang="ru-RU" dirty="0"/>
+          </a:p>
+          <a:p>
+            <a:r>
+              <a:rPr lang="ru-RU" dirty="0"/>
+              <a:t>Одно и то же приложение не может одновременно слушать один и тот же номер порта по TCP и UDP. </a:t>
+            </a:r>
+            <a:r>
+              <a:rPr lang="ru-RU" i="1" dirty="0"/>
+              <a:t>(Верно / Неверно)</a:t>
+            </a:r>
+            <a:endParaRPr lang="ru-RU" dirty="0"/>
+          </a:p>
+          <a:p>
+            <a:pPr marL="0" indent="0">
+              <a:buNone/>
+            </a:pPr>
+            <a:endParaRPr lang="ru-RU" dirty="0"/>
+          </a:p>
+        </p:txBody>
+      </p:sp>
+    </p:spTree>
+    <p:extLst>
+      <p:ext uri="{BB962C8B-B14F-4D97-AF65-F5344CB8AC3E}">
+        <p14:creationId xmlns:p14="http://schemas.microsoft.com/office/powerpoint/2010/main" val="299295474"/>
+      </p:ext>
+    </p:extLst>
+  </p:cSld>
+  <p:clrMapOvr>
+    <a:masterClrMapping/>
+  </p:clrMapOvr>
+  <p:timing>
+    <p:tnLst>
+      <p:par>
+        <p:cTn id="1" dur="indefinite" restart="never" nodeType="tmRoot"/>
+      </p:par>
+    </p:tnLst>
+  </p:timing>
+</p:sld>
+</file>
+
+<file path=ppt/slides/slide35.xml><?xml version="1.0" encoding="utf-8"?>
+<p:sld xmlns:a="http://schemas.openxmlformats.org/drawingml/2006/main" xmlns:r="http://schemas.openxmlformats.org/officeDocument/2006/relationships" xmlns:p="http://schemas.openxmlformats.org/presentationml/2006/main">
+  <p:cSld>
+    <p:spTree>
+      <p:nvGrpSpPr>
+        <p:cNvPr id="1" name=""/>
+        <p:cNvGrpSpPr/>
+        <p:nvPr/>
+      </p:nvGrpSpPr>
+      <p:grpSpPr>
+        <a:xfrm>
+          <a:off x="0" y="0"/>
+          <a:ext cx="0" cy="0"/>
+          <a:chOff x="0" y="0"/>
+          <a:chExt cx="0" cy="0"/>
+        </a:xfrm>
+      </p:grpSpPr>
+      <p:sp>
+        <p:nvSpPr>
+          <p:cNvPr id="2" name="Заголовок 1"/>
+          <p:cNvSpPr>
+            <a:spLocks noGrp="1"/>
+          </p:cNvSpPr>
+          <p:nvPr>
+            <p:ph type="title"/>
+          </p:nvPr>
+        </p:nvSpPr>
+        <p:spPr/>
+        <p:txBody>
+          <a:bodyPr>
+            <a:normAutofit/>
+          </a:bodyPr>
+          <a:lstStyle/>
+          <a:p>
+            <a:r>
+              <a:rPr lang="ru-RU" dirty="0"/>
+              <a:t>Трёхстороннее рукопожатие (3-way </a:t>
+            </a:r>
+            <a:r>
+              <a:rPr lang="ru-RU" dirty="0" err="1"/>
+              <a:t>Handshake</a:t>
+            </a:r>
+            <a:r>
+              <a:rPr lang="ru-RU" dirty="0" smtClean="0"/>
+              <a:t>)</a:t>
+            </a:r>
+            <a:endParaRPr lang="ru-RU" dirty="0"/>
+          </a:p>
+        </p:txBody>
+      </p:sp>
+      <p:sp>
+        <p:nvSpPr>
+          <p:cNvPr id="3" name="Объект 2"/>
+          <p:cNvSpPr>
+            <a:spLocks noGrp="1"/>
+          </p:cNvSpPr>
+          <p:nvPr>
+            <p:ph idx="1"/>
+          </p:nvPr>
+        </p:nvSpPr>
+        <p:spPr/>
+        <p:txBody>
+          <a:bodyPr>
+            <a:normAutofit/>
+          </a:bodyPr>
+          <a:lstStyle/>
+          <a:p>
+            <a:pPr marL="0" indent="0">
+              <a:buNone/>
+            </a:pPr>
+            <a:r>
+              <a:rPr lang="ru-RU" dirty="0" smtClean="0"/>
+              <a:t>Расставьте </a:t>
+            </a:r>
+            <a:r>
+              <a:rPr lang="ru-RU" dirty="0"/>
+              <a:t>события в правильном хронологическом порядке при установлении TCP-сессии (от 1 до 4):</a:t>
+            </a:r>
+          </a:p>
+          <a:p>
+            <a:pPr marL="0" indent="0">
+              <a:buNone/>
+            </a:pPr>
+            <a:endParaRPr lang="ru-RU" dirty="0"/>
+          </a:p>
+          <a:p>
+            <a:r>
+              <a:rPr lang="ru-RU" dirty="0"/>
+              <a:t> Сервер отправляет сегмент с флагами SYN + ACK.</a:t>
+            </a:r>
+          </a:p>
+          <a:p>
+            <a:r>
+              <a:rPr lang="ru-RU" dirty="0"/>
+              <a:t> Клиент переходит в состояние ESTABLISHED и отправляет финальный ACK.</a:t>
+            </a:r>
+          </a:p>
+          <a:p>
+            <a:r>
+              <a:rPr lang="ru-RU" dirty="0"/>
+              <a:t> Клиент генерирует свой ISN и отправляет сегмент с флагом SYN.</a:t>
+            </a:r>
+          </a:p>
+          <a:p>
+            <a:r>
+              <a:rPr lang="ru-RU" dirty="0"/>
+              <a:t> Сервер получает финальный ACK и соединение полностью открыто для обеих сторон.</a:t>
+            </a:r>
+          </a:p>
+        </p:txBody>
+      </p:sp>
+    </p:spTree>
+    <p:extLst>
+      <p:ext uri="{BB962C8B-B14F-4D97-AF65-F5344CB8AC3E}">
+        <p14:creationId xmlns:p14="http://schemas.microsoft.com/office/powerpoint/2010/main" val="533110388"/>
+      </p:ext>
+    </p:extLst>
+  </p:cSld>
+  <p:clrMapOvr>
+    <a:masterClrMapping/>
+  </p:clrMapOvr>
+  <p:timing>
+    <p:tnLst>
+      <p:par>
+        <p:cTn id="1" dur="indefinite" restart="never" nodeType="tmRoot"/>
+      </p:par>
+    </p:tnLst>
+  </p:timing>
+</p:sld>
+</file>
+
+<file path=ppt/slides/slide36.xml><?xml version="1.0" encoding="utf-8"?>
+<p:sld xmlns:a="http://schemas.openxmlformats.org/drawingml/2006/main" xmlns:r="http://schemas.openxmlformats.org/officeDocument/2006/relationships" xmlns:p="http://schemas.openxmlformats.org/presentationml/2006/main">
+  <p:cSld>
+    <p:spTree>
+      <p:nvGrpSpPr>
+        <p:cNvPr id="1" name=""/>
+        <p:cNvGrpSpPr/>
+        <p:nvPr/>
+      </p:nvGrpSpPr>
+      <p:grpSpPr>
+        <a:xfrm>
+          <a:off x="0" y="0"/>
+          <a:ext cx="0" cy="0"/>
+          <a:chOff x="0" y="0"/>
+          <a:chExt cx="0" cy="0"/>
+        </a:xfrm>
+      </p:grpSpPr>
+      <p:sp>
+        <p:nvSpPr>
+          <p:cNvPr id="3" name="Объект 2"/>
+          <p:cNvSpPr>
+            <a:spLocks noGrp="1"/>
+          </p:cNvSpPr>
+          <p:nvPr>
+            <p:ph idx="1"/>
+          </p:nvPr>
+        </p:nvSpPr>
+        <p:spPr>
+          <a:xfrm>
+            <a:off x="838200" y="1246909"/>
+            <a:ext cx="10515600" cy="4930054"/>
+          </a:xfrm>
+        </p:spPr>
+        <p:txBody>
+          <a:bodyPr>
+            <a:normAutofit fontScale="92500" lnSpcReduction="10000"/>
+          </a:bodyPr>
+          <a:lstStyle/>
+          <a:p>
+            <a:pPr marL="0" indent="0">
+              <a:buNone/>
+            </a:pPr>
+            <a:r>
+              <a:rPr lang="ru-RU" dirty="0"/>
+              <a:t>Клиент отправляет серверу данные в рамках уже установленного соединения</a:t>
+            </a:r>
+            <a:r>
+              <a:rPr lang="ru-RU" dirty="0" smtClean="0"/>
+              <a:t>:</a:t>
+            </a:r>
+            <a:endParaRPr lang="ru-RU" dirty="0"/>
+          </a:p>
+          <a:p>
+            <a:r>
+              <a:rPr lang="ru-RU" dirty="0"/>
+              <a:t>Текущий сегмент клиента: </a:t>
+            </a:r>
+            <a:r>
+              <a:rPr lang="ru-RU" dirty="0" err="1"/>
+              <a:t>SeqNum</a:t>
+            </a:r>
+            <a:r>
+              <a:rPr lang="ru-RU" dirty="0"/>
+              <a:t> = 5000</a:t>
+            </a:r>
+          </a:p>
+          <a:p>
+            <a:r>
+              <a:rPr lang="ru-RU" dirty="0"/>
+              <a:t>Размер полезной нагрузки (данных без заголовка): 1460 байт</a:t>
+            </a:r>
+          </a:p>
+          <a:p>
+            <a:pPr marL="0" indent="0">
+              <a:buNone/>
+            </a:pPr>
+            <a:r>
+              <a:rPr lang="ru-RU" dirty="0"/>
+              <a:t>Вопрос: Какое значение </a:t>
+            </a:r>
+            <a:r>
+              <a:rPr lang="ru-RU" dirty="0" err="1"/>
+              <a:t>AckNum</a:t>
+            </a:r>
+            <a:r>
+              <a:rPr lang="ru-RU" dirty="0"/>
+              <a:t> должен вернуть сервер в подтверждении, если сегмент принят без ошибок?</a:t>
+            </a:r>
+          </a:p>
+          <a:p>
+            <a:pPr marL="0" indent="0">
+              <a:buNone/>
+            </a:pPr>
+            <a:endParaRPr lang="ru-RU" dirty="0"/>
+          </a:p>
+          <a:p>
+            <a:pPr marL="0" indent="0">
+              <a:buNone/>
+            </a:pPr>
+            <a:r>
+              <a:rPr lang="ru-RU" dirty="0"/>
+              <a:t>А) 5000</a:t>
+            </a:r>
+          </a:p>
+          <a:p>
+            <a:pPr marL="0" indent="0">
+              <a:buNone/>
+            </a:pPr>
+            <a:r>
+              <a:rPr lang="ru-RU" dirty="0"/>
+              <a:t>Б) 6460</a:t>
+            </a:r>
+          </a:p>
+          <a:p>
+            <a:pPr marL="0" indent="0">
+              <a:buNone/>
+            </a:pPr>
+            <a:r>
+              <a:rPr lang="ru-RU" dirty="0"/>
+              <a:t>В) 6461</a:t>
+            </a:r>
+          </a:p>
+          <a:p>
+            <a:pPr marL="0" indent="0">
+              <a:buNone/>
+            </a:pPr>
+            <a:r>
+              <a:rPr lang="ru-RU" dirty="0"/>
+              <a:t>Г) 1460</a:t>
+            </a:r>
+          </a:p>
+        </p:txBody>
+      </p:sp>
+    </p:spTree>
+    <p:extLst>
+      <p:ext uri="{BB962C8B-B14F-4D97-AF65-F5344CB8AC3E}">
+        <p14:creationId xmlns:p14="http://schemas.microsoft.com/office/powerpoint/2010/main" val="260598756"/>
+      </p:ext>
+    </p:extLst>
+  </p:cSld>
+  <p:clrMapOvr>
+    <a:masterClrMapping/>
+  </p:clrMapOvr>
+  <p:timing>
+    <p:tnLst>
+      <p:par>
+        <p:cTn id="1" dur="indefinite" restart="never" nodeType="tmRoot"/>
+      </p:par>
+    </p:tnLst>
+  </p:timing>
+</p:sld>
+</file>
+
+<file path=ppt/slides/slide37.xml><?xml version="1.0" encoding="utf-8"?>
+<p:sld xmlns:a="http://schemas.openxmlformats.org/drawingml/2006/main" xmlns:r="http://schemas.openxmlformats.org/officeDocument/2006/relationships" xmlns:p="http://schemas.openxmlformats.org/presentationml/2006/main">
+  <p:cSld>
+    <p:spTree>
+      <p:nvGrpSpPr>
+        <p:cNvPr id="1" name=""/>
+        <p:cNvGrpSpPr/>
+        <p:nvPr/>
+      </p:nvGrpSpPr>
+      <p:grpSpPr>
+        <a:xfrm>
+          <a:off x="0" y="0"/>
+          <a:ext cx="0" cy="0"/>
+          <a:chOff x="0" y="0"/>
+          <a:chExt cx="0" cy="0"/>
+        </a:xfrm>
+      </p:grpSpPr>
+      <p:sp>
+        <p:nvSpPr>
+          <p:cNvPr id="2" name="Заголовок 1"/>
+          <p:cNvSpPr>
+            <a:spLocks noGrp="1"/>
+          </p:cNvSpPr>
+          <p:nvPr>
+            <p:ph type="title"/>
+          </p:nvPr>
+        </p:nvSpPr>
+        <p:spPr/>
+        <p:txBody>
+          <a:bodyPr/>
+          <a:lstStyle/>
+          <a:p>
+            <a:endParaRPr lang="ru-RU"/>
+          </a:p>
+        </p:txBody>
+      </p:sp>
+      <p:sp>
+        <p:nvSpPr>
+          <p:cNvPr id="5" name="Объект 4"/>
+          <p:cNvSpPr>
+            <a:spLocks noGrp="1"/>
+          </p:cNvSpPr>
+          <p:nvPr>
+            <p:ph idx="1"/>
+          </p:nvPr>
+        </p:nvSpPr>
+        <p:spPr/>
+        <p:txBody>
+          <a:bodyPr/>
+          <a:lstStyle/>
+          <a:p>
+            <a:pPr marL="0" indent="0">
+              <a:buNone/>
+            </a:pPr>
+            <a:endParaRPr lang="ru-RU" dirty="0" smtClean="0"/>
+          </a:p>
+          <a:p>
+            <a:pPr marL="0" indent="0">
+              <a:buNone/>
+            </a:pPr>
+            <a:endParaRPr lang="ru-RU" dirty="0"/>
+          </a:p>
+          <a:p>
+            <a:pPr marL="0" indent="0">
+              <a:buNone/>
+            </a:pPr>
+            <a:r>
+              <a:rPr lang="ru-RU" dirty="0" smtClean="0"/>
+              <a:t>Почему </a:t>
+            </a:r>
+            <a:r>
+              <a:rPr lang="ru-RU" dirty="0"/>
+              <a:t>при отправке пустого сегмента SYN (без полезных данных) с </a:t>
+            </a:r>
+            <a:r>
+              <a:rPr lang="ru-RU" dirty="0" err="1"/>
+              <a:t>SeqNum</a:t>
+            </a:r>
+            <a:r>
+              <a:rPr lang="ru-RU" dirty="0"/>
+              <a:t> = 100, сервер отвечает квитанцией </a:t>
+            </a:r>
+            <a:r>
+              <a:rPr lang="ru-RU" dirty="0" err="1"/>
+              <a:t>AckNum</a:t>
+            </a:r>
+            <a:r>
+              <a:rPr lang="ru-RU" dirty="0"/>
+              <a:t> = 101, хотя полезная нагрузка равна 0 байт?</a:t>
+            </a:r>
+          </a:p>
+        </p:txBody>
+      </p:sp>
+    </p:spTree>
+    <p:extLst>
+      <p:ext uri="{BB962C8B-B14F-4D97-AF65-F5344CB8AC3E}">
+        <p14:creationId xmlns:p14="http://schemas.microsoft.com/office/powerpoint/2010/main" val="3093943504"/>
+      </p:ext>
+    </p:extLst>
+  </p:cSld>
+  <p:clrMapOvr>
+    <a:masterClrMapping/>
+  </p:clrMapOvr>
+  <p:timing>
+    <p:tnLst>
+      <p:par>
+        <p:cTn id="1" dur="indefinite" restart="never" nodeType="tmRoot"/>
+      </p:par>
+    </p:tnLst>
+  </p:timing>
+</p:sld>
+</file>
+
+<file path=ppt/slides/slide38.xml><?xml version="1.0" encoding="utf-8"?>
+<p:sld xmlns:a="http://schemas.openxmlformats.org/drawingml/2006/main" xmlns:r="http://schemas.openxmlformats.org/officeDocument/2006/relationships" xmlns:p="http://schemas.openxmlformats.org/presentationml/2006/main">
+  <p:cSld>
+    <p:spTree>
+      <p:nvGrpSpPr>
+        <p:cNvPr id="1" name=""/>
+        <p:cNvGrpSpPr/>
+        <p:nvPr/>
+      </p:nvGrpSpPr>
+      <p:grpSpPr>
+        <a:xfrm>
+          <a:off x="0" y="0"/>
+          <a:ext cx="0" cy="0"/>
+          <a:chOff x="0" y="0"/>
+          <a:chExt cx="0" cy="0"/>
+        </a:xfrm>
+      </p:grpSpPr>
+      <p:sp>
+        <p:nvSpPr>
+          <p:cNvPr id="2" name="Заголовок 1"/>
+          <p:cNvSpPr>
+            <a:spLocks noGrp="1"/>
+          </p:cNvSpPr>
+          <p:nvPr>
+            <p:ph type="title"/>
+          </p:nvPr>
+        </p:nvSpPr>
+        <p:spPr/>
+        <p:txBody>
+          <a:bodyPr/>
+          <a:lstStyle/>
+          <a:p>
+            <a:r>
+              <a:rPr lang="ru-RU" b="1" dirty="0"/>
+              <a:t>Причина появления номеров кадров в </a:t>
+            </a:r>
+            <a:r>
+              <a:rPr lang="ru-RU" b="1" dirty="0" err="1"/>
+              <a:t>Stop-and-Wait</a:t>
+            </a:r>
+            <a:endParaRPr lang="ru-RU" b="1" dirty="0"/>
+          </a:p>
+        </p:txBody>
+      </p:sp>
+      <p:sp>
+        <p:nvSpPr>
+          <p:cNvPr id="3" name="Объект 2"/>
+          <p:cNvSpPr>
+            <a:spLocks noGrp="1"/>
+          </p:cNvSpPr>
+          <p:nvPr>
+            <p:ph idx="1"/>
+          </p:nvPr>
+        </p:nvSpPr>
+        <p:spPr/>
+        <p:txBody>
+          <a:bodyPr/>
+          <a:lstStyle/>
+          <a:p>
+            <a:pPr marL="0" indent="0">
+              <a:buNone/>
+            </a:pPr>
+            <a:r>
+              <a:rPr lang="ru-RU" dirty="0" smtClean="0"/>
+              <a:t>Какую </a:t>
+            </a:r>
+            <a:r>
+              <a:rPr lang="ru-RU" dirty="0"/>
+              <a:t>критическую проблему решает введение даже 1-битного порядкового номера (0 и 1) в простейшем алгоритме </a:t>
+            </a:r>
+            <a:r>
+              <a:rPr lang="ru-RU" dirty="0" err="1"/>
+              <a:t>Stop-and-Wait</a:t>
+            </a:r>
+            <a:r>
+              <a:rPr lang="ru-RU" dirty="0"/>
+              <a:t>?</a:t>
+            </a:r>
+          </a:p>
+          <a:p>
+            <a:r>
+              <a:rPr lang="ru-RU" dirty="0"/>
+              <a:t>А) Ускорение передачи данных в 2 раза.</a:t>
+            </a:r>
+          </a:p>
+          <a:p>
+            <a:r>
+              <a:rPr lang="ru-RU" dirty="0"/>
+              <a:t>Б) Распознавание ситуации, когда подтверждение (ACK) потерялось, и повторно присланный сегмент является </a:t>
+            </a:r>
+            <a:r>
+              <a:rPr lang="ru-RU" b="1" dirty="0"/>
+              <a:t>дубликатом</a:t>
+            </a:r>
+            <a:r>
+              <a:rPr lang="ru-RU" dirty="0"/>
+              <a:t>, а не новым пакетом.</a:t>
+            </a:r>
+          </a:p>
+          <a:p>
+            <a:r>
+              <a:rPr lang="ru-RU" dirty="0"/>
+              <a:t>В) Управление размером окна на стороне получателя.</a:t>
+            </a:r>
+          </a:p>
+          <a:p>
+            <a:pPr marL="0" indent="0">
+              <a:buNone/>
+            </a:pPr>
+            <a:endParaRPr lang="ru-RU" dirty="0"/>
+          </a:p>
+        </p:txBody>
+      </p:sp>
+    </p:spTree>
+    <p:extLst>
+      <p:ext uri="{BB962C8B-B14F-4D97-AF65-F5344CB8AC3E}">
+        <p14:creationId xmlns:p14="http://schemas.microsoft.com/office/powerpoint/2010/main" val="1151476644"/>
+      </p:ext>
+    </p:extLst>
+  </p:cSld>
+  <p:clrMapOvr>
+    <a:masterClrMapping/>
+  </p:clrMapOvr>
+  <p:timing>
+    <p:tnLst>
+      <p:par>
+        <p:cTn id="1" dur="indefinite" restart="never" nodeType="tmRoot"/>
+      </p:par>
+    </p:tnLst>
+  </p:timing>
+</p:sld>
+</file>
+
+<file path=ppt/slides/slide39.xml><?xml version="1.0" encoding="utf-8"?>
+<p:sld xmlns:a="http://schemas.openxmlformats.org/drawingml/2006/main" xmlns:r="http://schemas.openxmlformats.org/officeDocument/2006/relationships" xmlns:p="http://schemas.openxmlformats.org/presentationml/2006/main">
+  <p:cSld>
+    <p:spTree>
+      <p:nvGrpSpPr>
+        <p:cNvPr id="1" name=""/>
+        <p:cNvGrpSpPr/>
+        <p:nvPr/>
+      </p:nvGrpSpPr>
+      <p:grpSpPr>
+        <a:xfrm>
+          <a:off x="0" y="0"/>
+          <a:ext cx="0" cy="0"/>
+          <a:chOff x="0" y="0"/>
+          <a:chExt cx="0" cy="0"/>
+        </a:xfrm>
+      </p:grpSpPr>
+      <p:sp>
+        <p:nvSpPr>
+          <p:cNvPr id="2" name="Заголовок 1"/>
+          <p:cNvSpPr>
+            <a:spLocks noGrp="1"/>
+          </p:cNvSpPr>
+          <p:nvPr>
+            <p:ph type="title"/>
+          </p:nvPr>
+        </p:nvSpPr>
+        <p:spPr/>
+        <p:txBody>
+          <a:bodyPr/>
+          <a:lstStyle/>
+          <a:p>
+            <a:r>
+              <a:rPr lang="ru-RU" b="1" dirty="0"/>
+              <a:t>Попадание в окно приёма (Задача-ситуация)</a:t>
+            </a:r>
+          </a:p>
+        </p:txBody>
+      </p:sp>
+      <p:sp>
+        <p:nvSpPr>
+          <p:cNvPr id="3" name="Объект 2"/>
+          <p:cNvSpPr>
+            <a:spLocks noGrp="1"/>
+          </p:cNvSpPr>
+          <p:nvPr>
+            <p:ph idx="1"/>
+          </p:nvPr>
+        </p:nvSpPr>
+        <p:spPr/>
+        <p:txBody>
+          <a:bodyPr>
+            <a:normAutofit fontScale="92500" lnSpcReduction="10000"/>
+          </a:bodyPr>
+          <a:lstStyle/>
+          <a:p>
+            <a:pPr marL="0" indent="0">
+              <a:buNone/>
+            </a:pPr>
+            <a:r>
+              <a:rPr lang="ru-RU" dirty="0"/>
+              <a:t>Получатель ожидает сегменты в режиме скользящего окна</a:t>
+            </a:r>
+            <a:r>
+              <a:rPr lang="ru-RU" dirty="0" smtClean="0"/>
+              <a:t>.</a:t>
+            </a:r>
+            <a:endParaRPr lang="ru-RU" dirty="0"/>
+          </a:p>
+          <a:p>
+            <a:r>
+              <a:rPr lang="ru-RU" dirty="0"/>
+              <a:t>Номер последнего непрерывно полученного байта (LSR) = 100</a:t>
+            </a:r>
+          </a:p>
+          <a:p>
+            <a:r>
+              <a:rPr lang="ru-RU" dirty="0"/>
+              <a:t>Размер окна приёма (RWS) = 50</a:t>
+            </a:r>
+          </a:p>
+          <a:p>
+            <a:r>
+              <a:rPr lang="ru-RU" dirty="0"/>
+              <a:t>Соответственно, наибольший допустимый байт (LAS) = 150</a:t>
+            </a:r>
+          </a:p>
+          <a:p>
+            <a:pPr marL="0" indent="0">
+              <a:buNone/>
+            </a:pPr>
+            <a:r>
+              <a:rPr lang="ru-RU" dirty="0"/>
+              <a:t>К получателю приходит сегмент с байтами 110–120. Сегменты 101–109 ещё не пришли. Что сделает получатель</a:t>
+            </a:r>
+            <a:r>
+              <a:rPr lang="ru-RU" dirty="0" smtClean="0"/>
+              <a:t>?</a:t>
+            </a:r>
+            <a:endParaRPr lang="ru-RU" dirty="0"/>
+          </a:p>
+          <a:p>
+            <a:pPr marL="0" indent="0">
+              <a:buNone/>
+            </a:pPr>
+            <a:r>
+              <a:rPr lang="ru-RU" dirty="0"/>
+              <a:t>А) Отбросит сегмент 110–120, так как нарушен строгий порядок.</a:t>
+            </a:r>
+          </a:p>
+          <a:p>
+            <a:pPr marL="0" indent="0">
+              <a:buNone/>
+            </a:pPr>
+            <a:r>
+              <a:rPr lang="ru-RU" dirty="0"/>
+              <a:t>Б) Сохранит сегмент 110–120 в буфер, но кумулятивный ACK пока не сдвинет дальше 100.</a:t>
+            </a:r>
+          </a:p>
+          <a:p>
+            <a:pPr marL="0" indent="0">
+              <a:buNone/>
+            </a:pPr>
+            <a:r>
+              <a:rPr lang="ru-RU" dirty="0"/>
+              <a:t>В) Отправит подтверждение </a:t>
+            </a:r>
+            <a:r>
+              <a:rPr lang="ru-RU" dirty="0" err="1"/>
+              <a:t>AckNum</a:t>
+            </a:r>
+            <a:r>
+              <a:rPr lang="ru-RU" dirty="0"/>
+              <a:t> = 121.</a:t>
+            </a:r>
+          </a:p>
+        </p:txBody>
+      </p:sp>
+    </p:spTree>
+    <p:extLst>
+      <p:ext uri="{BB962C8B-B14F-4D97-AF65-F5344CB8AC3E}">
+        <p14:creationId xmlns:p14="http://schemas.microsoft.com/office/powerpoint/2010/main" val="2567949962"/>
+      </p:ext>
+    </p:extLst>
+  </p:cSld>
+  <p:clrMapOvr>
+    <a:masterClrMapping/>
+  </p:clrMapOvr>
+  <p:timing>
+    <p:tnLst>
+      <p:par>
+        <p:cTn id="1" dur="indefinite" restart="never" nodeType="tmRoot"/>
+      </p:par>
+    </p:tnLst>
+  </p:timing>
+</p:sld>
+</file>
+
 <file path=ppt/slides/slide4.xml><?xml version="1.0" encoding="utf-8"?>
 <p:sld xmlns:a="http://schemas.openxmlformats.org/drawingml/2006/main" xmlns:r="http://schemas.openxmlformats.org/officeDocument/2006/relationships" xmlns:p="http://schemas.openxmlformats.org/presentationml/2006/main">
   <p:cSld>
@@ -6455,6 +8166,806 @@
     <p:extLst>
       <p:ext uri="{BB962C8B-B14F-4D97-AF65-F5344CB8AC3E}">
         <p14:creationId xmlns:p14="http://schemas.microsoft.com/office/powerpoint/2010/main" val="307126637"/>
+      </p:ext>
+    </p:extLst>
+  </p:cSld>
+  <p:clrMapOvr>
+    <a:masterClrMapping/>
+  </p:clrMapOvr>
+  <p:timing>
+    <p:tnLst>
+      <p:par>
+        <p:cTn id="1" dur="indefinite" restart="never" nodeType="tmRoot"/>
+      </p:par>
+    </p:tnLst>
+  </p:timing>
+</p:sld>
+</file>
+
+<file path=ppt/slides/slide40.xml><?xml version="1.0" encoding="utf-8"?>
+<p:sld xmlns:a="http://schemas.openxmlformats.org/drawingml/2006/main" xmlns:r="http://schemas.openxmlformats.org/officeDocument/2006/relationships" xmlns:p="http://schemas.openxmlformats.org/presentationml/2006/main">
+  <p:cSld>
+    <p:spTree>
+      <p:nvGrpSpPr>
+        <p:cNvPr id="1" name=""/>
+        <p:cNvGrpSpPr/>
+        <p:nvPr/>
+      </p:nvGrpSpPr>
+      <p:grpSpPr>
+        <a:xfrm>
+          <a:off x="0" y="0"/>
+          <a:ext cx="0" cy="0"/>
+          <a:chOff x="0" y="0"/>
+          <a:chExt cx="0" cy="0"/>
+        </a:xfrm>
+      </p:grpSpPr>
+      <p:sp>
+        <p:nvSpPr>
+          <p:cNvPr id="2" name="Заголовок 1"/>
+          <p:cNvSpPr>
+            <a:spLocks noGrp="1"/>
+          </p:cNvSpPr>
+          <p:nvPr>
+            <p:ph type="title"/>
+          </p:nvPr>
+        </p:nvSpPr>
+        <p:spPr/>
+        <p:txBody>
+          <a:bodyPr/>
+          <a:lstStyle/>
+          <a:p>
+            <a:r>
+              <a:rPr lang="en-US" b="1" dirty="0"/>
+              <a:t>TCP SACK и Head-of-Line Blocking</a:t>
+            </a:r>
+          </a:p>
+        </p:txBody>
+      </p:sp>
+      <p:sp>
+        <p:nvSpPr>
+          <p:cNvPr id="3" name="Объект 2"/>
+          <p:cNvSpPr>
+            <a:spLocks noGrp="1"/>
+          </p:cNvSpPr>
+          <p:nvPr>
+            <p:ph idx="1"/>
+          </p:nvPr>
+        </p:nvSpPr>
+        <p:spPr/>
+        <p:txBody>
+          <a:bodyPr>
+            <a:normAutofit fontScale="92500" lnSpcReduction="10000"/>
+          </a:bodyPr>
+          <a:lstStyle/>
+          <a:p>
+            <a:pPr marL="0" indent="0">
+              <a:buNone/>
+            </a:pPr>
+            <a:r>
+              <a:rPr lang="ru-RU" dirty="0"/>
+              <a:t>Выберите все верные утверждения о механизме TCP </a:t>
+            </a:r>
+            <a:r>
+              <a:rPr lang="ru-RU" dirty="0" err="1"/>
+              <a:t>Selective</a:t>
+            </a:r>
+            <a:r>
+              <a:rPr lang="ru-RU" dirty="0"/>
+              <a:t> </a:t>
+            </a:r>
+            <a:r>
+              <a:rPr lang="ru-RU" dirty="0" err="1"/>
+              <a:t>Acknowledgment</a:t>
+            </a:r>
+            <a:r>
+              <a:rPr lang="ru-RU" dirty="0"/>
+              <a:t> (SACK</a:t>
+            </a:r>
+            <a:r>
+              <a:rPr lang="ru-RU" dirty="0" smtClean="0"/>
+              <a:t>):</a:t>
+            </a:r>
+            <a:endParaRPr lang="ru-RU" dirty="0"/>
+          </a:p>
+          <a:p>
+            <a:pPr marL="0" indent="0">
+              <a:buNone/>
+            </a:pPr>
+            <a:r>
+              <a:rPr lang="ru-RU" dirty="0"/>
+              <a:t> А) Позволяет передавать в заголовке TCP блоки с номерами диапазонов байт, которые уже приняты не по порядку.</a:t>
+            </a:r>
+          </a:p>
+          <a:p>
+            <a:pPr marL="0" indent="0">
+              <a:buNone/>
+            </a:pPr>
+            <a:r>
+              <a:rPr lang="ru-RU" dirty="0"/>
+              <a:t> Б) Полностью заменяет собой стандартный заголовок TCP, уменьшая накладные расходы.</a:t>
+            </a:r>
+          </a:p>
+          <a:p>
+            <a:pPr marL="0" indent="0">
+              <a:buNone/>
+            </a:pPr>
+            <a:r>
+              <a:rPr lang="ru-RU" dirty="0"/>
+              <a:t> В) Предотвращает ненужную повторную отправку тех сегментов, которые уже успешно дошли, устраняя задержки из-за блокировки головы очереди.</a:t>
+            </a:r>
+          </a:p>
+          <a:p>
+            <a:pPr marL="0" indent="0">
+              <a:buNone/>
+            </a:pPr>
+            <a:r>
+              <a:rPr lang="ru-RU" dirty="0"/>
+              <a:t> Г) Может быть включен в любой момент сессии без предварительного согласования в SYN-пакетах.</a:t>
+            </a:r>
+          </a:p>
+        </p:txBody>
+      </p:sp>
+    </p:spTree>
+    <p:extLst>
+      <p:ext uri="{BB962C8B-B14F-4D97-AF65-F5344CB8AC3E}">
+        <p14:creationId xmlns:p14="http://schemas.microsoft.com/office/powerpoint/2010/main" val="3980470030"/>
+      </p:ext>
+    </p:extLst>
+  </p:cSld>
+  <p:clrMapOvr>
+    <a:masterClrMapping/>
+  </p:clrMapOvr>
+  <p:timing>
+    <p:tnLst>
+      <p:par>
+        <p:cTn id="1" dur="indefinite" restart="never" nodeType="tmRoot"/>
+      </p:par>
+    </p:tnLst>
+  </p:timing>
+</p:sld>
+</file>
+
+<file path=ppt/slides/slide41.xml><?xml version="1.0" encoding="utf-8"?>
+<p:sld xmlns:a="http://schemas.openxmlformats.org/drawingml/2006/main" xmlns:r="http://schemas.openxmlformats.org/officeDocument/2006/relationships" xmlns:p="http://schemas.openxmlformats.org/presentationml/2006/main">
+  <p:cSld>
+    <p:spTree>
+      <p:nvGrpSpPr>
+        <p:cNvPr id="1" name=""/>
+        <p:cNvGrpSpPr/>
+        <p:nvPr/>
+      </p:nvGrpSpPr>
+      <p:grpSpPr>
+        <a:xfrm>
+          <a:off x="0" y="0"/>
+          <a:ext cx="0" cy="0"/>
+          <a:chOff x="0" y="0"/>
+          <a:chExt cx="0" cy="0"/>
+        </a:xfrm>
+      </p:grpSpPr>
+      <p:sp>
+        <p:nvSpPr>
+          <p:cNvPr id="2" name="Заголовок 1"/>
+          <p:cNvSpPr>
+            <a:spLocks noGrp="1"/>
+          </p:cNvSpPr>
+          <p:nvPr>
+            <p:ph type="title"/>
+          </p:nvPr>
+        </p:nvSpPr>
+        <p:spPr/>
+        <p:txBody>
+          <a:bodyPr/>
+          <a:lstStyle/>
+          <a:p>
+            <a:pPr marL="0" indent="0"/>
+            <a:r>
+              <a:rPr lang="ru-RU" dirty="0"/>
+              <a:t>Расчёт эффективного окна отправки (</a:t>
+            </a:r>
+            <a:r>
+              <a:rPr lang="ru-RU" dirty="0" err="1"/>
+              <a:t>Flow</a:t>
+            </a:r>
+            <a:r>
+              <a:rPr lang="ru-RU" dirty="0"/>
+              <a:t> </a:t>
+            </a:r>
+            <a:r>
+              <a:rPr lang="ru-RU" dirty="0" err="1"/>
+              <a:t>Control</a:t>
+            </a:r>
+            <a:r>
+              <a:rPr lang="ru-RU" dirty="0"/>
+              <a:t> </a:t>
+            </a:r>
+            <a:r>
+              <a:rPr lang="ru-RU" dirty="0" err="1"/>
+              <a:t>vs</a:t>
+            </a:r>
+            <a:r>
+              <a:rPr lang="ru-RU" dirty="0"/>
+              <a:t> </a:t>
+            </a:r>
+            <a:r>
+              <a:rPr lang="ru-RU" dirty="0" err="1"/>
+              <a:t>Congestion</a:t>
+            </a:r>
+            <a:r>
+              <a:rPr lang="ru-RU" dirty="0"/>
+              <a:t> </a:t>
+            </a:r>
+            <a:r>
+              <a:rPr lang="ru-RU" dirty="0" err="1"/>
+              <a:t>Control</a:t>
+            </a:r>
+            <a:r>
+              <a:rPr lang="ru-RU" dirty="0"/>
+              <a:t>)</a:t>
+            </a:r>
+            <a:endParaRPr lang="ru-RU" dirty="0"/>
+          </a:p>
+        </p:txBody>
+      </p:sp>
+      <p:sp>
+        <p:nvSpPr>
+          <p:cNvPr id="3" name="Объект 2"/>
+          <p:cNvSpPr>
+            <a:spLocks noGrp="1"/>
+          </p:cNvSpPr>
+          <p:nvPr>
+            <p:ph idx="1"/>
+          </p:nvPr>
+        </p:nvSpPr>
+        <p:spPr/>
+        <p:txBody>
+          <a:bodyPr>
+            <a:normAutofit fontScale="92500"/>
+          </a:bodyPr>
+          <a:lstStyle/>
+          <a:p>
+            <a:pPr marL="0" indent="0">
+              <a:buNone/>
+            </a:pPr>
+            <a:r>
+              <a:rPr lang="ru-RU" dirty="0" smtClean="0"/>
+              <a:t>Отправитель </a:t>
+            </a:r>
+            <a:r>
+              <a:rPr lang="ru-RU" dirty="0"/>
+              <a:t>собирается передать данные в сеть</a:t>
+            </a:r>
+            <a:r>
+              <a:rPr lang="ru-RU" dirty="0" smtClean="0"/>
+              <a:t>:</a:t>
+            </a:r>
+            <a:endParaRPr lang="ru-RU" dirty="0"/>
+          </a:p>
+          <a:p>
+            <a:r>
+              <a:rPr lang="ru-RU" dirty="0"/>
+              <a:t>Окно получателя (буфер приёмника, RWND) = 64 КБ</a:t>
+            </a:r>
+          </a:p>
+          <a:p>
+            <a:r>
+              <a:rPr lang="ru-RU" dirty="0"/>
+              <a:t>Окно перегрузки сети (оценка канала отправителем, CWND) = 16 КБ</a:t>
+            </a:r>
+          </a:p>
+          <a:p>
+            <a:pPr marL="0" indent="0">
+              <a:buNone/>
+            </a:pPr>
+            <a:r>
+              <a:rPr lang="ru-RU" dirty="0"/>
+              <a:t>Вопрос: Какой максимальный объем неподтвержденных данных отправитель имеет право отправить в сеть в данный момент</a:t>
+            </a:r>
+            <a:r>
+              <a:rPr lang="ru-RU" dirty="0" smtClean="0"/>
+              <a:t>?</a:t>
+            </a:r>
+            <a:endParaRPr lang="ru-RU" dirty="0"/>
+          </a:p>
+          <a:p>
+            <a:pPr marL="0" indent="0">
+              <a:buNone/>
+            </a:pPr>
+            <a:r>
+              <a:rPr lang="ru-RU" dirty="0"/>
+              <a:t>А) 64 КБ</a:t>
+            </a:r>
+          </a:p>
+          <a:p>
+            <a:pPr marL="0" indent="0">
+              <a:buNone/>
+            </a:pPr>
+            <a:r>
+              <a:rPr lang="ru-RU" dirty="0"/>
+              <a:t>Б) 80 КБ (64 + 16)</a:t>
+            </a:r>
+          </a:p>
+          <a:p>
+            <a:pPr marL="0" indent="0">
+              <a:buNone/>
+            </a:pPr>
+            <a:r>
+              <a:rPr lang="ru-RU" dirty="0"/>
+              <a:t>В) 16 КБ</a:t>
+            </a:r>
+          </a:p>
+          <a:p>
+            <a:pPr marL="0" indent="0">
+              <a:buNone/>
+            </a:pPr>
+            <a:r>
+              <a:rPr lang="ru-RU" dirty="0"/>
+              <a:t>Г) 48 КБ (64 - 16)</a:t>
+            </a:r>
+          </a:p>
+        </p:txBody>
+      </p:sp>
+    </p:spTree>
+    <p:extLst>
+      <p:ext uri="{BB962C8B-B14F-4D97-AF65-F5344CB8AC3E}">
+        <p14:creationId xmlns:p14="http://schemas.microsoft.com/office/powerpoint/2010/main" val="3323604047"/>
+      </p:ext>
+    </p:extLst>
+  </p:cSld>
+  <p:clrMapOvr>
+    <a:masterClrMapping/>
+  </p:clrMapOvr>
+  <p:timing>
+    <p:tnLst>
+      <p:par>
+        <p:cTn id="1" dur="indefinite" restart="never" nodeType="tmRoot"/>
+      </p:par>
+    </p:tnLst>
+  </p:timing>
+</p:sld>
+</file>
+
+<file path=ppt/slides/slide42.xml><?xml version="1.0" encoding="utf-8"?>
+<p:sld xmlns:a="http://schemas.openxmlformats.org/drawingml/2006/main" xmlns:r="http://schemas.openxmlformats.org/officeDocument/2006/relationships" xmlns:p="http://schemas.openxmlformats.org/presentationml/2006/main">
+  <p:cSld>
+    <p:spTree>
+      <p:nvGrpSpPr>
+        <p:cNvPr id="1" name=""/>
+        <p:cNvGrpSpPr/>
+        <p:nvPr/>
+      </p:nvGrpSpPr>
+      <p:grpSpPr>
+        <a:xfrm>
+          <a:off x="0" y="0"/>
+          <a:ext cx="0" cy="0"/>
+          <a:chOff x="0" y="0"/>
+          <a:chExt cx="0" cy="0"/>
+        </a:xfrm>
+      </p:grpSpPr>
+      <p:sp>
+        <p:nvSpPr>
+          <p:cNvPr id="2" name="Заголовок 1"/>
+          <p:cNvSpPr>
+            <a:spLocks noGrp="1"/>
+          </p:cNvSpPr>
+          <p:nvPr>
+            <p:ph type="title"/>
+          </p:nvPr>
+        </p:nvSpPr>
+        <p:spPr/>
+        <p:txBody>
+          <a:bodyPr/>
+          <a:lstStyle/>
+          <a:p>
+            <a:r>
+              <a:rPr lang="af-ZA" b="1" dirty="0"/>
+              <a:t>TCP Window </a:t>
+            </a:r>
+            <a:r>
+              <a:rPr lang="af-ZA" b="1" dirty="0" smtClean="0"/>
+              <a:t>Scaling</a:t>
+            </a:r>
+            <a:endParaRPr lang="ru-RU" dirty="0"/>
+          </a:p>
+        </p:txBody>
+      </p:sp>
+      <p:sp>
+        <p:nvSpPr>
+          <p:cNvPr id="3" name="Объект 2"/>
+          <p:cNvSpPr>
+            <a:spLocks noGrp="1"/>
+          </p:cNvSpPr>
+          <p:nvPr>
+            <p:ph idx="1"/>
+          </p:nvPr>
+        </p:nvSpPr>
+        <p:spPr/>
+        <p:txBody>
+          <a:bodyPr/>
+          <a:lstStyle/>
+          <a:p>
+            <a:pPr marL="0" indent="0">
+              <a:buNone/>
+            </a:pPr>
+            <a:r>
+              <a:rPr lang="ru-RU" dirty="0"/>
+              <a:t>Поле </a:t>
+            </a:r>
+            <a:r>
+              <a:rPr lang="ru-RU" dirty="0" err="1"/>
+              <a:t>Window</a:t>
+            </a:r>
+            <a:r>
+              <a:rPr lang="ru-RU" dirty="0"/>
+              <a:t> </a:t>
+            </a:r>
+            <a:r>
+              <a:rPr lang="ru-RU" dirty="0" err="1"/>
+              <a:t>Size</a:t>
+            </a:r>
+            <a:r>
+              <a:rPr lang="ru-RU" dirty="0"/>
+              <a:t> в заголовке TCP имеет фиксированный размер 16 бит (максимум ~65 КБ). Почему этого стало не хватать в современных сетях</a:t>
+            </a:r>
+            <a:r>
+              <a:rPr lang="ru-RU" dirty="0" smtClean="0"/>
+              <a:t>?</a:t>
+            </a:r>
+            <a:endParaRPr lang="ru-RU" dirty="0"/>
+          </a:p>
+          <a:p>
+            <a:pPr marL="0" indent="0">
+              <a:buNone/>
+            </a:pPr>
+            <a:r>
+              <a:rPr lang="ru-RU" dirty="0"/>
+              <a:t>А) Увеличился BDP (</a:t>
+            </a:r>
+            <a:r>
+              <a:rPr lang="ru-RU" dirty="0" err="1"/>
+              <a:t>Bandwidth-Delay</a:t>
+            </a:r>
+            <a:r>
+              <a:rPr lang="ru-RU" dirty="0"/>
+              <a:t> </a:t>
+            </a:r>
+            <a:r>
+              <a:rPr lang="ru-RU" dirty="0" err="1"/>
+              <a:t>Product</a:t>
+            </a:r>
+            <a:r>
+              <a:rPr lang="ru-RU" dirty="0"/>
+              <a:t>) — пропускная способность и задержка каналов требуют держать в "трубе" мегабайты неподтвержденных данных.</a:t>
+            </a:r>
+          </a:p>
+          <a:p>
+            <a:pPr marL="0" indent="0">
+              <a:buNone/>
+            </a:pPr>
+            <a:r>
+              <a:rPr lang="ru-RU" dirty="0"/>
+              <a:t>Б) В интернете закончились свободные IP-адреса.</a:t>
+            </a:r>
+          </a:p>
+          <a:p>
+            <a:pPr marL="0" indent="0">
+              <a:buNone/>
+            </a:pPr>
+            <a:r>
+              <a:rPr lang="ru-RU" dirty="0"/>
+              <a:t>В) Сегменты стали дробиться на уровне IP.</a:t>
+            </a:r>
+          </a:p>
+        </p:txBody>
+      </p:sp>
+    </p:spTree>
+    <p:extLst>
+      <p:ext uri="{BB962C8B-B14F-4D97-AF65-F5344CB8AC3E}">
+        <p14:creationId xmlns:p14="http://schemas.microsoft.com/office/powerpoint/2010/main" val="3560264782"/>
+      </p:ext>
+    </p:extLst>
+  </p:cSld>
+  <p:clrMapOvr>
+    <a:masterClrMapping/>
+  </p:clrMapOvr>
+  <p:timing>
+    <p:tnLst>
+      <p:par>
+        <p:cTn id="1" dur="indefinite" restart="never" nodeType="tmRoot"/>
+      </p:par>
+    </p:tnLst>
+  </p:timing>
+</p:sld>
+</file>
+
+<file path=ppt/slides/slide43.xml><?xml version="1.0" encoding="utf-8"?>
+<p:sld xmlns:a="http://schemas.openxmlformats.org/drawingml/2006/main" xmlns:r="http://schemas.openxmlformats.org/officeDocument/2006/relationships" xmlns:p="http://schemas.openxmlformats.org/presentationml/2006/main">
+  <p:cSld>
+    <p:spTree>
+      <p:nvGrpSpPr>
+        <p:cNvPr id="1" name=""/>
+        <p:cNvGrpSpPr/>
+        <p:nvPr/>
+      </p:nvGrpSpPr>
+      <p:grpSpPr>
+        <a:xfrm>
+          <a:off x="0" y="0"/>
+          <a:ext cx="0" cy="0"/>
+          <a:chOff x="0" y="0"/>
+          <a:chExt cx="0" cy="0"/>
+        </a:xfrm>
+      </p:grpSpPr>
+      <p:sp>
+        <p:nvSpPr>
+          <p:cNvPr id="2" name="Заголовок 1"/>
+          <p:cNvSpPr>
+            <a:spLocks noGrp="1"/>
+          </p:cNvSpPr>
+          <p:nvPr>
+            <p:ph type="title"/>
+          </p:nvPr>
+        </p:nvSpPr>
+        <p:spPr/>
+        <p:txBody>
+          <a:bodyPr/>
+          <a:lstStyle/>
+          <a:p>
+            <a:r>
+              <a:rPr lang="af-ZA" b="1" dirty="0"/>
+              <a:t>TCP </a:t>
+            </a:r>
+            <a:r>
+              <a:rPr lang="ru-RU" b="1" dirty="0"/>
+              <a:t>или </a:t>
+            </a:r>
+            <a:r>
+              <a:rPr lang="af-ZA" b="1" dirty="0"/>
+              <a:t>UDP</a:t>
+            </a:r>
+            <a:r>
+              <a:rPr lang="af-ZA" b="1" dirty="0" smtClean="0"/>
+              <a:t>?</a:t>
+            </a:r>
+            <a:endParaRPr lang="ru-RU" dirty="0"/>
+          </a:p>
+        </p:txBody>
+      </p:sp>
+      <p:sp>
+        <p:nvSpPr>
+          <p:cNvPr id="3" name="Объект 2"/>
+          <p:cNvSpPr>
+            <a:spLocks noGrp="1"/>
+          </p:cNvSpPr>
+          <p:nvPr>
+            <p:ph idx="1"/>
+          </p:nvPr>
+        </p:nvSpPr>
+        <p:spPr/>
+        <p:txBody>
+          <a:bodyPr>
+            <a:normAutofit lnSpcReduction="10000"/>
+          </a:bodyPr>
+          <a:lstStyle/>
+          <a:p>
+            <a:pPr marL="0" indent="0">
+              <a:buNone/>
+            </a:pPr>
+            <a:r>
+              <a:rPr lang="ru-RU" dirty="0"/>
+              <a:t>Выберите наиболее подходящий транспортный протокол для каждого кейса</a:t>
+            </a:r>
+            <a:r>
+              <a:rPr lang="ru-RU" dirty="0" smtClean="0"/>
+              <a:t>:</a:t>
+            </a:r>
+            <a:endParaRPr lang="ru-RU" dirty="0"/>
+          </a:p>
+          <a:p>
+            <a:pPr marL="514350" indent="-514350">
+              <a:buFont typeface="+mj-lt"/>
+              <a:buAutoNum type="arabicPeriod"/>
+            </a:pPr>
+            <a:r>
+              <a:rPr lang="ru-RU" dirty="0"/>
+              <a:t>Онлайн-</a:t>
+            </a:r>
+            <a:r>
+              <a:rPr lang="ru-RU" dirty="0" err="1"/>
+              <a:t>шутер</a:t>
+            </a:r>
+            <a:r>
+              <a:rPr lang="ru-RU" dirty="0"/>
+              <a:t> от первого лица (критически важен минимальный </a:t>
+            </a:r>
+            <a:r>
+              <a:rPr lang="ru-RU" dirty="0" err="1"/>
+              <a:t>пинг</a:t>
+            </a:r>
+            <a:r>
+              <a:rPr lang="ru-RU" dirty="0"/>
+              <a:t> обновления позиций игроков): [ TCP / UDP ]</a:t>
+            </a:r>
+          </a:p>
+          <a:p>
+            <a:pPr marL="514350" indent="-514350">
+              <a:buFont typeface="+mj-lt"/>
+              <a:buAutoNum type="arabicPeriod"/>
+            </a:pPr>
+            <a:r>
+              <a:rPr lang="ru-RU" dirty="0"/>
+              <a:t>Перевод денег через банковский API (потеря или дублирование запроса недопустимы): [ TCP / UDP ]</a:t>
+            </a:r>
+          </a:p>
+          <a:p>
+            <a:pPr marL="514350" indent="-514350">
+              <a:buFont typeface="+mj-lt"/>
+              <a:buAutoNum type="arabicPeriod"/>
+            </a:pPr>
+            <a:r>
+              <a:rPr lang="ru-RU" dirty="0"/>
+              <a:t>Загрузка ISO-образа операционной системы размером 4 ГБ: [ TCP / UDP ]</a:t>
+            </a:r>
+          </a:p>
+          <a:p>
+            <a:pPr marL="514350" indent="-514350">
+              <a:buFont typeface="+mj-lt"/>
+              <a:buAutoNum type="arabicPeriod"/>
+            </a:pPr>
+            <a:r>
+              <a:rPr lang="ru-RU" dirty="0"/>
+              <a:t>Быстрый </a:t>
+            </a:r>
+            <a:r>
+              <a:rPr lang="ru-RU" dirty="0" err="1"/>
+              <a:t>резолвинг</a:t>
+            </a:r>
+            <a:r>
+              <a:rPr lang="ru-RU" dirty="0"/>
+              <a:t> доменного имени (DNS) в 1 пакет «запрос-ответ»: [ TCP / UDP ]</a:t>
+            </a:r>
+          </a:p>
+        </p:txBody>
+      </p:sp>
+    </p:spTree>
+    <p:extLst>
+      <p:ext uri="{BB962C8B-B14F-4D97-AF65-F5344CB8AC3E}">
+        <p14:creationId xmlns:p14="http://schemas.microsoft.com/office/powerpoint/2010/main" val="240313139"/>
+      </p:ext>
+    </p:extLst>
+  </p:cSld>
+  <p:clrMapOvr>
+    <a:masterClrMapping/>
+  </p:clrMapOvr>
+  <p:timing>
+    <p:tnLst>
+      <p:par>
+        <p:cTn id="1" dur="indefinite" restart="never" nodeType="tmRoot"/>
+      </p:par>
+    </p:tnLst>
+  </p:timing>
+</p:sld>
+</file>
+
+<file path=ppt/slides/slide44.xml><?xml version="1.0" encoding="utf-8"?>
+<p:sld xmlns:a="http://schemas.openxmlformats.org/drawingml/2006/main" xmlns:r="http://schemas.openxmlformats.org/officeDocument/2006/relationships" xmlns:p="http://schemas.openxmlformats.org/presentationml/2006/main">
+  <p:cSld>
+    <p:spTree>
+      <p:nvGrpSpPr>
+        <p:cNvPr id="1" name=""/>
+        <p:cNvGrpSpPr/>
+        <p:nvPr/>
+      </p:nvGrpSpPr>
+      <p:grpSpPr>
+        <a:xfrm>
+          <a:off x="0" y="0"/>
+          <a:ext cx="0" cy="0"/>
+          <a:chOff x="0" y="0"/>
+          <a:chExt cx="0" cy="0"/>
+        </a:xfrm>
+      </p:grpSpPr>
+      <p:sp>
+        <p:nvSpPr>
+          <p:cNvPr id="2" name="Заголовок 1"/>
+          <p:cNvSpPr>
+            <a:spLocks noGrp="1"/>
+          </p:cNvSpPr>
+          <p:nvPr>
+            <p:ph type="title"/>
+          </p:nvPr>
+        </p:nvSpPr>
+        <p:spPr/>
+        <p:txBody>
+          <a:bodyPr/>
+          <a:lstStyle/>
+          <a:p>
+            <a:pPr marL="0" indent="0"/>
+            <a:r>
+              <a:rPr lang="ru-RU" dirty="0"/>
+              <a:t>Зависание передачи</a:t>
+            </a:r>
+            <a:endParaRPr lang="ru-RU" dirty="0"/>
+          </a:p>
+        </p:txBody>
+      </p:sp>
+      <p:sp>
+        <p:nvSpPr>
+          <p:cNvPr id="3" name="Объект 2"/>
+          <p:cNvSpPr>
+            <a:spLocks noGrp="1"/>
+          </p:cNvSpPr>
+          <p:nvPr>
+            <p:ph idx="1"/>
+          </p:nvPr>
+        </p:nvSpPr>
+        <p:spPr/>
+        <p:txBody>
+          <a:bodyPr/>
+          <a:lstStyle/>
+          <a:p>
+            <a:pPr marL="0" indent="0">
+              <a:buNone/>
+            </a:pPr>
+            <a:r>
+              <a:rPr lang="ru-RU" dirty="0" smtClean="0"/>
+              <a:t>Получатель </a:t>
+            </a:r>
+            <a:r>
+              <a:rPr lang="ru-RU" dirty="0"/>
+              <a:t>отправил сегмент с </a:t>
+            </a:r>
+            <a:r>
+              <a:rPr lang="ru-RU" dirty="0" err="1"/>
+              <a:t>Window</a:t>
+            </a:r>
+            <a:r>
+              <a:rPr lang="ru-RU" dirty="0"/>
+              <a:t> </a:t>
+            </a:r>
+            <a:r>
+              <a:rPr lang="ru-RU" dirty="0" err="1"/>
+              <a:t>Size</a:t>
+            </a:r>
+            <a:r>
+              <a:rPr lang="ru-RU" dirty="0"/>
+              <a:t> = 0 (буфер переполнен). Через некоторое время процесс на стороне получателя вычитал данные из буфера, и окно снова открылось, но сегмент с новым </a:t>
+            </a:r>
+            <a:r>
+              <a:rPr lang="ru-RU" dirty="0" err="1"/>
+              <a:t>Window</a:t>
+            </a:r>
+            <a:r>
+              <a:rPr lang="ru-RU" dirty="0"/>
+              <a:t> </a:t>
+            </a:r>
+            <a:r>
+              <a:rPr lang="ru-RU" dirty="0" err="1"/>
+              <a:t>Size</a:t>
+            </a:r>
+            <a:r>
+              <a:rPr lang="ru-RU" dirty="0"/>
+              <a:t> &gt; 0 потерялся по дороге к отправителю.</a:t>
+            </a:r>
+          </a:p>
+          <a:p>
+            <a:pPr marL="0" indent="0">
+              <a:buNone/>
+            </a:pPr>
+            <a:endParaRPr lang="ru-RU" dirty="0"/>
+          </a:p>
+          <a:p>
+            <a:pPr marL="0" indent="0">
+              <a:buNone/>
+            </a:pPr>
+            <a:r>
+              <a:rPr lang="ru-RU" dirty="0"/>
+              <a:t>Что произойдет в базовом протоколе, если нет специальных мер, и как отправитель выходит из этого «клинча»?</a:t>
+            </a:r>
+          </a:p>
+        </p:txBody>
+      </p:sp>
+    </p:spTree>
+    <p:extLst>
+      <p:ext uri="{BB962C8B-B14F-4D97-AF65-F5344CB8AC3E}">
+        <p14:creationId xmlns:p14="http://schemas.microsoft.com/office/powerpoint/2010/main" val="2294111007"/>
       </p:ext>
     </p:extLst>
   </p:cSld>
